--- a/slides/cei-moral-psychology-results-full-deck.pptx
+++ b/slides/cei-moral-psychology-results-full-deck.pptx
@@ -2,45 +2,45 @@
 <file path=ppt/presentation.xml><?xml version="1.0" encoding="utf-8"?>
 <p:presentation xmlns:p="http://schemas.openxmlformats.org/presentationml/2006/main">
   <p:sldMasterIdLst>
-    <p:sldMasterId xmlns:r="http://schemas.openxmlformats.org/officeDocument/2006/relationships" id="2147483648" r:id="Rf09ab9e306e74108"/>
+    <p:sldMasterId xmlns:r="http://schemas.openxmlformats.org/officeDocument/2006/relationships" id="2147483648" r:id="R30a6b76c27fb4707"/>
   </p:sldMasterIdLst>
   <p:notesMasterIdLst>
-    <p:notesMasterId xmlns:r="http://schemas.openxmlformats.org/officeDocument/2006/relationships" r:id="R0bcfe027e2294179"/>
+    <p:notesMasterId xmlns:r="http://schemas.openxmlformats.org/officeDocument/2006/relationships" r:id="R0b373be268c14482"/>
   </p:notesMasterIdLst>
   <p:sldIdLst>
-    <p:sldId xmlns:r="http://schemas.openxmlformats.org/officeDocument/2006/relationships" id="256" r:id="Rb17243a4df2a4052"/>
-    <p:sldId xmlns:r="http://schemas.openxmlformats.org/officeDocument/2006/relationships" id="257" r:id="R84246e965dc94a00"/>
-    <p:sldId xmlns:r="http://schemas.openxmlformats.org/officeDocument/2006/relationships" id="258" r:id="R39963c98bd4140d2"/>
-    <p:sldId xmlns:r="http://schemas.openxmlformats.org/officeDocument/2006/relationships" id="259" r:id="Rc93fb5639acd4af3"/>
-    <p:sldId xmlns:r="http://schemas.openxmlformats.org/officeDocument/2006/relationships" id="260" r:id="Rcfab52d8ab464892"/>
-    <p:sldId xmlns:r="http://schemas.openxmlformats.org/officeDocument/2006/relationships" id="261" r:id="Rf3bd2f5894d540e0"/>
-    <p:sldId xmlns:r="http://schemas.openxmlformats.org/officeDocument/2006/relationships" id="262" r:id="Ra52d9cae61804e2d"/>
-    <p:sldId xmlns:r="http://schemas.openxmlformats.org/officeDocument/2006/relationships" id="263" r:id="R3d47e4aa43db4f49"/>
-    <p:sldId xmlns:r="http://schemas.openxmlformats.org/officeDocument/2006/relationships" id="264" r:id="Rd67b66c5e1f14af1"/>
-    <p:sldId xmlns:r="http://schemas.openxmlformats.org/officeDocument/2006/relationships" id="265" r:id="Rd62f197d5b254d4e"/>
-    <p:sldId xmlns:r="http://schemas.openxmlformats.org/officeDocument/2006/relationships" id="266" r:id="R41961a4cfeeb4819"/>
-    <p:sldId xmlns:r="http://schemas.openxmlformats.org/officeDocument/2006/relationships" id="267" r:id="R985f81534aba4e1e"/>
-    <p:sldId xmlns:r="http://schemas.openxmlformats.org/officeDocument/2006/relationships" id="268" r:id="R489dbcde4efd4b09"/>
-    <p:sldId xmlns:r="http://schemas.openxmlformats.org/officeDocument/2006/relationships" id="269" r:id="R1ce15211536a4017"/>
-    <p:sldId xmlns:r="http://schemas.openxmlformats.org/officeDocument/2006/relationships" id="270" r:id="R15c72bd0077f4909"/>
-    <p:sldId xmlns:r="http://schemas.openxmlformats.org/officeDocument/2006/relationships" id="271" r:id="R730d16cc42c4417a"/>
-    <p:sldId xmlns:r="http://schemas.openxmlformats.org/officeDocument/2006/relationships" id="272" r:id="R6888cab7507049ac"/>
-    <p:sldId xmlns:r="http://schemas.openxmlformats.org/officeDocument/2006/relationships" id="273" r:id="R07cdb3404c6b4f7a"/>
-    <p:sldId xmlns:r="http://schemas.openxmlformats.org/officeDocument/2006/relationships" id="274" r:id="R4e5ddee0cc0647a7"/>
-    <p:sldId xmlns:r="http://schemas.openxmlformats.org/officeDocument/2006/relationships" id="275" r:id="R4ba1dacdbb6c4ad2"/>
-    <p:sldId xmlns:r="http://schemas.openxmlformats.org/officeDocument/2006/relationships" id="276" r:id="R515712bb2af541ad"/>
-    <p:sldId xmlns:r="http://schemas.openxmlformats.org/officeDocument/2006/relationships" id="277" r:id="R3895ad012106418b"/>
-    <p:sldId xmlns:r="http://schemas.openxmlformats.org/officeDocument/2006/relationships" id="278" r:id="R6938b4e1813041cf"/>
-    <p:sldId xmlns:r="http://schemas.openxmlformats.org/officeDocument/2006/relationships" id="279" r:id="R440fbc20157d4e3f"/>
-    <p:sldId xmlns:r="http://schemas.openxmlformats.org/officeDocument/2006/relationships" id="280" r:id="R5d07db8d810d449b"/>
-    <p:sldId xmlns:r="http://schemas.openxmlformats.org/officeDocument/2006/relationships" id="281" r:id="R10b7ec8ec5a84639"/>
-    <p:sldId xmlns:r="http://schemas.openxmlformats.org/officeDocument/2006/relationships" id="282" r:id="R917a1436b88c4046"/>
-    <p:sldId xmlns:r="http://schemas.openxmlformats.org/officeDocument/2006/relationships" id="283" r:id="R3682ae8b87b04e96"/>
-    <p:sldId xmlns:r="http://schemas.openxmlformats.org/officeDocument/2006/relationships" id="284" r:id="R474aebac7e1c4cba"/>
-    <p:sldId xmlns:r="http://schemas.openxmlformats.org/officeDocument/2006/relationships" id="285" r:id="R18abd608c6f541bd"/>
-    <p:sldId xmlns:r="http://schemas.openxmlformats.org/officeDocument/2006/relationships" id="286" r:id="Rd99a658160ef4a11"/>
-    <p:sldId xmlns:r="http://schemas.openxmlformats.org/officeDocument/2006/relationships" id="287" r:id="R71cd3197fe01480e"/>
-    <p:sldId xmlns:r="http://schemas.openxmlformats.org/officeDocument/2006/relationships" id="288" r:id="R5f96cfec03ba4097"/>
+    <p:sldId xmlns:r="http://schemas.openxmlformats.org/officeDocument/2006/relationships" id="256" r:id="R1a21bbc526824846"/>
+    <p:sldId xmlns:r="http://schemas.openxmlformats.org/officeDocument/2006/relationships" id="257" r:id="R084e5b454cd848eb"/>
+    <p:sldId xmlns:r="http://schemas.openxmlformats.org/officeDocument/2006/relationships" id="258" r:id="R390a3d1ed35d46c0"/>
+    <p:sldId xmlns:r="http://schemas.openxmlformats.org/officeDocument/2006/relationships" id="259" r:id="Rbc9ab89134674290"/>
+    <p:sldId xmlns:r="http://schemas.openxmlformats.org/officeDocument/2006/relationships" id="260" r:id="R6404653cb3a24248"/>
+    <p:sldId xmlns:r="http://schemas.openxmlformats.org/officeDocument/2006/relationships" id="261" r:id="R2254f9cbcfa14d31"/>
+    <p:sldId xmlns:r="http://schemas.openxmlformats.org/officeDocument/2006/relationships" id="262" r:id="Rdb7b7a485e844d19"/>
+    <p:sldId xmlns:r="http://schemas.openxmlformats.org/officeDocument/2006/relationships" id="263" r:id="R6ea415d0a02441a1"/>
+    <p:sldId xmlns:r="http://schemas.openxmlformats.org/officeDocument/2006/relationships" id="264" r:id="R1314c618a5c04788"/>
+    <p:sldId xmlns:r="http://schemas.openxmlformats.org/officeDocument/2006/relationships" id="265" r:id="R159aeeb9013848c4"/>
+    <p:sldId xmlns:r="http://schemas.openxmlformats.org/officeDocument/2006/relationships" id="266" r:id="Re88a922ef0d54f52"/>
+    <p:sldId xmlns:r="http://schemas.openxmlformats.org/officeDocument/2006/relationships" id="267" r:id="R31a1850a5b3f4d23"/>
+    <p:sldId xmlns:r="http://schemas.openxmlformats.org/officeDocument/2006/relationships" id="268" r:id="R6df9b29a0585407b"/>
+    <p:sldId xmlns:r="http://schemas.openxmlformats.org/officeDocument/2006/relationships" id="269" r:id="R4a012ed5078d44cd"/>
+    <p:sldId xmlns:r="http://schemas.openxmlformats.org/officeDocument/2006/relationships" id="270" r:id="Rd66f592f0ec84731"/>
+    <p:sldId xmlns:r="http://schemas.openxmlformats.org/officeDocument/2006/relationships" id="271" r:id="R49c7331d64964ec0"/>
+    <p:sldId xmlns:r="http://schemas.openxmlformats.org/officeDocument/2006/relationships" id="272" r:id="R92d5fa441c2e443e"/>
+    <p:sldId xmlns:r="http://schemas.openxmlformats.org/officeDocument/2006/relationships" id="273" r:id="R188fe4e63cdb4ac1"/>
+    <p:sldId xmlns:r="http://schemas.openxmlformats.org/officeDocument/2006/relationships" id="274" r:id="R3e3c004765b34d86"/>
+    <p:sldId xmlns:r="http://schemas.openxmlformats.org/officeDocument/2006/relationships" id="275" r:id="Ra8c89bdd54ae4374"/>
+    <p:sldId xmlns:r="http://schemas.openxmlformats.org/officeDocument/2006/relationships" id="276" r:id="R5a59dd4d0f0943ab"/>
+    <p:sldId xmlns:r="http://schemas.openxmlformats.org/officeDocument/2006/relationships" id="277" r:id="Rd77019e8ddc24293"/>
+    <p:sldId xmlns:r="http://schemas.openxmlformats.org/officeDocument/2006/relationships" id="278" r:id="Rd29b95e8f8a245d2"/>
+    <p:sldId xmlns:r="http://schemas.openxmlformats.org/officeDocument/2006/relationships" id="279" r:id="Rd32dcce6923b4777"/>
+    <p:sldId xmlns:r="http://schemas.openxmlformats.org/officeDocument/2006/relationships" id="280" r:id="R775c0154056546ca"/>
+    <p:sldId xmlns:r="http://schemas.openxmlformats.org/officeDocument/2006/relationships" id="281" r:id="R16cfe091682e4cc7"/>
+    <p:sldId xmlns:r="http://schemas.openxmlformats.org/officeDocument/2006/relationships" id="282" r:id="R9a54f00d75204052"/>
+    <p:sldId xmlns:r="http://schemas.openxmlformats.org/officeDocument/2006/relationships" id="283" r:id="R3df25e361b434fbd"/>
+    <p:sldId xmlns:r="http://schemas.openxmlformats.org/officeDocument/2006/relationships" id="284" r:id="Rff1fc794c4174944"/>
+    <p:sldId xmlns:r="http://schemas.openxmlformats.org/officeDocument/2006/relationships" id="285" r:id="Ra65225c476484ab8"/>
+    <p:sldId xmlns:r="http://schemas.openxmlformats.org/officeDocument/2006/relationships" id="286" r:id="Rc68235e43ca2405f"/>
+    <p:sldId xmlns:r="http://schemas.openxmlformats.org/officeDocument/2006/relationships" id="287" r:id="R6e5d1ad710db44f7"/>
+    <p:sldId xmlns:r="http://schemas.openxmlformats.org/officeDocument/2006/relationships" id="288" r:id="R428d91a356d54905"/>
   </p:sldIdLst>
   <p:sldSz cx="12192000" cy="6858000"/>
   <p:notesSz cx="6858000" cy="9144000"/>
@@ -1544,7 +1544,7 @@
           </a:p>
           <a:p xmlns:a="http://schemas.openxmlformats.org/drawingml/2006/main">
             <a:r>
-              <a:t>Sources: data/results/common_roster_primary.csv, docs/RESULTS_READOUT.md</a:t>
+              <a:t>Sources: data/results/common_roster_primary.csv, evidence/canonical-audit/CLAIM_BOUNDARIES.md</a:t>
             </a:r>
           </a:p>
         </p:txBody>
@@ -2279,22 +2279,22 @@
           <a:lstStyle xmlns:a="http://schemas.openxmlformats.org/drawingml/2006/main"/>
           <a:p xmlns:a="http://schemas.openxmlformats.org/drawingml/2006/main">
             <a:r>
-              <a:t>Context: This is a CEI research priority, not a model result. It asks which work would reduce the most uncertainty.</a:t>
-            </a:r>
-          </a:p>
-          <a:p xmlns:a="http://schemas.openxmlformats.org/drawingml/2006/main">
-            <a:r>
-              <a:t>How to read: Read from top to bottom.</a:t>
-            </a:r>
-          </a:p>
-          <a:p xmlns:a="http://schemas.openxmlformats.org/drawingml/2006/main">
-            <a:r>
-              <a:t>Meaning: Review parsing, labels, and scoring first. Then add human review before broad new runs.</a:t>
-            </a:r>
-          </a:p>
-          <a:p xmlns:a="http://schemas.openxmlformats.org/drawingml/2006/main">
-            <a:r>
-              <a:t>Limit: This order is our research judgment. Run paid models only after these checks.</a:t>
+              <a:t>Context: These are CEI UniMoral results for the same five models on four tasks.</a:t>
+            </a:r>
+          </a:p>
+          <a:p xmlns:a="http://schemas.openxmlformats.org/drawingml/2006/main">
+            <a:r>
+              <a:t>How to read: Each panel has its own score. A dot is a saved score. A line is its saved 95% range.</a:t>
+            </a:r>
+          </a:p>
+          <a:p xmlns:a="http://schemas.openxmlformats.org/drawingml/2006/main">
+            <a:r>
+              <a:t>Meaning: The highest saved score belongs to different models on different UniMoral tasks.</a:t>
+            </a:r>
+          </a:p>
+          <a:p xmlns:a="http://schemas.openxmlformats.org/drawingml/2006/main">
+            <a:r>
+              <a:t>Limit: Accuracy and text match are different measures. The ranges do not directly test the gap between two models.</a:t>
             </a:r>
           </a:p>
           <a:p xmlns:a="http://schemas.openxmlformats.org/drawingml/2006/main">
@@ -2304,7 +2304,7 @@
           </a:p>
           <a:p xmlns:a="http://schemas.openxmlformats.org/drawingml/2006/main">
             <a:r>
-              <a:t>Sources: evidence/canonical-audit/figures/05_evidence_acquisition_priority.png, evidence/canonical-audit/RERUN_PRIORITY.md</a:t>
+              <a:t>Sources: assets/results/01_common_roster_task_results.png, data/results/common_roster_primary.csv</a:t>
             </a:r>
           </a:p>
         </p:txBody>
@@ -2374,22 +2374,22 @@
           <a:lstStyle xmlns:a="http://schemas.openxmlformats.org/drawingml/2006/main"/>
           <a:p xmlns:a="http://schemas.openxmlformats.org/drawingml/2006/main">
             <a:r>
-              <a:t>Context: These are CEI UniMoral results for the same five models on four tasks.</a:t>
-            </a:r>
-          </a:p>
-          <a:p xmlns:a="http://schemas.openxmlformats.org/drawingml/2006/main">
-            <a:r>
-              <a:t>How to read: Each panel has its own score. A dot is a saved score. A line is its saved 95% range.</a:t>
-            </a:r>
-          </a:p>
-          <a:p xmlns:a="http://schemas.openxmlformats.org/drawingml/2006/main">
-            <a:r>
-              <a:t>Meaning: The highest saved score belongs to different models on different UniMoral tasks.</a:t>
-            </a:r>
-          </a:p>
-          <a:p xmlns:a="http://schemas.openxmlformats.org/drawingml/2006/main">
-            <a:r>
-              <a:t>Limit: Accuracy and text match are different measures. The ranges do not directly test the gap between two models.</a:t>
+              <a:t>Context: These are exploratory CEI UniMoral factor results for Qwen, Gemma, and Llama at three model sizes.</a:t>
+            </a:r>
+          </a:p>
+          <a:p xmlns:a="http://schemas.openxmlformats.org/drawingml/2006/main">
+            <a:r>
+              <a:t>How to read: Move left to right within one family. Each point names the model and its published size.</a:t>
+            </a:r>
+          </a:p>
+          <a:p xmlns:a="http://schemas.openxmlformats.org/drawingml/2006/main">
+            <a:r>
+              <a:t>Meaning: Gemma rises at both size steps. Qwen and Llama change direction across the three saved sizes.</a:t>
+            </a:r>
+          </a:p>
+          <a:p xmlns:a="http://schemas.openxmlformats.org/drawingml/2006/main">
+            <a:r>
+              <a:t>Limit: The models differ in training as well as size, so size alone may not explain the scores. The available files have no saved uncertainty ranges or raw run archive.</a:t>
             </a:r>
           </a:p>
           <a:p xmlns:a="http://schemas.openxmlformats.org/drawingml/2006/main">
@@ -2399,7 +2399,7 @@
           </a:p>
           <a:p xmlns:a="http://schemas.openxmlformats.org/drawingml/2006/main">
             <a:r>
-              <a:t>Sources: assets/results/01_common_roster_task_results.png, data/results/common_roster_primary.csv</a:t>
+              <a:t>Sources: assets/results/03_size_factor_detail.png, data/results/size_task_points.csv</a:t>
             </a:r>
           </a:p>
         </p:txBody>
@@ -2469,22 +2469,22 @@
           <a:lstStyle xmlns:a="http://schemas.openxmlformats.org/drawingml/2006/main"/>
           <a:p xmlns:a="http://schemas.openxmlformats.org/drawingml/2006/main">
             <a:r>
-              <a:t>Context: These are exploratory CEI UniMoral factor results for Qwen, Gemma, and Llama at three model sizes.</a:t>
-            </a:r>
-          </a:p>
-          <a:p xmlns:a="http://schemas.openxmlformats.org/drawingml/2006/main">
-            <a:r>
-              <a:t>How to read: Move left to right within one family. Each point names the model and its published size.</a:t>
-            </a:r>
-          </a:p>
-          <a:p xmlns:a="http://schemas.openxmlformats.org/drawingml/2006/main">
-            <a:r>
-              <a:t>Meaning: Gemma rises at both size steps. Qwen and Llama change direction across the three saved sizes.</a:t>
-            </a:r>
-          </a:p>
-          <a:p xmlns:a="http://schemas.openxmlformats.org/drawingml/2006/main">
-            <a:r>
-              <a:t>Limit: The models differ in training as well as size, so size alone may not explain the scores. The available files have no saved uncertainty ranges or raw run archive.</a:t>
+              <a:t>Context: These are exploratory CEI ValuePrism valence results across saved Llama model sizes.</a:t>
+            </a:r>
+          </a:p>
+          <a:p xmlns:a="http://schemas.openxmlformats.org/drawingml/2006/main">
+            <a:r>
+              <a:t>How to read: Move left to right along the Llama line. Each point names the model and its published size.</a:t>
+            </a:r>
+          </a:p>
+          <a:p xmlns:a="http://schemas.openxmlformats.org/drawingml/2006/main">
+            <a:r>
+              <a:t>Meaning: The complete Llama path falls from 3B to 8B, then rises at 70B.</a:t>
+            </a:r>
+          </a:p>
+          <a:p xmlns:a="http://schemas.openxmlformats.org/drawingml/2006/main">
+            <a:r>
+              <a:t>Limit: Only Llama has results at all three sizes. Qwen and Gemma do not. CEI ValuePrism is not the Value Kaleidoscope paper test. The available files have no saved uncertainty ranges or raw run archive.</a:t>
             </a:r>
           </a:p>
           <a:p xmlns:a="http://schemas.openxmlformats.org/drawingml/2006/main">
@@ -2494,7 +2494,7 @@
           </a:p>
           <a:p xmlns:a="http://schemas.openxmlformats.org/drawingml/2006/main">
             <a:r>
-              <a:t>Sources: assets/results/03_size_factor_detail.png, data/results/size_task_points.csv</a:t>
+              <a:t>Sources: assets/results/03_size_valence_detail.png, data/results/size_task_points.csv</a:t>
             </a:r>
           </a:p>
         </p:txBody>
@@ -2659,22 +2659,22 @@
           <a:lstStyle xmlns:a="http://schemas.openxmlformats.org/drawingml/2006/main"/>
           <a:p xmlns:a="http://schemas.openxmlformats.org/drawingml/2006/main">
             <a:r>
-              <a:t>Context: These are exploratory CEI ValuePrism valence results across saved Llama model sizes.</a:t>
-            </a:r>
-          </a:p>
-          <a:p xmlns:a="http://schemas.openxmlformats.org/drawingml/2006/main">
-            <a:r>
-              <a:t>How to read: Move left to right along the Llama line. Each point names the model and its published size.</a:t>
-            </a:r>
-          </a:p>
-          <a:p xmlns:a="http://schemas.openxmlformats.org/drawingml/2006/main">
-            <a:r>
-              <a:t>Meaning: The complete Llama path falls from 3B to 8B, then rises at 70B.</a:t>
-            </a:r>
-          </a:p>
-          <a:p xmlns:a="http://schemas.openxmlformats.org/drawingml/2006/main">
-            <a:r>
-              <a:t>Limit: Only Llama has results at all three sizes. Qwen and Gemma do not. CEI ValuePrism is not the Value Kaleidoscope paper test. The available files have no saved uncertainty ranges or raw run archive.</a:t>
+              <a:t>Context: These are exploratory CEI UniMoral factor results across saved Qwen and DeepSeek release quarters.</a:t>
+            </a:r>
+          </a:p>
+          <a:p xmlns:a="http://schemas.openxmlformats.org/drawingml/2006/main">
+            <a:r>
+              <a:t>How to read: Move left to right within one family. Each point names the model and its published size.</a:t>
+            </a:r>
+          </a:p>
+          <a:p xmlns:a="http://schemas.openxmlformats.org/drawingml/2006/main">
+            <a:r>
+              <a:t>Meaning: From first to last, DeepSeek is lower by .038. Qwen changes by only .002.</a:t>
+            </a:r>
+          </a:p>
+          <a:p xmlns:a="http://schemas.openxmlformats.org/drawingml/2006/main">
+            <a:r>
+              <a:t>Limit: Release quarter is model metadata, not test time, and does not explain why the score changed. All scores were tested in May 2026 and have no saved uncertainty ranges.</a:t>
             </a:r>
           </a:p>
           <a:p xmlns:a="http://schemas.openxmlformats.org/drawingml/2006/main">
@@ -2684,7 +2684,7 @@
           </a:p>
           <a:p xmlns:a="http://schemas.openxmlformats.org/drawingml/2006/main">
             <a:r>
-              <a:t>Sources: assets/results/03_size_valence_detail.png, data/results/size_task_points.csv</a:t>
+              <a:t>Sources: assets/results/04_release_factor_detail.png, data/results/release_period_task_points.csv</a:t>
             </a:r>
           </a:p>
         </p:txBody>
@@ -2754,7 +2754,7 @@
           <a:lstStyle xmlns:a="http://schemas.openxmlformats.org/drawingml/2006/main"/>
           <a:p xmlns:a="http://schemas.openxmlformats.org/drawingml/2006/main">
             <a:r>
-              <a:t>Context: These are exploratory CEI UniMoral factor results across saved Qwen and DeepSeek release quarters.</a:t>
+              <a:t>Context: These are exploratory CEI ValuePrism valence results across saved Qwen and DeepSeek release quarters.</a:t>
             </a:r>
           </a:p>
           <a:p xmlns:a="http://schemas.openxmlformats.org/drawingml/2006/main">
@@ -2764,12 +2764,12 @@
           </a:p>
           <a:p xmlns:a="http://schemas.openxmlformats.org/drawingml/2006/main">
             <a:r>
-              <a:t>Meaning: From first to last, DeepSeek is lower by .038. Qwen changes by only .002.</a:t>
-            </a:r>
-          </a:p>
-          <a:p xmlns:a="http://schemas.openxmlformats.org/drawingml/2006/main">
-            <a:r>
-              <a:t>Limit: Release quarter is model metadata, not test time, and does not explain why the score changed. All scores were tested in May 2026 and have no saved uncertainty ranges.</a:t>
+              <a:t>Meaning: From first to last, Qwen is higher by .187 and DeepSeek is lower by .062.</a:t>
+            </a:r>
+          </a:p>
+          <a:p xmlns:a="http://schemas.openxmlformats.org/drawingml/2006/main">
+            <a:r>
+              <a:t>Limit: Release quarter is model metadata, not test time. It does not explain the score change. CEI ValuePrism is not the paper test. The available files have no saved uncertainty ranges or raw run archive.</a:t>
             </a:r>
           </a:p>
           <a:p xmlns:a="http://schemas.openxmlformats.org/drawingml/2006/main">
@@ -2779,7 +2779,7 @@
           </a:p>
           <a:p xmlns:a="http://schemas.openxmlformats.org/drawingml/2006/main">
             <a:r>
-              <a:t>Sources: assets/results/04_release_factor_detail.png, data/results/release_period_task_points.csv</a:t>
+              <a:t>Sources: assets/results/04_release_valence_detail.png, data/results/release_period_task_points.csv</a:t>
             </a:r>
           </a:p>
         </p:txBody>
@@ -2849,22 +2849,22 @@
           <a:lstStyle xmlns:a="http://schemas.openxmlformats.org/drawingml/2006/main"/>
           <a:p xmlns:a="http://schemas.openxmlformats.org/drawingml/2006/main">
             <a:r>
-              <a:t>Context: These are exploratory CEI ValuePrism valence results across saved Qwen and DeepSeek release quarters.</a:t>
-            </a:r>
-          </a:p>
-          <a:p xmlns:a="http://schemas.openxmlformats.org/drawingml/2006/main">
-            <a:r>
-              <a:t>How to read: Move left to right within one family. Each point names the model and its published size.</a:t>
-            </a:r>
-          </a:p>
-          <a:p xmlns:a="http://schemas.openxmlformats.org/drawingml/2006/main">
-            <a:r>
-              <a:t>Meaning: From first to last, Qwen is higher by .187 and DeepSeek is lower by .062.</a:t>
-            </a:r>
-          </a:p>
-          <a:p xmlns:a="http://schemas.openxmlformats.org/drawingml/2006/main">
-            <a:r>
-              <a:t>Limit: Release quarter is model metadata, not test time. It does not explain the score change. CEI ValuePrism is not the paper test. The available files have no saved uncertainty ranges or raw run archive.</a:t>
+              <a:t>Context: This is a CEI research priority, not a model result. It asks which work would reduce the most uncertainty.</a:t>
+            </a:r>
+          </a:p>
+          <a:p xmlns:a="http://schemas.openxmlformats.org/drawingml/2006/main">
+            <a:r>
+              <a:t>How to read: Read from top to bottom.</a:t>
+            </a:r>
+          </a:p>
+          <a:p xmlns:a="http://schemas.openxmlformats.org/drawingml/2006/main">
+            <a:r>
+              <a:t>Meaning: Review parsing, labels, and scoring first. Then add human review before broad new runs.</a:t>
+            </a:r>
+          </a:p>
+          <a:p xmlns:a="http://schemas.openxmlformats.org/drawingml/2006/main">
+            <a:r>
+              <a:t>Limit: This order is our research judgment. Run paid models only after these checks.</a:t>
             </a:r>
           </a:p>
           <a:p xmlns:a="http://schemas.openxmlformats.org/drawingml/2006/main">
@@ -2874,7 +2874,7 @@
           </a:p>
           <a:p xmlns:a="http://schemas.openxmlformats.org/drawingml/2006/main">
             <a:r>
-              <a:t>Sources: assets/results/04_release_valence_detail.png, data/results/release_period_task_points.csv</a:t>
+              <a:t>Sources: evidence/canonical-audit/figures/05_evidence_acquisition_priority.png, evidence/canonical-audit/RERUN_PRIORITY.md</a:t>
             </a:r>
           </a:p>
         </p:txBody>
@@ -3607,7 +3607,7 @@
   </p:cSld>
   <p:clrMap bg1="lt1" tx1="dk1" bg2="lt2" tx2="dk2" accent1="accent1" accent2="accent2" accent3="accent3" accent4="accent4" accent5="accent5" accent6="accent6" hlink="hlink" folHlink="folHlink"/>
   <p:sldLayoutIdLst>
-    <p:sldLayoutId xmlns:r="http://schemas.openxmlformats.org/officeDocument/2006/relationships" id="2147483649" r:id="R01c4453edb6d416a"/>
+    <p:sldLayoutId xmlns:r="http://schemas.openxmlformats.org/officeDocument/2006/relationships" id="2147483649" r:id="R4e332a4b31b94f29"/>
   </p:sldLayoutIdLst>
   <p:txStyles>
     <p:titleStyle>
@@ -6844,7 +6844,7 @@
           <p:nvPr/>
         </p:nvPicPr>
         <p:blipFill>
-          <a:blip xmlns:r="http://schemas.openxmlformats.org/officeDocument/2006/relationships" xmlns:a="http://schemas.openxmlformats.org/drawingml/2006/main" r:embed="Raf3c889653da46bf"/>
+          <a:blip xmlns:r="http://schemas.openxmlformats.org/officeDocument/2006/relationships" xmlns:a="http://schemas.openxmlformats.org/drawingml/2006/main" r:embed="R4ebe0b2277de4ba3"/>
           <a:stretch xmlns:a="http://schemas.openxmlformats.org/drawingml/2006/main"/>
         </p:blipFill>
         <p:spPr>
@@ -6860,7 +6860,7 @@
     </p:spTree>
     <p:extLst>
       <p:ext uri="{BB962C8B-B14F-4D97-AF65-F5344CB8AC3E}">
-        <p14:creationId xmlns:p14="http://schemas.microsoft.com/office/powerpoint/2010/main" val="1277545502"/>
+        <p14:creationId xmlns:p14="http://schemas.microsoft.com/office/powerpoint/2010/main" val="653731889"/>
       </p:ext>
     </p:extLst>
   </p:cSld>
@@ -6891,7 +6891,7 @@
           <p:cNvPr id="6" name="slide-title">
             <a:extLst xmlns:a="http://schemas.openxmlformats.org/drawingml/2006/main">
               <a:ext uri="{FF2B5EF4-FFF2-40B4-BE49-F238E27FC236}">
-                <a16:creationId xmlns:a16="http://schemas.microsoft.com/office/drawing/2014/main" id="{46E7111C-E656-41FF-8EEF-999945E66DA2}"/>
+                <a16:creationId xmlns:a16="http://schemas.microsoft.com/office/drawing/2014/main" id="{4C22F426-04FD-4D62-9BA2-1FB08D6603ED}"/>
               </a:ext>
             </a:extLst>
           </p:cNvPr>
@@ -6948,7 +6948,7 @@
           <p:cNvPr id="2" name="slide-subtitle">
             <a:extLst xmlns:a="http://schemas.openxmlformats.org/drawingml/2006/main">
               <a:ext uri="{FF2B5EF4-FFF2-40B4-BE49-F238E27FC236}">
-                <a16:creationId xmlns:a16="http://schemas.microsoft.com/office/drawing/2014/main" id="{BFFAAABE-2B27-4D4D-8B6F-259F8187079E}"/>
+                <a16:creationId xmlns:a16="http://schemas.microsoft.com/office/drawing/2014/main" id="{C093CE05-94C0-4B74-9B1D-4CDAEA896118}"/>
               </a:ext>
             </a:extLst>
           </p:cNvPr>
@@ -7005,7 +7005,7 @@
           <p:cNvPr id="3" name="">
             <a:extLst xmlns:a="http://schemas.openxmlformats.org/drawingml/2006/main">
               <a:ext uri="{FF2B5EF4-FFF2-40B4-BE49-F238E27FC236}">
-                <a16:creationId xmlns:a16="http://schemas.microsoft.com/office/drawing/2014/main" id="{230D5BBA-89B3-4E54-9175-C4B27C7DD43E}"/>
+                <a16:creationId xmlns:a16="http://schemas.microsoft.com/office/drawing/2014/main" id="{7F8C6F6E-4C03-4446-824B-EA8B9D16D33B}"/>
               </a:ext>
             </a:extLst>
           </p:cNvPr>
@@ -7040,7 +7040,7 @@
           <p:nvPr/>
         </p:nvPicPr>
         <p:blipFill>
-          <a:blip xmlns:r="http://schemas.openxmlformats.org/officeDocument/2006/relationships" xmlns:a="http://schemas.openxmlformats.org/drawingml/2006/main" r:embed="R90dd312bcc7e4ac6"/>
+          <a:blip xmlns:r="http://schemas.openxmlformats.org/officeDocument/2006/relationships" xmlns:a="http://schemas.openxmlformats.org/drawingml/2006/main" r:embed="R3be15ef24fb44d21"/>
           <a:stretch xmlns:a="http://schemas.openxmlformats.org/drawingml/2006/main"/>
         </p:blipFill>
         <p:spPr>
@@ -7058,7 +7058,7 @@
           <p:cNvPr id="5" name="">
             <a:extLst xmlns:a="http://schemas.openxmlformats.org/drawingml/2006/main">
               <a:ext uri="{FF2B5EF4-FFF2-40B4-BE49-F238E27FC236}">
-                <a16:creationId xmlns:a16="http://schemas.microsoft.com/office/drawing/2014/main" id="{2B46A58A-D537-4152-8BD6-7EF0B777973F}"/>
+                <a16:creationId xmlns:a16="http://schemas.microsoft.com/office/drawing/2014/main" id="{A06FA13F-2543-4D75-A509-E8E68E5C8D4C}"/>
               </a:ext>
             </a:extLst>
           </p:cNvPr>
@@ -7113,7 +7113,7 @@
     </p:spTree>
     <p:extLst>
       <p:ext uri="{BB962C8B-B14F-4D97-AF65-F5344CB8AC3E}">
-        <p14:creationId xmlns:p14="http://schemas.microsoft.com/office/powerpoint/2010/main" val="1177362321"/>
+        <p14:creationId xmlns:p14="http://schemas.microsoft.com/office/powerpoint/2010/main" val="530864322"/>
       </p:ext>
     </p:extLst>
   </p:cSld>
@@ -7144,7 +7144,7 @@
           <p:cNvPr id="6" name="slide-title">
             <a:extLst xmlns:a="http://schemas.openxmlformats.org/drawingml/2006/main">
               <a:ext uri="{FF2B5EF4-FFF2-40B4-BE49-F238E27FC236}">
-                <a16:creationId xmlns:a16="http://schemas.microsoft.com/office/drawing/2014/main" id="{3E5AD9E5-6F9F-4C9A-812C-58210CDA136C}"/>
+                <a16:creationId xmlns:a16="http://schemas.microsoft.com/office/drawing/2014/main" id="{9C5F72E0-4C40-49D6-87A7-FE5115FDA936}"/>
               </a:ext>
             </a:extLst>
           </p:cNvPr>
@@ -7201,7 +7201,7 @@
           <p:cNvPr id="2" name="slide-subtitle">
             <a:extLst xmlns:a="http://schemas.openxmlformats.org/drawingml/2006/main">
               <a:ext uri="{FF2B5EF4-FFF2-40B4-BE49-F238E27FC236}">
-                <a16:creationId xmlns:a16="http://schemas.microsoft.com/office/drawing/2014/main" id="{F62E1B4A-6199-438B-ADC0-2450EAC367BD}"/>
+                <a16:creationId xmlns:a16="http://schemas.microsoft.com/office/drawing/2014/main" id="{DB926B3C-40AE-4096-A992-F81858487C60}"/>
               </a:ext>
             </a:extLst>
           </p:cNvPr>
@@ -7258,7 +7258,7 @@
           <p:cNvPr id="3" name="">
             <a:extLst xmlns:a="http://schemas.openxmlformats.org/drawingml/2006/main">
               <a:ext uri="{FF2B5EF4-FFF2-40B4-BE49-F238E27FC236}">
-                <a16:creationId xmlns:a16="http://schemas.microsoft.com/office/drawing/2014/main" id="{E29D0376-9585-4287-897A-724933D3FD84}"/>
+                <a16:creationId xmlns:a16="http://schemas.microsoft.com/office/drawing/2014/main" id="{566D3EAA-778B-4CB3-A862-A69D20E4005D}"/>
               </a:ext>
             </a:extLst>
           </p:cNvPr>
@@ -7293,7 +7293,7 @@
           <p:nvPr/>
         </p:nvPicPr>
         <p:blipFill>
-          <a:blip xmlns:r="http://schemas.openxmlformats.org/officeDocument/2006/relationships" xmlns:a="http://schemas.openxmlformats.org/drawingml/2006/main" r:embed="R74c46a3bc2f54c35"/>
+          <a:blip xmlns:r="http://schemas.openxmlformats.org/officeDocument/2006/relationships" xmlns:a="http://schemas.openxmlformats.org/drawingml/2006/main" r:embed="R2323955bd4c94054"/>
           <a:stretch xmlns:a="http://schemas.openxmlformats.org/drawingml/2006/main"/>
         </p:blipFill>
         <p:spPr>
@@ -7311,7 +7311,7 @@
           <p:cNvPr id="5" name="">
             <a:extLst xmlns:a="http://schemas.openxmlformats.org/drawingml/2006/main">
               <a:ext uri="{FF2B5EF4-FFF2-40B4-BE49-F238E27FC236}">
-                <a16:creationId xmlns:a16="http://schemas.microsoft.com/office/drawing/2014/main" id="{F27A7C34-CD54-4E70-A2DE-A086881FCB0A}"/>
+                <a16:creationId xmlns:a16="http://schemas.microsoft.com/office/drawing/2014/main" id="{10AE7D63-9D37-4EC7-A241-81C97BC5F17C}"/>
               </a:ext>
             </a:extLst>
           </p:cNvPr>
@@ -7366,7 +7366,7 @@
     </p:spTree>
     <p:extLst>
       <p:ext uri="{BB962C8B-B14F-4D97-AF65-F5344CB8AC3E}">
-        <p14:creationId xmlns:p14="http://schemas.microsoft.com/office/powerpoint/2010/main" val="1432545005"/>
+        <p14:creationId xmlns:p14="http://schemas.microsoft.com/office/powerpoint/2010/main" val="1045186856"/>
       </p:ext>
     </p:extLst>
   </p:cSld>
@@ -7397,7 +7397,7 @@
           <p:cNvPr id="6" name="slide-title">
             <a:extLst xmlns:a="http://schemas.openxmlformats.org/drawingml/2006/main">
               <a:ext uri="{FF2B5EF4-FFF2-40B4-BE49-F238E27FC236}">
-                <a16:creationId xmlns:a16="http://schemas.microsoft.com/office/drawing/2014/main" id="{159784FF-AA35-4222-A942-E67D2D00794B}"/>
+                <a16:creationId xmlns:a16="http://schemas.microsoft.com/office/drawing/2014/main" id="{D1B384EB-F12A-4D40-8DBA-6C44B1480340}"/>
               </a:ext>
             </a:extLst>
           </p:cNvPr>
@@ -7454,7 +7454,7 @@
           <p:cNvPr id="2" name="slide-subtitle">
             <a:extLst xmlns:a="http://schemas.openxmlformats.org/drawingml/2006/main">
               <a:ext uri="{FF2B5EF4-FFF2-40B4-BE49-F238E27FC236}">
-                <a16:creationId xmlns:a16="http://schemas.microsoft.com/office/drawing/2014/main" id="{33AFCAB4-43D5-419E-B730-8F1AAC412974}"/>
+                <a16:creationId xmlns:a16="http://schemas.microsoft.com/office/drawing/2014/main" id="{7B27BE89-C01C-4283-A359-F21C8D1ACE24}"/>
               </a:ext>
             </a:extLst>
           </p:cNvPr>
@@ -7511,7 +7511,7 @@
           <p:cNvPr id="3" name="">
             <a:extLst xmlns:a="http://schemas.openxmlformats.org/drawingml/2006/main">
               <a:ext uri="{FF2B5EF4-FFF2-40B4-BE49-F238E27FC236}">
-                <a16:creationId xmlns:a16="http://schemas.microsoft.com/office/drawing/2014/main" id="{7A4B1B43-F13B-41B7-9560-DDD97F1DDFE0}"/>
+                <a16:creationId xmlns:a16="http://schemas.microsoft.com/office/drawing/2014/main" id="{C9CB19CD-E7C0-438C-8CAD-4FD58A795369}"/>
               </a:ext>
             </a:extLst>
           </p:cNvPr>
@@ -7546,7 +7546,7 @@
           <p:nvPr/>
         </p:nvPicPr>
         <p:blipFill>
-          <a:blip xmlns:r="http://schemas.openxmlformats.org/officeDocument/2006/relationships" xmlns:a="http://schemas.openxmlformats.org/drawingml/2006/main" r:embed="Rb738a1e8e2e94eef"/>
+          <a:blip xmlns:r="http://schemas.openxmlformats.org/officeDocument/2006/relationships" xmlns:a="http://schemas.openxmlformats.org/drawingml/2006/main" r:embed="R6a9b8f419bef41f3"/>
           <a:stretch xmlns:a="http://schemas.openxmlformats.org/drawingml/2006/main"/>
         </p:blipFill>
         <p:spPr>
@@ -7564,7 +7564,7 @@
           <p:cNvPr id="5" name="">
             <a:extLst xmlns:a="http://schemas.openxmlformats.org/drawingml/2006/main">
               <a:ext uri="{FF2B5EF4-FFF2-40B4-BE49-F238E27FC236}">
-                <a16:creationId xmlns:a16="http://schemas.microsoft.com/office/drawing/2014/main" id="{7027099F-A646-4195-BE3A-7889375B2AB6}"/>
+                <a16:creationId xmlns:a16="http://schemas.microsoft.com/office/drawing/2014/main" id="{E677729F-074C-4310-950F-06207B045B30}"/>
               </a:ext>
             </a:extLst>
           </p:cNvPr>
@@ -7619,7 +7619,7 @@
     </p:spTree>
     <p:extLst>
       <p:ext uri="{BB962C8B-B14F-4D97-AF65-F5344CB8AC3E}">
-        <p14:creationId xmlns:p14="http://schemas.microsoft.com/office/powerpoint/2010/main" val="1597046680"/>
+        <p14:creationId xmlns:p14="http://schemas.microsoft.com/office/powerpoint/2010/main" val="379792238"/>
       </p:ext>
     </p:extLst>
   </p:cSld>
@@ -7650,7 +7650,7 @@
           <p:cNvPr id="6" name="slide-title">
             <a:extLst xmlns:a="http://schemas.openxmlformats.org/drawingml/2006/main">
               <a:ext uri="{FF2B5EF4-FFF2-40B4-BE49-F238E27FC236}">
-                <a16:creationId xmlns:a16="http://schemas.microsoft.com/office/drawing/2014/main" id="{769453DD-FEDB-468F-B940-B7CD0AC8D626}"/>
+                <a16:creationId xmlns:a16="http://schemas.microsoft.com/office/drawing/2014/main" id="{FC0181B6-1DD1-4A9A-8DA5-9383B3AA68CB}"/>
               </a:ext>
             </a:extLst>
           </p:cNvPr>
@@ -7707,7 +7707,7 @@
           <p:cNvPr id="2" name="slide-subtitle">
             <a:extLst xmlns:a="http://schemas.openxmlformats.org/drawingml/2006/main">
               <a:ext uri="{FF2B5EF4-FFF2-40B4-BE49-F238E27FC236}">
-                <a16:creationId xmlns:a16="http://schemas.microsoft.com/office/drawing/2014/main" id="{AFDF87D9-4F0C-47B4-BDB6-282DE36B81FF}"/>
+                <a16:creationId xmlns:a16="http://schemas.microsoft.com/office/drawing/2014/main" id="{CE2D117C-8643-4BEB-8ABB-A4D1A2AAEF9A}"/>
               </a:ext>
             </a:extLst>
           </p:cNvPr>
@@ -7764,7 +7764,7 @@
           <p:cNvPr id="3" name="">
             <a:extLst xmlns:a="http://schemas.openxmlformats.org/drawingml/2006/main">
               <a:ext uri="{FF2B5EF4-FFF2-40B4-BE49-F238E27FC236}">
-                <a16:creationId xmlns:a16="http://schemas.microsoft.com/office/drawing/2014/main" id="{F4ABB19E-17EF-463B-A69D-D1130FC15188}"/>
+                <a16:creationId xmlns:a16="http://schemas.microsoft.com/office/drawing/2014/main" id="{EB462248-B21E-4474-A158-2BBBE516BB53}"/>
               </a:ext>
             </a:extLst>
           </p:cNvPr>
@@ -7799,7 +7799,7 @@
           <p:nvPr/>
         </p:nvPicPr>
         <p:blipFill>
-          <a:blip xmlns:r="http://schemas.openxmlformats.org/officeDocument/2006/relationships" xmlns:a="http://schemas.openxmlformats.org/drawingml/2006/main" r:embed="Rc755fbeb009c4ebc"/>
+          <a:blip xmlns:r="http://schemas.openxmlformats.org/officeDocument/2006/relationships" xmlns:a="http://schemas.openxmlformats.org/drawingml/2006/main" r:embed="R3d35b7863b6f4317"/>
           <a:stretch xmlns:a="http://schemas.openxmlformats.org/drawingml/2006/main"/>
         </p:blipFill>
         <p:spPr>
@@ -7817,7 +7817,7 @@
           <p:cNvPr id="5" name="">
             <a:extLst xmlns:a="http://schemas.openxmlformats.org/drawingml/2006/main">
               <a:ext uri="{FF2B5EF4-FFF2-40B4-BE49-F238E27FC236}">
-                <a16:creationId xmlns:a16="http://schemas.microsoft.com/office/drawing/2014/main" id="{7C509260-8109-4450-979A-760D9D006828}"/>
+                <a16:creationId xmlns:a16="http://schemas.microsoft.com/office/drawing/2014/main" id="{5BBB4FD2-55C3-45C4-A06E-029D61C1752B}"/>
               </a:ext>
             </a:extLst>
           </p:cNvPr>
@@ -7872,7 +7872,7 @@
     </p:spTree>
     <p:extLst>
       <p:ext uri="{BB962C8B-B14F-4D97-AF65-F5344CB8AC3E}">
-        <p14:creationId xmlns:p14="http://schemas.microsoft.com/office/powerpoint/2010/main" val="1567147437"/>
+        <p14:creationId xmlns:p14="http://schemas.microsoft.com/office/powerpoint/2010/main" val="1681923736"/>
       </p:ext>
     </p:extLst>
   </p:cSld>
@@ -7903,7 +7903,7 @@
           <p:cNvPr id="6" name="slide-title">
             <a:extLst xmlns:a="http://schemas.openxmlformats.org/drawingml/2006/main">
               <a:ext uri="{FF2B5EF4-FFF2-40B4-BE49-F238E27FC236}">
-                <a16:creationId xmlns:a16="http://schemas.microsoft.com/office/drawing/2014/main" id="{42774273-8635-43A3-95F1-6FC42BB0116C}"/>
+                <a16:creationId xmlns:a16="http://schemas.microsoft.com/office/drawing/2014/main" id="{4301C36C-9F1D-4701-8ED5-B1106427B28D}"/>
               </a:ext>
             </a:extLst>
           </p:cNvPr>
@@ -7960,7 +7960,7 @@
           <p:cNvPr id="2" name="slide-subtitle">
             <a:extLst xmlns:a="http://schemas.openxmlformats.org/drawingml/2006/main">
               <a:ext uri="{FF2B5EF4-FFF2-40B4-BE49-F238E27FC236}">
-                <a16:creationId xmlns:a16="http://schemas.microsoft.com/office/drawing/2014/main" id="{EC83ECAC-7428-40AC-BF52-28F1C6809835}"/>
+                <a16:creationId xmlns:a16="http://schemas.microsoft.com/office/drawing/2014/main" id="{07E20AD8-654A-456F-8AE3-F4294B1612AD}"/>
               </a:ext>
             </a:extLst>
           </p:cNvPr>
@@ -8017,7 +8017,7 @@
           <p:cNvPr id="3" name="">
             <a:extLst xmlns:a="http://schemas.openxmlformats.org/drawingml/2006/main">
               <a:ext uri="{FF2B5EF4-FFF2-40B4-BE49-F238E27FC236}">
-                <a16:creationId xmlns:a16="http://schemas.microsoft.com/office/drawing/2014/main" id="{0AA9C701-EBDD-4F9D-BE1F-00921A9F3FDA}"/>
+                <a16:creationId xmlns:a16="http://schemas.microsoft.com/office/drawing/2014/main" id="{97417012-0D0F-49AA-AE52-B750978DC0B3}"/>
               </a:ext>
             </a:extLst>
           </p:cNvPr>
@@ -8052,7 +8052,7 @@
           <p:nvPr/>
         </p:nvPicPr>
         <p:blipFill>
-          <a:blip xmlns:r="http://schemas.openxmlformats.org/officeDocument/2006/relationships" xmlns:a="http://schemas.openxmlformats.org/drawingml/2006/main" r:embed="Rfdc358c20c6d45a7"/>
+          <a:blip xmlns:r="http://schemas.openxmlformats.org/officeDocument/2006/relationships" xmlns:a="http://schemas.openxmlformats.org/drawingml/2006/main" r:embed="Rac34de216189412e"/>
           <a:stretch xmlns:a="http://schemas.openxmlformats.org/drawingml/2006/main"/>
         </p:blipFill>
         <p:spPr>
@@ -8070,7 +8070,7 @@
           <p:cNvPr id="5" name="">
             <a:extLst xmlns:a="http://schemas.openxmlformats.org/drawingml/2006/main">
               <a:ext uri="{FF2B5EF4-FFF2-40B4-BE49-F238E27FC236}">
-                <a16:creationId xmlns:a16="http://schemas.microsoft.com/office/drawing/2014/main" id="{EE19D543-5E26-414C-A644-469D5F380A99}"/>
+                <a16:creationId xmlns:a16="http://schemas.microsoft.com/office/drawing/2014/main" id="{D9E982DA-AD87-4853-8F10-90593CE7B3AD}"/>
               </a:ext>
             </a:extLst>
           </p:cNvPr>
@@ -8125,7 +8125,7 @@
     </p:spTree>
     <p:extLst>
       <p:ext uri="{BB962C8B-B14F-4D97-AF65-F5344CB8AC3E}">
-        <p14:creationId xmlns:p14="http://schemas.microsoft.com/office/powerpoint/2010/main" val="1072240250"/>
+        <p14:creationId xmlns:p14="http://schemas.microsoft.com/office/powerpoint/2010/main" val="1448929864"/>
       </p:ext>
     </p:extLst>
   </p:cSld>
@@ -8156,7 +8156,7 @@
           <p:cNvPr id="6" name="slide-title">
             <a:extLst xmlns:a="http://schemas.openxmlformats.org/drawingml/2006/main">
               <a:ext uri="{FF2B5EF4-FFF2-40B4-BE49-F238E27FC236}">
-                <a16:creationId xmlns:a16="http://schemas.microsoft.com/office/drawing/2014/main" id="{6311F1BC-5D55-4F67-867A-05B2C6507E3D}"/>
+                <a16:creationId xmlns:a16="http://schemas.microsoft.com/office/drawing/2014/main" id="{F4D39F44-43D7-4D09-A364-4B5D5BBECA3F}"/>
               </a:ext>
             </a:extLst>
           </p:cNvPr>
@@ -8213,7 +8213,7 @@
           <p:cNvPr id="2" name="slide-subtitle">
             <a:extLst xmlns:a="http://schemas.openxmlformats.org/drawingml/2006/main">
               <a:ext uri="{FF2B5EF4-FFF2-40B4-BE49-F238E27FC236}">
-                <a16:creationId xmlns:a16="http://schemas.microsoft.com/office/drawing/2014/main" id="{8D89BC6F-2D0B-4726-B0AE-3CA16E412EAD}"/>
+                <a16:creationId xmlns:a16="http://schemas.microsoft.com/office/drawing/2014/main" id="{6EF10299-8E39-432B-A944-F28B7372375B}"/>
               </a:ext>
             </a:extLst>
           </p:cNvPr>
@@ -8270,7 +8270,7 @@
           <p:cNvPr id="3" name="">
             <a:extLst xmlns:a="http://schemas.openxmlformats.org/drawingml/2006/main">
               <a:ext uri="{FF2B5EF4-FFF2-40B4-BE49-F238E27FC236}">
-                <a16:creationId xmlns:a16="http://schemas.microsoft.com/office/drawing/2014/main" id="{FA01F481-0627-491B-ABC7-CDE76B10265C}"/>
+                <a16:creationId xmlns:a16="http://schemas.microsoft.com/office/drawing/2014/main" id="{2591912B-4671-4CE3-AFA3-0FE76F7DA4A8}"/>
               </a:ext>
             </a:extLst>
           </p:cNvPr>
@@ -8305,7 +8305,7 @@
           <p:nvPr/>
         </p:nvPicPr>
         <p:blipFill>
-          <a:blip xmlns:r="http://schemas.openxmlformats.org/officeDocument/2006/relationships" xmlns:a="http://schemas.openxmlformats.org/drawingml/2006/main" r:embed="R0f389cc4ebdb45d5"/>
+          <a:blip xmlns:r="http://schemas.openxmlformats.org/officeDocument/2006/relationships" xmlns:a="http://schemas.openxmlformats.org/drawingml/2006/main" r:embed="R076a3a4f2e7c4e57"/>
           <a:stretch xmlns:a="http://schemas.openxmlformats.org/drawingml/2006/main"/>
         </p:blipFill>
         <p:spPr>
@@ -8323,7 +8323,7 @@
           <p:cNvPr id="5" name="">
             <a:extLst xmlns:a="http://schemas.openxmlformats.org/drawingml/2006/main">
               <a:ext uri="{FF2B5EF4-FFF2-40B4-BE49-F238E27FC236}">
-                <a16:creationId xmlns:a16="http://schemas.microsoft.com/office/drawing/2014/main" id="{BAFBC33E-D55A-417D-9489-2F8F06C462EF}"/>
+                <a16:creationId xmlns:a16="http://schemas.microsoft.com/office/drawing/2014/main" id="{BA5FDB55-2872-44CB-9952-7E76C5D55484}"/>
               </a:ext>
             </a:extLst>
           </p:cNvPr>
@@ -8378,7 +8378,7 @@
     </p:spTree>
     <p:extLst>
       <p:ext uri="{BB962C8B-B14F-4D97-AF65-F5344CB8AC3E}">
-        <p14:creationId xmlns:p14="http://schemas.microsoft.com/office/powerpoint/2010/main" val="1137947202"/>
+        <p14:creationId xmlns:p14="http://schemas.microsoft.com/office/powerpoint/2010/main" val="906013703"/>
       </p:ext>
     </p:extLst>
   </p:cSld>
@@ -8409,7 +8409,7 @@
           <p:cNvPr id="6" name="slide-title">
             <a:extLst xmlns:a="http://schemas.openxmlformats.org/drawingml/2006/main">
               <a:ext uri="{FF2B5EF4-FFF2-40B4-BE49-F238E27FC236}">
-                <a16:creationId xmlns:a16="http://schemas.microsoft.com/office/drawing/2014/main" id="{C13741E8-775F-4A33-AE29-15372FB716A2}"/>
+                <a16:creationId xmlns:a16="http://schemas.microsoft.com/office/drawing/2014/main" id="{E4D59B4D-D22E-42BD-857F-13373B089095}"/>
               </a:ext>
             </a:extLst>
           </p:cNvPr>
@@ -8456,7 +8456,7 @@
                 <a:ea typeface="Aptos"/>
                 <a:cs typeface="Aptos"/>
               </a:rPr>
-              <a:t>UniMoral and ValuePrism size: 3 of 5 comparisons change direction</a:t>
+              <a:t>UniMoral + ValuePrism: 3 of 5 size paths change direction</a:t>
             </a:r>
           </a:p>
         </p:txBody>
@@ -8466,7 +8466,7 @@
           <p:cNvPr id="2" name="slide-subtitle">
             <a:extLst xmlns:a="http://schemas.openxmlformats.org/drawingml/2006/main">
               <a:ext uri="{FF2B5EF4-FFF2-40B4-BE49-F238E27FC236}">
-                <a16:creationId xmlns:a16="http://schemas.microsoft.com/office/drawing/2014/main" id="{A067291A-51CF-4E2D-8E16-301D0A49DEED}"/>
+                <a16:creationId xmlns:a16="http://schemas.microsoft.com/office/drawing/2014/main" id="{8701A5F2-37FB-431D-BD6E-7973B3EBC185}"/>
               </a:ext>
             </a:extLst>
           </p:cNvPr>
@@ -8523,7 +8523,7 @@
           <p:cNvPr id="3" name="">
             <a:extLst xmlns:a="http://schemas.openxmlformats.org/drawingml/2006/main">
               <a:ext uri="{FF2B5EF4-FFF2-40B4-BE49-F238E27FC236}">
-                <a16:creationId xmlns:a16="http://schemas.microsoft.com/office/drawing/2014/main" id="{4B3D0DD2-D44C-4DF0-BFFA-8F4C9A010AAF}"/>
+                <a16:creationId xmlns:a16="http://schemas.microsoft.com/office/drawing/2014/main" id="{59C9DA03-4823-4752-91A4-D8309A8BD962}"/>
               </a:ext>
             </a:extLst>
           </p:cNvPr>
@@ -8558,7 +8558,7 @@
           <p:nvPr/>
         </p:nvPicPr>
         <p:blipFill>
-          <a:blip xmlns:r="http://schemas.openxmlformats.org/officeDocument/2006/relationships" xmlns:a="http://schemas.openxmlformats.org/drawingml/2006/main" r:embed="R9d5cf12177ae43f8"/>
+          <a:blip xmlns:r="http://schemas.openxmlformats.org/officeDocument/2006/relationships" xmlns:a="http://schemas.openxmlformats.org/drawingml/2006/main" r:embed="Re027a54b7ce948f1"/>
           <a:stretch xmlns:a="http://schemas.openxmlformats.org/drawingml/2006/main"/>
         </p:blipFill>
         <p:spPr>
@@ -8576,7 +8576,7 @@
           <p:cNvPr id="5" name="">
             <a:extLst xmlns:a="http://schemas.openxmlformats.org/drawingml/2006/main">
               <a:ext uri="{FF2B5EF4-FFF2-40B4-BE49-F238E27FC236}">
-                <a16:creationId xmlns:a16="http://schemas.microsoft.com/office/drawing/2014/main" id="{75201BC8-0312-471C-AF49-085C3844F740}"/>
+                <a16:creationId xmlns:a16="http://schemas.microsoft.com/office/drawing/2014/main" id="{C3369A42-9B58-43AB-B8C3-0F03616C9300}"/>
               </a:ext>
             </a:extLst>
           </p:cNvPr>
@@ -8631,7 +8631,7 @@
     </p:spTree>
     <p:extLst>
       <p:ext uri="{BB962C8B-B14F-4D97-AF65-F5344CB8AC3E}">
-        <p14:creationId xmlns:p14="http://schemas.microsoft.com/office/powerpoint/2010/main" val="1807755095"/>
+        <p14:creationId xmlns:p14="http://schemas.microsoft.com/office/powerpoint/2010/main" val="1596523554"/>
       </p:ext>
     </p:extLst>
   </p:cSld>
@@ -8662,7 +8662,7 @@
           <p:cNvPr id="6" name="slide-title">
             <a:extLst xmlns:a="http://schemas.openxmlformats.org/drawingml/2006/main">
               <a:ext uri="{FF2B5EF4-FFF2-40B4-BE49-F238E27FC236}">
-                <a16:creationId xmlns:a16="http://schemas.microsoft.com/office/drawing/2014/main" id="{E2A6FA4D-A259-4C25-9C1E-A73485EDFF03}"/>
+                <a16:creationId xmlns:a16="http://schemas.microsoft.com/office/drawing/2014/main" id="{09670068-6117-4B0E-B55B-B4B6C865C9C7}"/>
               </a:ext>
             </a:extLst>
           </p:cNvPr>
@@ -8719,7 +8719,7 @@
           <p:cNvPr id="2" name="slide-subtitle">
             <a:extLst xmlns:a="http://schemas.openxmlformats.org/drawingml/2006/main">
               <a:ext uri="{FF2B5EF4-FFF2-40B4-BE49-F238E27FC236}">
-                <a16:creationId xmlns:a16="http://schemas.microsoft.com/office/drawing/2014/main" id="{37E177BA-5BAB-4A0C-8584-BE5B816ABF97}"/>
+                <a16:creationId xmlns:a16="http://schemas.microsoft.com/office/drawing/2014/main" id="{1B88B68E-C1EF-4F7A-95F8-31E5D6DB0BD2}"/>
               </a:ext>
             </a:extLst>
           </p:cNvPr>
@@ -8776,7 +8776,7 @@
           <p:cNvPr id="3" name="">
             <a:extLst xmlns:a="http://schemas.openxmlformats.org/drawingml/2006/main">
               <a:ext uri="{FF2B5EF4-FFF2-40B4-BE49-F238E27FC236}">
-                <a16:creationId xmlns:a16="http://schemas.microsoft.com/office/drawing/2014/main" id="{E83929C9-5858-4999-826E-7EB2B0A043B1}"/>
+                <a16:creationId xmlns:a16="http://schemas.microsoft.com/office/drawing/2014/main" id="{762736DE-151F-49AB-B826-07565AF5BE0A}"/>
               </a:ext>
             </a:extLst>
           </p:cNvPr>
@@ -8811,7 +8811,7 @@
           <p:nvPr/>
         </p:nvPicPr>
         <p:blipFill>
-          <a:blip xmlns:r="http://schemas.openxmlformats.org/officeDocument/2006/relationships" xmlns:a="http://schemas.openxmlformats.org/drawingml/2006/main" r:embed="Rbbd909fb78294e90"/>
+          <a:blip xmlns:r="http://schemas.openxmlformats.org/officeDocument/2006/relationships" xmlns:a="http://schemas.openxmlformats.org/drawingml/2006/main" r:embed="R913f714e60134677"/>
           <a:stretch xmlns:a="http://schemas.openxmlformats.org/drawingml/2006/main"/>
         </p:blipFill>
         <p:spPr>
@@ -8829,7 +8829,7 @@
           <p:cNvPr id="5" name="">
             <a:extLst xmlns:a="http://schemas.openxmlformats.org/drawingml/2006/main">
               <a:ext uri="{FF2B5EF4-FFF2-40B4-BE49-F238E27FC236}">
-                <a16:creationId xmlns:a16="http://schemas.microsoft.com/office/drawing/2014/main" id="{4E1C4021-DEB3-4041-A434-207918D5D3A0}"/>
+                <a16:creationId xmlns:a16="http://schemas.microsoft.com/office/drawing/2014/main" id="{AECE3956-A015-4DD8-94C5-4AD237E7EB98}"/>
               </a:ext>
             </a:extLst>
           </p:cNvPr>
@@ -8884,7 +8884,7 @@
     </p:spTree>
     <p:extLst>
       <p:ext uri="{BB962C8B-B14F-4D97-AF65-F5344CB8AC3E}">
-        <p14:creationId xmlns:p14="http://schemas.microsoft.com/office/powerpoint/2010/main" val="1774077641"/>
+        <p14:creationId xmlns:p14="http://schemas.microsoft.com/office/powerpoint/2010/main" val="545808531"/>
       </p:ext>
     </p:extLst>
   </p:cSld>
@@ -8915,7 +8915,7 @@
           <p:cNvPr id="6" name="slide-title">
             <a:extLst xmlns:a="http://schemas.openxmlformats.org/drawingml/2006/main">
               <a:ext uri="{FF2B5EF4-FFF2-40B4-BE49-F238E27FC236}">
-                <a16:creationId xmlns:a16="http://schemas.microsoft.com/office/drawing/2014/main" id="{9A6BB195-7373-4E1B-8821-FD959D7BFEB5}"/>
+                <a16:creationId xmlns:a16="http://schemas.microsoft.com/office/drawing/2014/main" id="{F28A148A-CD81-48D9-A4A9-F66D43C5CF85}"/>
               </a:ext>
             </a:extLst>
           </p:cNvPr>
@@ -8972,7 +8972,7 @@
           <p:cNvPr id="2" name="slide-subtitle">
             <a:extLst xmlns:a="http://schemas.openxmlformats.org/drawingml/2006/main">
               <a:ext uri="{FF2B5EF4-FFF2-40B4-BE49-F238E27FC236}">
-                <a16:creationId xmlns:a16="http://schemas.microsoft.com/office/drawing/2014/main" id="{505AD76A-0F00-4A2E-928B-611C319A096C}"/>
+                <a16:creationId xmlns:a16="http://schemas.microsoft.com/office/drawing/2014/main" id="{AFC55B28-56F1-4208-90EC-0F6E48D926EA}"/>
               </a:ext>
             </a:extLst>
           </p:cNvPr>
@@ -9029,7 +9029,7 @@
           <p:cNvPr id="3" name="">
             <a:extLst xmlns:a="http://schemas.openxmlformats.org/drawingml/2006/main">
               <a:ext uri="{FF2B5EF4-FFF2-40B4-BE49-F238E27FC236}">
-                <a16:creationId xmlns:a16="http://schemas.microsoft.com/office/drawing/2014/main" id="{7B4EF9F8-93FC-48FF-8C9C-30757CCAA257}"/>
+                <a16:creationId xmlns:a16="http://schemas.microsoft.com/office/drawing/2014/main" id="{B6C1B922-7D66-4DC4-A18A-30C3E0B802C7}"/>
               </a:ext>
             </a:extLst>
           </p:cNvPr>
@@ -9064,7 +9064,7 @@
           <p:nvPr/>
         </p:nvPicPr>
         <p:blipFill>
-          <a:blip xmlns:r="http://schemas.openxmlformats.org/officeDocument/2006/relationships" xmlns:a="http://schemas.openxmlformats.org/drawingml/2006/main" r:embed="Rffc753b3abb44325"/>
+          <a:blip xmlns:r="http://schemas.openxmlformats.org/officeDocument/2006/relationships" xmlns:a="http://schemas.openxmlformats.org/drawingml/2006/main" r:embed="Rcc726ad738fe4742"/>
           <a:stretch xmlns:a="http://schemas.openxmlformats.org/drawingml/2006/main"/>
         </p:blipFill>
         <p:spPr>
@@ -9082,7 +9082,7 @@
           <p:cNvPr id="5" name="">
             <a:extLst xmlns:a="http://schemas.openxmlformats.org/drawingml/2006/main">
               <a:ext uri="{FF2B5EF4-FFF2-40B4-BE49-F238E27FC236}">
-                <a16:creationId xmlns:a16="http://schemas.microsoft.com/office/drawing/2014/main" id="{2921A03C-1E5B-4721-86E7-C5674616B525}"/>
+                <a16:creationId xmlns:a16="http://schemas.microsoft.com/office/drawing/2014/main" id="{B8FEE76A-B440-49AF-8F14-2519BB2540E5}"/>
               </a:ext>
             </a:extLst>
           </p:cNvPr>
@@ -9137,7 +9137,7 @@
     </p:spTree>
     <p:extLst>
       <p:ext uri="{BB962C8B-B14F-4D97-AF65-F5344CB8AC3E}">
-        <p14:creationId xmlns:p14="http://schemas.microsoft.com/office/powerpoint/2010/main" val="573838656"/>
+        <p14:creationId xmlns:p14="http://schemas.microsoft.com/office/powerpoint/2010/main" val="2091976197"/>
       </p:ext>
     </p:extLst>
   </p:cSld>
@@ -9168,7 +9168,7 @@
           <p:cNvPr id="6" name="slide-title">
             <a:extLst xmlns:a="http://schemas.openxmlformats.org/drawingml/2006/main">
               <a:ext uri="{FF2B5EF4-FFF2-40B4-BE49-F238E27FC236}">
-                <a16:creationId xmlns:a16="http://schemas.microsoft.com/office/drawing/2014/main" id="{6F7326C8-C232-403F-A299-C48D52E59E5D}"/>
+                <a16:creationId xmlns:a16="http://schemas.microsoft.com/office/drawing/2014/main" id="{8F3289F8-AD60-430B-8DF4-22C5EDB22959}"/>
               </a:ext>
             </a:extLst>
           </p:cNvPr>
@@ -9225,7 +9225,7 @@
           <p:cNvPr id="2" name="slide-subtitle">
             <a:extLst xmlns:a="http://schemas.openxmlformats.org/drawingml/2006/main">
               <a:ext uri="{FF2B5EF4-FFF2-40B4-BE49-F238E27FC236}">
-                <a16:creationId xmlns:a16="http://schemas.microsoft.com/office/drawing/2014/main" id="{8810FA45-6B69-435A-B05C-037C2C74A9E8}"/>
+                <a16:creationId xmlns:a16="http://schemas.microsoft.com/office/drawing/2014/main" id="{DCCD00CC-D72B-4391-96DA-64F6E3D15C07}"/>
               </a:ext>
             </a:extLst>
           </p:cNvPr>
@@ -9282,7 +9282,7 @@
           <p:cNvPr id="3" name="">
             <a:extLst xmlns:a="http://schemas.openxmlformats.org/drawingml/2006/main">
               <a:ext uri="{FF2B5EF4-FFF2-40B4-BE49-F238E27FC236}">
-                <a16:creationId xmlns:a16="http://schemas.microsoft.com/office/drawing/2014/main" id="{AFCE0527-A45E-4D09-8398-919303EFFE6E}"/>
+                <a16:creationId xmlns:a16="http://schemas.microsoft.com/office/drawing/2014/main" id="{684B4AD0-B170-46BA-B174-234D8C24EB77}"/>
               </a:ext>
             </a:extLst>
           </p:cNvPr>
@@ -9317,7 +9317,7 @@
           <p:nvPr/>
         </p:nvPicPr>
         <p:blipFill>
-          <a:blip xmlns:r="http://schemas.openxmlformats.org/officeDocument/2006/relationships" xmlns:a="http://schemas.openxmlformats.org/drawingml/2006/main" r:embed="R6c745330728840ff"/>
+          <a:blip xmlns:r="http://schemas.openxmlformats.org/officeDocument/2006/relationships" xmlns:a="http://schemas.openxmlformats.org/drawingml/2006/main" r:embed="R3c3f9878027f49d6"/>
           <a:stretch xmlns:a="http://schemas.openxmlformats.org/drawingml/2006/main"/>
         </p:blipFill>
         <p:spPr>
@@ -9335,7 +9335,7 @@
           <p:cNvPr id="5" name="">
             <a:extLst xmlns:a="http://schemas.openxmlformats.org/drawingml/2006/main">
               <a:ext uri="{FF2B5EF4-FFF2-40B4-BE49-F238E27FC236}">
-                <a16:creationId xmlns:a16="http://schemas.microsoft.com/office/drawing/2014/main" id="{8CAA499A-D33B-47E4-81D0-413C0DAAA8FF}"/>
+                <a16:creationId xmlns:a16="http://schemas.microsoft.com/office/drawing/2014/main" id="{78CD9DFD-0015-4795-AB22-F82031A3EE87}"/>
               </a:ext>
             </a:extLst>
           </p:cNvPr>
@@ -9390,7 +9390,7 @@
     </p:spTree>
     <p:extLst>
       <p:ext uri="{BB962C8B-B14F-4D97-AF65-F5344CB8AC3E}">
-        <p14:creationId xmlns:p14="http://schemas.microsoft.com/office/powerpoint/2010/main" val="751855566"/>
+        <p14:creationId xmlns:p14="http://schemas.microsoft.com/office/powerpoint/2010/main" val="1411746063"/>
       </p:ext>
     </p:extLst>
   </p:cSld>
@@ -9425,7 +9425,7 @@
           <p:nvPr/>
         </p:nvPicPr>
         <p:blipFill>
-          <a:blip xmlns:r="http://schemas.openxmlformats.org/officeDocument/2006/relationships" xmlns:a="http://schemas.openxmlformats.org/drawingml/2006/main" r:embed="Rc2a68c1b368a4542"/>
+          <a:blip xmlns:r="http://schemas.openxmlformats.org/officeDocument/2006/relationships" xmlns:a="http://schemas.openxmlformats.org/drawingml/2006/main" r:embed="R784a69b36d7e492a"/>
           <a:stretch xmlns:a="http://schemas.openxmlformats.org/drawingml/2006/main"/>
         </p:blipFill>
         <p:spPr>
@@ -9441,7 +9441,7 @@
     </p:spTree>
     <p:extLst>
       <p:ext uri="{BB962C8B-B14F-4D97-AF65-F5344CB8AC3E}">
-        <p14:creationId xmlns:p14="http://schemas.microsoft.com/office/powerpoint/2010/main" val="948288454"/>
+        <p14:creationId xmlns:p14="http://schemas.microsoft.com/office/powerpoint/2010/main" val="129826603"/>
       </p:ext>
     </p:extLst>
   </p:cSld>
@@ -9472,7 +9472,7 @@
           <p:cNvPr id="42" name="slide-title">
             <a:extLst xmlns:a="http://schemas.openxmlformats.org/drawingml/2006/main">
               <a:ext uri="{FF2B5EF4-FFF2-40B4-BE49-F238E27FC236}">
-                <a16:creationId xmlns:a16="http://schemas.microsoft.com/office/drawing/2014/main" id="{A9A14EFA-9019-40DC-8380-AE0D5D8413AC}"/>
+                <a16:creationId xmlns:a16="http://schemas.microsoft.com/office/drawing/2014/main" id="{4F8D2304-A8B9-45B7-86F3-CFA172EC539C}"/>
               </a:ext>
             </a:extLst>
           </p:cNvPr>
@@ -9529,7 +9529,7 @@
           <p:cNvPr id="2" name="slide-subtitle">
             <a:extLst xmlns:a="http://schemas.openxmlformats.org/drawingml/2006/main">
               <a:ext uri="{FF2B5EF4-FFF2-40B4-BE49-F238E27FC236}">
-                <a16:creationId xmlns:a16="http://schemas.microsoft.com/office/drawing/2014/main" id="{26FE80DB-46FF-40B5-93FF-AFEE665AE38C}"/>
+                <a16:creationId xmlns:a16="http://schemas.microsoft.com/office/drawing/2014/main" id="{6C2FF8B8-47EC-4B00-ACC6-1E82121C395B}"/>
               </a:ext>
             </a:extLst>
           </p:cNvPr>
@@ -9586,7 +9586,7 @@
           <p:cNvPr id="3" name="">
             <a:extLst xmlns:a="http://schemas.openxmlformats.org/drawingml/2006/main">
               <a:ext uri="{FF2B5EF4-FFF2-40B4-BE49-F238E27FC236}">
-                <a16:creationId xmlns:a16="http://schemas.microsoft.com/office/drawing/2014/main" id="{1400D0B4-F4A7-4088-B922-B9346E0ABF0C}"/>
+                <a16:creationId xmlns:a16="http://schemas.microsoft.com/office/drawing/2014/main" id="{BD95E6EF-150B-4AA1-BF8F-B533E7A7518C}"/>
               </a:ext>
             </a:extLst>
           </p:cNvPr>
@@ -9617,7 +9617,7 @@
           <p:cNvPr id="4" name="">
             <a:extLst xmlns:a="http://schemas.openxmlformats.org/drawingml/2006/main">
               <a:ext uri="{FF2B5EF4-FFF2-40B4-BE49-F238E27FC236}">
-                <a16:creationId xmlns:a16="http://schemas.microsoft.com/office/drawing/2014/main" id="{4CAED1A9-C807-45DD-89D7-680834710720}"/>
+                <a16:creationId xmlns:a16="http://schemas.microsoft.com/office/drawing/2014/main" id="{3720574E-D37B-4405-9CC0-B85D577D02E1}"/>
               </a:ext>
             </a:extLst>
           </p:cNvPr>
@@ -9648,7 +9648,7 @@
           <p:cNvPr id="5" name="">
             <a:extLst xmlns:a="http://schemas.openxmlformats.org/drawingml/2006/main">
               <a:ext uri="{FF2B5EF4-FFF2-40B4-BE49-F238E27FC236}">
-                <a16:creationId xmlns:a16="http://schemas.microsoft.com/office/drawing/2014/main" id="{3E240599-5D7B-4CC1-B1B3-890B909FECA9}"/>
+                <a16:creationId xmlns:a16="http://schemas.microsoft.com/office/drawing/2014/main" id="{3B726C2F-E162-4F27-945A-273BA4C1C32C}"/>
               </a:ext>
             </a:extLst>
           </p:cNvPr>
@@ -9705,7 +9705,7 @@
           <p:cNvPr id="6" name="">
             <a:extLst xmlns:a="http://schemas.openxmlformats.org/drawingml/2006/main">
               <a:ext uri="{FF2B5EF4-FFF2-40B4-BE49-F238E27FC236}">
-                <a16:creationId xmlns:a16="http://schemas.microsoft.com/office/drawing/2014/main" id="{B8F91C2D-2397-4380-90F8-CB123CC4E531}"/>
+                <a16:creationId xmlns:a16="http://schemas.microsoft.com/office/drawing/2014/main" id="{37D85709-A2C8-4940-AD89-7D5D3448A64A}"/>
               </a:ext>
             </a:extLst>
           </p:cNvPr>
@@ -9736,7 +9736,7 @@
           <p:cNvPr id="7" name="">
             <a:extLst xmlns:a="http://schemas.openxmlformats.org/drawingml/2006/main">
               <a:ext uri="{FF2B5EF4-FFF2-40B4-BE49-F238E27FC236}">
-                <a16:creationId xmlns:a16="http://schemas.microsoft.com/office/drawing/2014/main" id="{5B556B9C-7BBA-40BF-8DF5-D53D21E14608}"/>
+                <a16:creationId xmlns:a16="http://schemas.microsoft.com/office/drawing/2014/main" id="{5C6A10EC-9FD0-4AF8-82A9-60257AA98E99}"/>
               </a:ext>
             </a:extLst>
           </p:cNvPr>
@@ -9793,7 +9793,7 @@
           <p:cNvPr id="8" name="">
             <a:extLst xmlns:a="http://schemas.openxmlformats.org/drawingml/2006/main">
               <a:ext uri="{FF2B5EF4-FFF2-40B4-BE49-F238E27FC236}">
-                <a16:creationId xmlns:a16="http://schemas.microsoft.com/office/drawing/2014/main" id="{F0F21158-63B4-49DF-9764-92077950EE02}"/>
+                <a16:creationId xmlns:a16="http://schemas.microsoft.com/office/drawing/2014/main" id="{F470E590-19B8-4887-ADBF-F0E3E6B245B1}"/>
               </a:ext>
             </a:extLst>
           </p:cNvPr>
@@ -9824,7 +9824,7 @@
           <p:cNvPr id="9" name="">
             <a:extLst xmlns:a="http://schemas.openxmlformats.org/drawingml/2006/main">
               <a:ext uri="{FF2B5EF4-FFF2-40B4-BE49-F238E27FC236}">
-                <a16:creationId xmlns:a16="http://schemas.microsoft.com/office/drawing/2014/main" id="{FD59447D-98C2-41FA-AF18-426853922B59}"/>
+                <a16:creationId xmlns:a16="http://schemas.microsoft.com/office/drawing/2014/main" id="{54437102-2645-44D7-9A93-388C731B7921}"/>
               </a:ext>
             </a:extLst>
           </p:cNvPr>
@@ -9881,7 +9881,7 @@
           <p:cNvPr id="10" name="">
             <a:extLst xmlns:a="http://schemas.openxmlformats.org/drawingml/2006/main">
               <a:ext uri="{FF2B5EF4-FFF2-40B4-BE49-F238E27FC236}">
-                <a16:creationId xmlns:a16="http://schemas.microsoft.com/office/drawing/2014/main" id="{7E2472A1-CD69-4414-A91B-45D9747D9F2D}"/>
+                <a16:creationId xmlns:a16="http://schemas.microsoft.com/office/drawing/2014/main" id="{60C9E748-8701-4800-8A2F-DEA5ECE49B4D}"/>
               </a:ext>
             </a:extLst>
           </p:cNvPr>
@@ -9912,7 +9912,7 @@
           <p:cNvPr id="11" name="">
             <a:extLst xmlns:a="http://schemas.openxmlformats.org/drawingml/2006/main">
               <a:ext uri="{FF2B5EF4-FFF2-40B4-BE49-F238E27FC236}">
-                <a16:creationId xmlns:a16="http://schemas.microsoft.com/office/drawing/2014/main" id="{16A2601B-D75E-40CD-80B9-905B9F7395FE}"/>
+                <a16:creationId xmlns:a16="http://schemas.microsoft.com/office/drawing/2014/main" id="{222F4547-CDC9-42F8-AE92-259B7BBDE5E7}"/>
               </a:ext>
             </a:extLst>
           </p:cNvPr>
@@ -9969,7 +9969,7 @@
           <p:cNvPr id="12" name="">
             <a:extLst xmlns:a="http://schemas.openxmlformats.org/drawingml/2006/main">
               <a:ext uri="{FF2B5EF4-FFF2-40B4-BE49-F238E27FC236}">
-                <a16:creationId xmlns:a16="http://schemas.microsoft.com/office/drawing/2014/main" id="{78A52FD7-D051-403D-B854-7F07E734B1AC}"/>
+                <a16:creationId xmlns:a16="http://schemas.microsoft.com/office/drawing/2014/main" id="{62BD98C2-E7CF-40A3-9407-8C6EA10725B9}"/>
               </a:ext>
             </a:extLst>
           </p:cNvPr>
@@ -10000,7 +10000,7 @@
           <p:cNvPr id="13" name="">
             <a:extLst xmlns:a="http://schemas.openxmlformats.org/drawingml/2006/main">
               <a:ext uri="{FF2B5EF4-FFF2-40B4-BE49-F238E27FC236}">
-                <a16:creationId xmlns:a16="http://schemas.microsoft.com/office/drawing/2014/main" id="{276BA486-1F6A-44AE-B800-054E7947ABDF}"/>
+                <a16:creationId xmlns:a16="http://schemas.microsoft.com/office/drawing/2014/main" id="{749B29B5-4528-439D-9AE3-D0ADF9F8216B}"/>
               </a:ext>
             </a:extLst>
           </p:cNvPr>
@@ -10057,7 +10057,7 @@
           <p:cNvPr id="14" name="">
             <a:extLst xmlns:a="http://schemas.openxmlformats.org/drawingml/2006/main">
               <a:ext uri="{FF2B5EF4-FFF2-40B4-BE49-F238E27FC236}">
-                <a16:creationId xmlns:a16="http://schemas.microsoft.com/office/drawing/2014/main" id="{9383B9AA-3BEE-4A6D-A14F-D3C2862AC5EA}"/>
+                <a16:creationId xmlns:a16="http://schemas.microsoft.com/office/drawing/2014/main" id="{02B63274-4CC9-41D6-B5FF-5C9920B6A1C6}"/>
               </a:ext>
             </a:extLst>
           </p:cNvPr>
@@ -10088,7 +10088,7 @@
           <p:cNvPr id="15" name="">
             <a:extLst xmlns:a="http://schemas.openxmlformats.org/drawingml/2006/main">
               <a:ext uri="{FF2B5EF4-FFF2-40B4-BE49-F238E27FC236}">
-                <a16:creationId xmlns:a16="http://schemas.microsoft.com/office/drawing/2014/main" id="{074561DA-97DB-438A-A22E-0E1D44083C34}"/>
+                <a16:creationId xmlns:a16="http://schemas.microsoft.com/office/drawing/2014/main" id="{4A4ECAF2-7CAE-4802-AEFC-0415BF85EA8E}"/>
               </a:ext>
             </a:extLst>
           </p:cNvPr>
@@ -10145,7 +10145,7 @@
           <p:cNvPr id="16" name="">
             <a:extLst xmlns:a="http://schemas.openxmlformats.org/drawingml/2006/main">
               <a:ext uri="{FF2B5EF4-FFF2-40B4-BE49-F238E27FC236}">
-                <a16:creationId xmlns:a16="http://schemas.microsoft.com/office/drawing/2014/main" id="{492B66BD-52EA-45A9-A82B-504941628085}"/>
+                <a16:creationId xmlns:a16="http://schemas.microsoft.com/office/drawing/2014/main" id="{20CBC043-843D-4B61-A9F1-89046B91CC3B}"/>
               </a:ext>
             </a:extLst>
           </p:cNvPr>
@@ -10176,7 +10176,7 @@
           <p:cNvPr id="17" name="">
             <a:extLst xmlns:a="http://schemas.openxmlformats.org/drawingml/2006/main">
               <a:ext uri="{FF2B5EF4-FFF2-40B4-BE49-F238E27FC236}">
-                <a16:creationId xmlns:a16="http://schemas.microsoft.com/office/drawing/2014/main" id="{E7DA8AA5-BC63-4C47-971A-962506CD7862}"/>
+                <a16:creationId xmlns:a16="http://schemas.microsoft.com/office/drawing/2014/main" id="{34753EAA-E743-4E4E-9034-A020336D5E65}"/>
               </a:ext>
             </a:extLst>
           </p:cNvPr>
@@ -10233,7 +10233,7 @@
           <p:cNvPr id="18" name="">
             <a:extLst xmlns:a="http://schemas.openxmlformats.org/drawingml/2006/main">
               <a:ext uri="{FF2B5EF4-FFF2-40B4-BE49-F238E27FC236}">
-                <a16:creationId xmlns:a16="http://schemas.microsoft.com/office/drawing/2014/main" id="{E8F3C79A-0FBC-44F9-8CD4-D95FD0946A28}"/>
+                <a16:creationId xmlns:a16="http://schemas.microsoft.com/office/drawing/2014/main" id="{9CBA4CB5-BBEF-4D53-B199-F4EBE5629215}"/>
               </a:ext>
             </a:extLst>
           </p:cNvPr>
@@ -10264,7 +10264,7 @@
           <p:cNvPr id="19" name="">
             <a:extLst xmlns:a="http://schemas.openxmlformats.org/drawingml/2006/main">
               <a:ext uri="{FF2B5EF4-FFF2-40B4-BE49-F238E27FC236}">
-                <a16:creationId xmlns:a16="http://schemas.microsoft.com/office/drawing/2014/main" id="{08918ADD-92AF-4A73-82F0-94D085F5F1EA}"/>
+                <a16:creationId xmlns:a16="http://schemas.microsoft.com/office/drawing/2014/main" id="{2C0E44C6-1CDF-4BB3-BEE3-E4C455EB21E0}"/>
               </a:ext>
             </a:extLst>
           </p:cNvPr>
@@ -10321,7 +10321,7 @@
           <p:cNvPr id="20" name="">
             <a:extLst xmlns:a="http://schemas.openxmlformats.org/drawingml/2006/main">
               <a:ext uri="{FF2B5EF4-FFF2-40B4-BE49-F238E27FC236}">
-                <a16:creationId xmlns:a16="http://schemas.microsoft.com/office/drawing/2014/main" id="{52A78A19-4EDF-44E5-B96A-311BB2E14258}"/>
+                <a16:creationId xmlns:a16="http://schemas.microsoft.com/office/drawing/2014/main" id="{123EDF9C-95C1-4960-9883-D24096DE41FD}"/>
               </a:ext>
             </a:extLst>
           </p:cNvPr>
@@ -10352,7 +10352,7 @@
           <p:cNvPr id="21" name="">
             <a:extLst xmlns:a="http://schemas.openxmlformats.org/drawingml/2006/main">
               <a:ext uri="{FF2B5EF4-FFF2-40B4-BE49-F238E27FC236}">
-                <a16:creationId xmlns:a16="http://schemas.microsoft.com/office/drawing/2014/main" id="{FBBE7E95-F035-47BA-8972-FF768E654AB9}"/>
+                <a16:creationId xmlns:a16="http://schemas.microsoft.com/office/drawing/2014/main" id="{75C0CA22-B454-40CC-9250-F447ECFA9C35}"/>
               </a:ext>
             </a:extLst>
           </p:cNvPr>
@@ -10383,7 +10383,7 @@
           <p:cNvPr id="22" name="">
             <a:extLst xmlns:a="http://schemas.openxmlformats.org/drawingml/2006/main">
               <a:ext uri="{FF2B5EF4-FFF2-40B4-BE49-F238E27FC236}">
-                <a16:creationId xmlns:a16="http://schemas.microsoft.com/office/drawing/2014/main" id="{C74F7F8F-B7A4-41A7-A9C0-39CB98A7B79E}"/>
+                <a16:creationId xmlns:a16="http://schemas.microsoft.com/office/drawing/2014/main" id="{502ACA20-75AF-4F72-AADD-CAC1CD838641}"/>
               </a:ext>
             </a:extLst>
           </p:cNvPr>
@@ -10440,7 +10440,7 @@
           <p:cNvPr id="23" name="">
             <a:extLst xmlns:a="http://schemas.openxmlformats.org/drawingml/2006/main">
               <a:ext uri="{FF2B5EF4-FFF2-40B4-BE49-F238E27FC236}">
-                <a16:creationId xmlns:a16="http://schemas.microsoft.com/office/drawing/2014/main" id="{6D648B44-CE5E-43B8-8201-924419821E2C}"/>
+                <a16:creationId xmlns:a16="http://schemas.microsoft.com/office/drawing/2014/main" id="{685C239A-B81C-4531-8026-C28EB2021596}"/>
               </a:ext>
             </a:extLst>
           </p:cNvPr>
@@ -10497,7 +10497,7 @@
           <p:cNvPr id="24" name="">
             <a:extLst xmlns:a="http://schemas.openxmlformats.org/drawingml/2006/main">
               <a:ext uri="{FF2B5EF4-FFF2-40B4-BE49-F238E27FC236}">
-                <a16:creationId xmlns:a16="http://schemas.microsoft.com/office/drawing/2014/main" id="{421BFECE-B2FC-4B5C-BE2C-F8B2953BFBF2}"/>
+                <a16:creationId xmlns:a16="http://schemas.microsoft.com/office/drawing/2014/main" id="{3331B1D2-CC19-4A54-92C8-E5395B574E98}"/>
               </a:ext>
             </a:extLst>
           </p:cNvPr>
@@ -10532,7 +10532,7 @@
           <p:cNvPr id="25" name="">
             <a:extLst xmlns:a="http://schemas.openxmlformats.org/drawingml/2006/main">
               <a:ext uri="{FF2B5EF4-FFF2-40B4-BE49-F238E27FC236}">
-                <a16:creationId xmlns:a16="http://schemas.microsoft.com/office/drawing/2014/main" id="{6752E774-7054-476B-8799-3EFAC874BF4A}"/>
+                <a16:creationId xmlns:a16="http://schemas.microsoft.com/office/drawing/2014/main" id="{E92F6E8F-D7FF-4C7D-B3BC-99E3D686B5BF}"/>
               </a:ext>
             </a:extLst>
           </p:cNvPr>
@@ -10635,7 +10635,7 @@
           <p:cNvPr id="26" name="">
             <a:extLst xmlns:a="http://schemas.openxmlformats.org/drawingml/2006/main">
               <a:ext uri="{FF2B5EF4-FFF2-40B4-BE49-F238E27FC236}">
-                <a16:creationId xmlns:a16="http://schemas.microsoft.com/office/drawing/2014/main" id="{A1CC83EE-5807-4FB0-9514-6744667EFC1D}"/>
+                <a16:creationId xmlns:a16="http://schemas.microsoft.com/office/drawing/2014/main" id="{AD1A6F80-156E-4DE0-9E4D-735F8140F17A}"/>
               </a:ext>
             </a:extLst>
           </p:cNvPr>
@@ -10670,7 +10670,7 @@
           <p:cNvPr id="27" name="">
             <a:extLst xmlns:a="http://schemas.openxmlformats.org/drawingml/2006/main">
               <a:ext uri="{FF2B5EF4-FFF2-40B4-BE49-F238E27FC236}">
-                <a16:creationId xmlns:a16="http://schemas.microsoft.com/office/drawing/2014/main" id="{63F07D37-9F59-4459-80EA-58CE66FE6AFD}"/>
+                <a16:creationId xmlns:a16="http://schemas.microsoft.com/office/drawing/2014/main" id="{81A9235B-FD19-4AF6-AAEB-81B4227D501B}"/>
               </a:ext>
             </a:extLst>
           </p:cNvPr>
@@ -10773,7 +10773,7 @@
           <p:cNvPr id="28" name="">
             <a:extLst xmlns:a="http://schemas.openxmlformats.org/drawingml/2006/main">
               <a:ext uri="{FF2B5EF4-FFF2-40B4-BE49-F238E27FC236}">
-                <a16:creationId xmlns:a16="http://schemas.microsoft.com/office/drawing/2014/main" id="{C3458915-DE09-4603-A9F4-6DE2044CD934}"/>
+                <a16:creationId xmlns:a16="http://schemas.microsoft.com/office/drawing/2014/main" id="{8B91BBBF-1E81-4C33-84FE-E77E0C2BC5F3}"/>
               </a:ext>
             </a:extLst>
           </p:cNvPr>
@@ -10808,7 +10808,7 @@
           <p:cNvPr id="29" name="">
             <a:extLst xmlns:a="http://schemas.openxmlformats.org/drawingml/2006/main">
               <a:ext uri="{FF2B5EF4-FFF2-40B4-BE49-F238E27FC236}">
-                <a16:creationId xmlns:a16="http://schemas.microsoft.com/office/drawing/2014/main" id="{DDCFAAAD-C4E8-4455-A4CD-63D949F34824}"/>
+                <a16:creationId xmlns:a16="http://schemas.microsoft.com/office/drawing/2014/main" id="{FC6DC944-9070-47B8-B4BE-BB9D5A8359D7}"/>
               </a:ext>
             </a:extLst>
           </p:cNvPr>
@@ -10911,7 +10911,7 @@
           <p:cNvPr id="30" name="">
             <a:extLst xmlns:a="http://schemas.openxmlformats.org/drawingml/2006/main">
               <a:ext uri="{FF2B5EF4-FFF2-40B4-BE49-F238E27FC236}">
-                <a16:creationId xmlns:a16="http://schemas.microsoft.com/office/drawing/2014/main" id="{5211224B-DAE3-4DD0-88A3-0E423F500861}"/>
+                <a16:creationId xmlns:a16="http://schemas.microsoft.com/office/drawing/2014/main" id="{155B9037-C426-4DBE-8606-B0FF4FED92D0}"/>
               </a:ext>
             </a:extLst>
           </p:cNvPr>
@@ -10946,7 +10946,7 @@
           <p:cNvPr id="31" name="">
             <a:extLst xmlns:a="http://schemas.openxmlformats.org/drawingml/2006/main">
               <a:ext uri="{FF2B5EF4-FFF2-40B4-BE49-F238E27FC236}">
-                <a16:creationId xmlns:a16="http://schemas.microsoft.com/office/drawing/2014/main" id="{2B9E39B6-3F64-430A-80B5-1F204B4BE672}"/>
+                <a16:creationId xmlns:a16="http://schemas.microsoft.com/office/drawing/2014/main" id="{C568B430-7B6D-4E1A-BE04-DAE77E6155EC}"/>
               </a:ext>
             </a:extLst>
           </p:cNvPr>
@@ -11049,7 +11049,7 @@
           <p:cNvPr id="32" name="">
             <a:extLst xmlns:a="http://schemas.openxmlformats.org/drawingml/2006/main">
               <a:ext uri="{FF2B5EF4-FFF2-40B4-BE49-F238E27FC236}">
-                <a16:creationId xmlns:a16="http://schemas.microsoft.com/office/drawing/2014/main" id="{60091DEE-5459-4FBF-AAE6-BA23CF888DF2}"/>
+                <a16:creationId xmlns:a16="http://schemas.microsoft.com/office/drawing/2014/main" id="{CEC3F069-0077-4F6E-A3AD-9E96A6FBF3D1}"/>
               </a:ext>
             </a:extLst>
           </p:cNvPr>
@@ -11084,7 +11084,7 @@
           <p:cNvPr id="33" name="">
             <a:extLst xmlns:a="http://schemas.openxmlformats.org/drawingml/2006/main">
               <a:ext uri="{FF2B5EF4-FFF2-40B4-BE49-F238E27FC236}">
-                <a16:creationId xmlns:a16="http://schemas.microsoft.com/office/drawing/2014/main" id="{3AFD838B-4319-4B15-BAB4-5045881AD9F9}"/>
+                <a16:creationId xmlns:a16="http://schemas.microsoft.com/office/drawing/2014/main" id="{CC9A52AB-8C0B-4E36-BDF1-6F10342E7CF3}"/>
               </a:ext>
             </a:extLst>
           </p:cNvPr>
@@ -11187,7 +11187,7 @@
           <p:cNvPr id="34" name="">
             <a:extLst xmlns:a="http://schemas.openxmlformats.org/drawingml/2006/main">
               <a:ext uri="{FF2B5EF4-FFF2-40B4-BE49-F238E27FC236}">
-                <a16:creationId xmlns:a16="http://schemas.microsoft.com/office/drawing/2014/main" id="{60B48757-DA11-4B12-AA85-83801F17B0D4}"/>
+                <a16:creationId xmlns:a16="http://schemas.microsoft.com/office/drawing/2014/main" id="{165A0385-B67D-4126-9162-F0A241B9679C}"/>
               </a:ext>
             </a:extLst>
           </p:cNvPr>
@@ -11222,7 +11222,7 @@
           <p:cNvPr id="35" name="">
             <a:extLst xmlns:a="http://schemas.openxmlformats.org/drawingml/2006/main">
               <a:ext uri="{FF2B5EF4-FFF2-40B4-BE49-F238E27FC236}">
-                <a16:creationId xmlns:a16="http://schemas.microsoft.com/office/drawing/2014/main" id="{A75CCB24-1408-4788-8699-8269C14306A5}"/>
+                <a16:creationId xmlns:a16="http://schemas.microsoft.com/office/drawing/2014/main" id="{5E74ED49-38A3-4419-8607-1F38B337D6B9}"/>
               </a:ext>
             </a:extLst>
           </p:cNvPr>
@@ -11325,7 +11325,7 @@
           <p:cNvPr id="36" name="">
             <a:extLst xmlns:a="http://schemas.openxmlformats.org/drawingml/2006/main">
               <a:ext uri="{FF2B5EF4-FFF2-40B4-BE49-F238E27FC236}">
-                <a16:creationId xmlns:a16="http://schemas.microsoft.com/office/drawing/2014/main" id="{C0749E88-D608-47DF-9026-81C5ED725A4E}"/>
+                <a16:creationId xmlns:a16="http://schemas.microsoft.com/office/drawing/2014/main" id="{FFF2B253-2377-4C4B-AED5-D190C295A88C}"/>
               </a:ext>
             </a:extLst>
           </p:cNvPr>
@@ -11382,7 +11382,7 @@
           <p:cNvPr id="37" name="">
             <a:extLst xmlns:a="http://schemas.openxmlformats.org/drawingml/2006/main">
               <a:ext uri="{FF2B5EF4-FFF2-40B4-BE49-F238E27FC236}">
-                <a16:creationId xmlns:a16="http://schemas.microsoft.com/office/drawing/2014/main" id="{87D4A847-74DD-489C-8D7E-7A1D9EBB1E2A}"/>
+                <a16:creationId xmlns:a16="http://schemas.microsoft.com/office/drawing/2014/main" id="{AFE2F75E-3CD0-4152-9DEC-E4F24878728A}"/>
               </a:ext>
             </a:extLst>
           </p:cNvPr>
@@ -11439,7 +11439,7 @@
           <p:cNvPr id="38" name="">
             <a:extLst xmlns:a="http://schemas.openxmlformats.org/drawingml/2006/main">
               <a:ext uri="{FF2B5EF4-FFF2-40B4-BE49-F238E27FC236}">
-                <a16:creationId xmlns:a16="http://schemas.microsoft.com/office/drawing/2014/main" id="{9D778436-0960-4BEE-ABD5-7A90369AE842}"/>
+                <a16:creationId xmlns:a16="http://schemas.microsoft.com/office/drawing/2014/main" id="{DE3A43B2-0FC0-4172-BF93-92A7EBF41F03}"/>
               </a:ext>
             </a:extLst>
           </p:cNvPr>
@@ -11496,7 +11496,7 @@
           <p:cNvPr id="39" name="">
             <a:extLst xmlns:a="http://schemas.openxmlformats.org/drawingml/2006/main">
               <a:ext uri="{FF2B5EF4-FFF2-40B4-BE49-F238E27FC236}">
-                <a16:creationId xmlns:a16="http://schemas.microsoft.com/office/drawing/2014/main" id="{D26BC5EF-3FFA-4923-9C80-CB86DA0AF9DD}"/>
+                <a16:creationId xmlns:a16="http://schemas.microsoft.com/office/drawing/2014/main" id="{809FCE04-A95B-4C50-BD87-718DF6033270}"/>
               </a:ext>
             </a:extLst>
           </p:cNvPr>
@@ -11553,7 +11553,7 @@
           <p:cNvPr id="40" name="">
             <a:extLst xmlns:a="http://schemas.openxmlformats.org/drawingml/2006/main">
               <a:ext uri="{FF2B5EF4-FFF2-40B4-BE49-F238E27FC236}">
-                <a16:creationId xmlns:a16="http://schemas.microsoft.com/office/drawing/2014/main" id="{40EA7A9A-9D1E-436C-B411-3B0EB991BC2E}"/>
+                <a16:creationId xmlns:a16="http://schemas.microsoft.com/office/drawing/2014/main" id="{31F356F1-7BBF-477E-A48A-04D16CB8E81B}"/>
               </a:ext>
             </a:extLst>
           </p:cNvPr>
@@ -11610,7 +11610,7 @@
           <p:cNvPr id="41" name="">
             <a:extLst xmlns:a="http://schemas.openxmlformats.org/drawingml/2006/main">
               <a:ext uri="{FF2B5EF4-FFF2-40B4-BE49-F238E27FC236}">
-                <a16:creationId xmlns:a16="http://schemas.microsoft.com/office/drawing/2014/main" id="{3EF000C6-94EF-431D-A3C2-0EE6AFE7EB55}"/>
+                <a16:creationId xmlns:a16="http://schemas.microsoft.com/office/drawing/2014/main" id="{A25664F8-94BA-4BDC-A0E4-EE424C5E8F5C}"/>
               </a:ext>
             </a:extLst>
           </p:cNvPr>
@@ -11665,7 +11665,7 @@
     </p:spTree>
     <p:extLst>
       <p:ext uri="{BB962C8B-B14F-4D97-AF65-F5344CB8AC3E}">
-        <p14:creationId xmlns:p14="http://schemas.microsoft.com/office/powerpoint/2010/main" val="1418199220"/>
+        <p14:creationId xmlns:p14="http://schemas.microsoft.com/office/powerpoint/2010/main" val="1115612373"/>
       </p:ext>
     </p:extLst>
   </p:cSld>
@@ -11696,7 +11696,7 @@
           <p:cNvPr id="15" name="slide-title">
             <a:extLst xmlns:a="http://schemas.openxmlformats.org/drawingml/2006/main">
               <a:ext uri="{FF2B5EF4-FFF2-40B4-BE49-F238E27FC236}">
-                <a16:creationId xmlns:a16="http://schemas.microsoft.com/office/drawing/2014/main" id="{8F0AB518-53E9-4AC9-9400-BF563AC5DAED}"/>
+                <a16:creationId xmlns:a16="http://schemas.microsoft.com/office/drawing/2014/main" id="{5953BC58-28B6-48CE-89E7-1C550D9EB032}"/>
               </a:ext>
             </a:extLst>
           </p:cNvPr>
@@ -11753,7 +11753,7 @@
           <p:cNvPr id="2" name="slide-subtitle">
             <a:extLst xmlns:a="http://schemas.openxmlformats.org/drawingml/2006/main">
               <a:ext uri="{FF2B5EF4-FFF2-40B4-BE49-F238E27FC236}">
-                <a16:creationId xmlns:a16="http://schemas.microsoft.com/office/drawing/2014/main" id="{2E9AD869-02C5-4A0C-8357-67CA6A795598}"/>
+                <a16:creationId xmlns:a16="http://schemas.microsoft.com/office/drawing/2014/main" id="{A67FF50C-EEDE-467A-A518-44A8AE52DB7C}"/>
               </a:ext>
             </a:extLst>
           </p:cNvPr>
@@ -11810,7 +11810,7 @@
           <p:cNvPr id="3" name="">
             <a:extLst xmlns:a="http://schemas.openxmlformats.org/drawingml/2006/main">
               <a:ext uri="{FF2B5EF4-FFF2-40B4-BE49-F238E27FC236}">
-                <a16:creationId xmlns:a16="http://schemas.microsoft.com/office/drawing/2014/main" id="{CB2D3F19-14F7-4569-9721-CD668916C5BB}"/>
+                <a16:creationId xmlns:a16="http://schemas.microsoft.com/office/drawing/2014/main" id="{AF6ACFED-BCBD-44E0-938E-C8927D3D3729}"/>
               </a:ext>
             </a:extLst>
           </p:cNvPr>
@@ -11841,7 +11841,7 @@
           <p:cNvPr id="4" name="">
             <a:extLst xmlns:a="http://schemas.openxmlformats.org/drawingml/2006/main">
               <a:ext uri="{FF2B5EF4-FFF2-40B4-BE49-F238E27FC236}">
-                <a16:creationId xmlns:a16="http://schemas.microsoft.com/office/drawing/2014/main" id="{5D70A50E-F9BA-41B6-A5E9-33A096B8B0E9}"/>
+                <a16:creationId xmlns:a16="http://schemas.microsoft.com/office/drawing/2014/main" id="{A4154F59-5F0C-49A8-BD20-650F497EEFC9}"/>
               </a:ext>
             </a:extLst>
           </p:cNvPr>
@@ -11905,7 +11905,7 @@
         </p:xfrm>
         <a:graphic xmlns:a="http://schemas.openxmlformats.org/drawingml/2006/main">
           <a:graphicData uri="http://schemas.openxmlformats.org/drawingml/2006/chart">
-            <c:chart xmlns:r="http://schemas.openxmlformats.org/officeDocument/2006/relationships" xmlns:c="http://schemas.openxmlformats.org/drawingml/2006/chart" r:id="R533051300f5c4a87"/>
+            <c:chart xmlns:r="http://schemas.openxmlformats.org/officeDocument/2006/relationships" xmlns:c="http://schemas.openxmlformats.org/drawingml/2006/chart" r:id="R28670102004c410c"/>
           </a:graphicData>
         </a:graphic>
       </p:graphicFrame>
@@ -11914,7 +11914,7 @@
           <p:cNvPr id="6" name="">
             <a:extLst xmlns:a="http://schemas.openxmlformats.org/drawingml/2006/main">
               <a:ext uri="{FF2B5EF4-FFF2-40B4-BE49-F238E27FC236}">
-                <a16:creationId xmlns:a16="http://schemas.microsoft.com/office/drawing/2014/main" id="{1C7B657F-828C-4181-8E69-7103179F787C}"/>
+                <a16:creationId xmlns:a16="http://schemas.microsoft.com/office/drawing/2014/main" id="{22FCDBB4-3CC7-44F5-A9D1-CD76CA334F32}"/>
               </a:ext>
             </a:extLst>
           </p:cNvPr>
@@ -11978,7 +11978,7 @@
         </p:xfrm>
         <a:graphic xmlns:a="http://schemas.openxmlformats.org/drawingml/2006/main">
           <a:graphicData uri="http://schemas.openxmlformats.org/drawingml/2006/chart">
-            <c:chart xmlns:r="http://schemas.openxmlformats.org/officeDocument/2006/relationships" xmlns:c="http://schemas.openxmlformats.org/drawingml/2006/chart" r:id="Rdf99ed661f2f456a"/>
+            <c:chart xmlns:r="http://schemas.openxmlformats.org/officeDocument/2006/relationships" xmlns:c="http://schemas.openxmlformats.org/drawingml/2006/chart" r:id="R1c088ec9a42f44d9"/>
           </a:graphicData>
         </a:graphic>
       </p:graphicFrame>
@@ -11987,7 +11987,7 @@
           <p:cNvPr id="8" name="">
             <a:extLst xmlns:a="http://schemas.openxmlformats.org/drawingml/2006/main">
               <a:ext uri="{FF2B5EF4-FFF2-40B4-BE49-F238E27FC236}">
-                <a16:creationId xmlns:a16="http://schemas.microsoft.com/office/drawing/2014/main" id="{36C03705-E19B-4B3E-8F22-455D7AB0AD1F}"/>
+                <a16:creationId xmlns:a16="http://schemas.microsoft.com/office/drawing/2014/main" id="{B979C608-6810-4FAB-830B-EE537B3ED1E2}"/>
               </a:ext>
             </a:extLst>
           </p:cNvPr>
@@ -12051,7 +12051,7 @@
         </p:xfrm>
         <a:graphic xmlns:a="http://schemas.openxmlformats.org/drawingml/2006/main">
           <a:graphicData uri="http://schemas.openxmlformats.org/drawingml/2006/chart">
-            <c:chart xmlns:r="http://schemas.openxmlformats.org/officeDocument/2006/relationships" xmlns:c="http://schemas.openxmlformats.org/drawingml/2006/chart" r:id="R5214585ab217471b"/>
+            <c:chart xmlns:r="http://schemas.openxmlformats.org/officeDocument/2006/relationships" xmlns:c="http://schemas.openxmlformats.org/drawingml/2006/chart" r:id="R713271793a6f46ed"/>
           </a:graphicData>
         </a:graphic>
       </p:graphicFrame>
@@ -12060,7 +12060,7 @@
           <p:cNvPr id="10" name="">
             <a:extLst xmlns:a="http://schemas.openxmlformats.org/drawingml/2006/main">
               <a:ext uri="{FF2B5EF4-FFF2-40B4-BE49-F238E27FC236}">
-                <a16:creationId xmlns:a16="http://schemas.microsoft.com/office/drawing/2014/main" id="{718FCD47-5A6D-4586-9667-33FF607CAB56}"/>
+                <a16:creationId xmlns:a16="http://schemas.microsoft.com/office/drawing/2014/main" id="{A4C8B0CC-3B36-4136-9FFF-C23164919410}"/>
               </a:ext>
             </a:extLst>
           </p:cNvPr>
@@ -12124,7 +12124,7 @@
         </p:xfrm>
         <a:graphic xmlns:a="http://schemas.openxmlformats.org/drawingml/2006/main">
           <a:graphicData uri="http://schemas.openxmlformats.org/drawingml/2006/chart">
-            <c:chart xmlns:r="http://schemas.openxmlformats.org/officeDocument/2006/relationships" xmlns:c="http://schemas.openxmlformats.org/drawingml/2006/chart" r:id="R9db5afe3d1794ee0"/>
+            <c:chart xmlns:r="http://schemas.openxmlformats.org/officeDocument/2006/relationships" xmlns:c="http://schemas.openxmlformats.org/drawingml/2006/chart" r:id="R6a7c418aa23c475b"/>
           </a:graphicData>
         </a:graphic>
       </p:graphicFrame>
@@ -12133,7 +12133,7 @@
           <p:cNvPr id="12" name="">
             <a:extLst xmlns:a="http://schemas.openxmlformats.org/drawingml/2006/main">
               <a:ext uri="{FF2B5EF4-FFF2-40B4-BE49-F238E27FC236}">
-                <a16:creationId xmlns:a16="http://schemas.microsoft.com/office/drawing/2014/main" id="{F7CD91D4-3B32-43FF-AD7C-84E20DFE784A}"/>
+                <a16:creationId xmlns:a16="http://schemas.microsoft.com/office/drawing/2014/main" id="{C98143A0-9295-466D-8FB8-72F59F554B16}"/>
               </a:ext>
             </a:extLst>
           </p:cNvPr>
@@ -12190,7 +12190,7 @@
           <p:cNvPr id="13" name="">
             <a:extLst xmlns:a="http://schemas.openxmlformats.org/drawingml/2006/main">
               <a:ext uri="{FF2B5EF4-FFF2-40B4-BE49-F238E27FC236}">
-                <a16:creationId xmlns:a16="http://schemas.microsoft.com/office/drawing/2014/main" id="{B393193F-4AC6-4191-ADF5-D7447A11D97D}"/>
+                <a16:creationId xmlns:a16="http://schemas.microsoft.com/office/drawing/2014/main" id="{6162B605-8D6F-45E5-B198-2C18A504C734}"/>
               </a:ext>
             </a:extLst>
           </p:cNvPr>
@@ -12247,7 +12247,7 @@
           <p:cNvPr id="14" name="">
             <a:extLst xmlns:a="http://schemas.openxmlformats.org/drawingml/2006/main">
               <a:ext uri="{FF2B5EF4-FFF2-40B4-BE49-F238E27FC236}">
-                <a16:creationId xmlns:a16="http://schemas.microsoft.com/office/drawing/2014/main" id="{8F78A027-A218-49F2-A792-A7795CCD8E7E}"/>
+                <a16:creationId xmlns:a16="http://schemas.microsoft.com/office/drawing/2014/main" id="{BE58BDEA-B323-4001-97E3-91F02E8FDB2F}"/>
               </a:ext>
             </a:extLst>
           </p:cNvPr>
@@ -12302,7 +12302,7 @@
     </p:spTree>
     <p:extLst>
       <p:ext uri="{BB962C8B-B14F-4D97-AF65-F5344CB8AC3E}">
-        <p14:creationId xmlns:p14="http://schemas.microsoft.com/office/powerpoint/2010/main" val="1538674503"/>
+        <p14:creationId xmlns:p14="http://schemas.microsoft.com/office/powerpoint/2010/main" val="842054216"/>
       </p:ext>
     </p:extLst>
   </p:cSld>
@@ -12333,7 +12333,7 @@
           <p:cNvPr id="6" name="slide-title">
             <a:extLst xmlns:a="http://schemas.openxmlformats.org/drawingml/2006/main">
               <a:ext uri="{FF2B5EF4-FFF2-40B4-BE49-F238E27FC236}">
-                <a16:creationId xmlns:a16="http://schemas.microsoft.com/office/drawing/2014/main" id="{4F601D24-997B-466E-9BE4-C7E628EA399D}"/>
+                <a16:creationId xmlns:a16="http://schemas.microsoft.com/office/drawing/2014/main" id="{38717B41-5EE4-41C6-929D-B9D441240DA4}"/>
               </a:ext>
             </a:extLst>
           </p:cNvPr>
@@ -12390,7 +12390,7 @@
           <p:cNvPr id="2" name="slide-subtitle">
             <a:extLst xmlns:a="http://schemas.openxmlformats.org/drawingml/2006/main">
               <a:ext uri="{FF2B5EF4-FFF2-40B4-BE49-F238E27FC236}">
-                <a16:creationId xmlns:a16="http://schemas.microsoft.com/office/drawing/2014/main" id="{F12CB3BC-D0DE-45D4-9404-2E7C49E30281}"/>
+                <a16:creationId xmlns:a16="http://schemas.microsoft.com/office/drawing/2014/main" id="{4B83189E-C977-4797-BF50-564AE81205B8}"/>
               </a:ext>
             </a:extLst>
           </p:cNvPr>
@@ -12447,7 +12447,7 @@
           <p:cNvPr id="3" name="">
             <a:extLst xmlns:a="http://schemas.openxmlformats.org/drawingml/2006/main">
               <a:ext uri="{FF2B5EF4-FFF2-40B4-BE49-F238E27FC236}">
-                <a16:creationId xmlns:a16="http://schemas.microsoft.com/office/drawing/2014/main" id="{142222C1-2696-44F9-8B4D-6A347077962D}"/>
+                <a16:creationId xmlns:a16="http://schemas.microsoft.com/office/drawing/2014/main" id="{AB5CFB22-36B3-4991-AC3E-9D53CA1458E3}"/>
               </a:ext>
             </a:extLst>
           </p:cNvPr>
@@ -13090,7 +13090,7 @@
           <p:cNvPr id="5" name="">
             <a:extLst xmlns:a="http://schemas.openxmlformats.org/drawingml/2006/main">
               <a:ext uri="{FF2B5EF4-FFF2-40B4-BE49-F238E27FC236}">
-                <a16:creationId xmlns:a16="http://schemas.microsoft.com/office/drawing/2014/main" id="{7F8DD606-CAC6-4D58-A39A-F085B5B293E5}"/>
+                <a16:creationId xmlns:a16="http://schemas.microsoft.com/office/drawing/2014/main" id="{56CCC8AE-6D76-4BA0-83B8-A8AB8E72FB92}"/>
               </a:ext>
             </a:extLst>
           </p:cNvPr>
@@ -13145,7 +13145,7 @@
     </p:spTree>
     <p:extLst>
       <p:ext uri="{BB962C8B-B14F-4D97-AF65-F5344CB8AC3E}">
-        <p14:creationId xmlns:p14="http://schemas.microsoft.com/office/powerpoint/2010/main" val="1009548901"/>
+        <p14:creationId xmlns:p14="http://schemas.microsoft.com/office/powerpoint/2010/main" val="1314193275"/>
       </p:ext>
     </p:extLst>
   </p:cSld>
@@ -13176,7 +13176,7 @@
           <p:cNvPr id="10" name="slide-title">
             <a:extLst xmlns:a="http://schemas.openxmlformats.org/drawingml/2006/main">
               <a:ext uri="{FF2B5EF4-FFF2-40B4-BE49-F238E27FC236}">
-                <a16:creationId xmlns:a16="http://schemas.microsoft.com/office/drawing/2014/main" id="{E73BB529-A7AE-4D08-8C90-6A89AB1733D6}"/>
+                <a16:creationId xmlns:a16="http://schemas.microsoft.com/office/drawing/2014/main" id="{45D9A32D-6E16-42B0-99BA-EA8D28673439}"/>
               </a:ext>
             </a:extLst>
           </p:cNvPr>
@@ -13233,7 +13233,7 @@
           <p:cNvPr id="2" name="slide-subtitle">
             <a:extLst xmlns:a="http://schemas.openxmlformats.org/drawingml/2006/main">
               <a:ext uri="{FF2B5EF4-FFF2-40B4-BE49-F238E27FC236}">
-                <a16:creationId xmlns:a16="http://schemas.microsoft.com/office/drawing/2014/main" id="{76433443-621F-4D37-897D-7A2917B4E00C}"/>
+                <a16:creationId xmlns:a16="http://schemas.microsoft.com/office/drawing/2014/main" id="{08EC6115-A87E-4CA3-A905-18E4801F2955}"/>
               </a:ext>
             </a:extLst>
           </p:cNvPr>
@@ -13290,7 +13290,7 @@
           <p:cNvPr id="3" name="">
             <a:extLst xmlns:a="http://schemas.openxmlformats.org/drawingml/2006/main">
               <a:ext uri="{FF2B5EF4-FFF2-40B4-BE49-F238E27FC236}">
-                <a16:creationId xmlns:a16="http://schemas.microsoft.com/office/drawing/2014/main" id="{C0347041-E9FA-4615-9B1C-A5DDF2CF8C10}"/>
+                <a16:creationId xmlns:a16="http://schemas.microsoft.com/office/drawing/2014/main" id="{34D95450-662B-462F-99F8-3B435F310947}"/>
               </a:ext>
             </a:extLst>
           </p:cNvPr>
@@ -13328,7 +13328,7 @@
         </p:xfrm>
         <a:graphic xmlns:a="http://schemas.openxmlformats.org/drawingml/2006/main">
           <a:graphicData uri="http://schemas.openxmlformats.org/drawingml/2006/chart">
-            <c:chart xmlns:r="http://schemas.openxmlformats.org/officeDocument/2006/relationships" xmlns:c="http://schemas.openxmlformats.org/drawingml/2006/chart" r:id="Rd2a9151559bf4198"/>
+            <c:chart xmlns:r="http://schemas.openxmlformats.org/officeDocument/2006/relationships" xmlns:c="http://schemas.openxmlformats.org/drawingml/2006/chart" r:id="Re7aa1473bbd3427f"/>
           </a:graphicData>
         </a:graphic>
       </p:graphicFrame>
@@ -13337,7 +13337,7 @@
           <p:cNvPr id="5" name="">
             <a:extLst xmlns:a="http://schemas.openxmlformats.org/drawingml/2006/main">
               <a:ext uri="{FF2B5EF4-FFF2-40B4-BE49-F238E27FC236}">
-                <a16:creationId xmlns:a16="http://schemas.microsoft.com/office/drawing/2014/main" id="{173DC5A3-B036-46C2-A297-BC1057B54BDA}"/>
+                <a16:creationId xmlns:a16="http://schemas.microsoft.com/office/drawing/2014/main" id="{240B30A3-5F0F-45C7-8E94-6BA10252CF28}"/>
               </a:ext>
             </a:extLst>
           </p:cNvPr>
@@ -13417,7 +13417,7 @@
           <p:cNvPr id="6" name="">
             <a:extLst xmlns:a="http://schemas.openxmlformats.org/drawingml/2006/main">
               <a:ext uri="{FF2B5EF4-FFF2-40B4-BE49-F238E27FC236}">
-                <a16:creationId xmlns:a16="http://schemas.microsoft.com/office/drawing/2014/main" id="{369D37AF-7733-4D73-9E2C-9C2EE9444A86}"/>
+                <a16:creationId xmlns:a16="http://schemas.microsoft.com/office/drawing/2014/main" id="{02773FB1-B919-4208-81F8-4E3960B8318C}"/>
               </a:ext>
             </a:extLst>
           </p:cNvPr>
@@ -13497,7 +13497,7 @@
           <p:cNvPr id="7" name="">
             <a:extLst xmlns:a="http://schemas.openxmlformats.org/drawingml/2006/main">
               <a:ext uri="{FF2B5EF4-FFF2-40B4-BE49-F238E27FC236}">
-                <a16:creationId xmlns:a16="http://schemas.microsoft.com/office/drawing/2014/main" id="{F5767914-E85B-4A9C-AA5B-DF9C1CF6F494}"/>
+                <a16:creationId xmlns:a16="http://schemas.microsoft.com/office/drawing/2014/main" id="{995B6579-1DF8-475F-B05B-7C0D290CCFA0}"/>
               </a:ext>
             </a:extLst>
           </p:cNvPr>
@@ -13554,7 +13554,7 @@
           <p:cNvPr id="8" name="">
             <a:extLst xmlns:a="http://schemas.openxmlformats.org/drawingml/2006/main">
               <a:ext uri="{FF2B5EF4-FFF2-40B4-BE49-F238E27FC236}">
-                <a16:creationId xmlns:a16="http://schemas.microsoft.com/office/drawing/2014/main" id="{4C3EE33D-D1AA-452D-83F9-C253CF337F97}"/>
+                <a16:creationId xmlns:a16="http://schemas.microsoft.com/office/drawing/2014/main" id="{80274853-3190-4DFF-99ED-B2339B7B60F0}"/>
               </a:ext>
             </a:extLst>
           </p:cNvPr>
@@ -13611,7 +13611,7 @@
           <p:cNvPr id="9" name="">
             <a:extLst xmlns:a="http://schemas.openxmlformats.org/drawingml/2006/main">
               <a:ext uri="{FF2B5EF4-FFF2-40B4-BE49-F238E27FC236}">
-                <a16:creationId xmlns:a16="http://schemas.microsoft.com/office/drawing/2014/main" id="{7B4BAA4F-DFFB-41F1-BE64-F4D83860F984}"/>
+                <a16:creationId xmlns:a16="http://schemas.microsoft.com/office/drawing/2014/main" id="{039AFDB9-FAF9-4A8A-B998-A0F3A52C8907}"/>
               </a:ext>
             </a:extLst>
           </p:cNvPr>
@@ -13666,7 +13666,7 @@
     </p:spTree>
     <p:extLst>
       <p:ext uri="{BB962C8B-B14F-4D97-AF65-F5344CB8AC3E}">
-        <p14:creationId xmlns:p14="http://schemas.microsoft.com/office/powerpoint/2010/main" val="40843211"/>
+        <p14:creationId xmlns:p14="http://schemas.microsoft.com/office/powerpoint/2010/main" val="352994514"/>
       </p:ext>
     </p:extLst>
   </p:cSld>
@@ -13697,7 +13697,7 @@
           <p:cNvPr id="37" name="slide-title">
             <a:extLst xmlns:a="http://schemas.openxmlformats.org/drawingml/2006/main">
               <a:ext uri="{FF2B5EF4-FFF2-40B4-BE49-F238E27FC236}">
-                <a16:creationId xmlns:a16="http://schemas.microsoft.com/office/drawing/2014/main" id="{8AB60201-6310-4785-BE82-DD3DB215F56C}"/>
+                <a16:creationId xmlns:a16="http://schemas.microsoft.com/office/drawing/2014/main" id="{45968F87-C538-4FF7-96DA-B0253AF0CF53}"/>
               </a:ext>
             </a:extLst>
           </p:cNvPr>
@@ -13754,7 +13754,7 @@
           <p:cNvPr id="2" name="slide-subtitle">
             <a:extLst xmlns:a="http://schemas.openxmlformats.org/drawingml/2006/main">
               <a:ext uri="{FF2B5EF4-FFF2-40B4-BE49-F238E27FC236}">
-                <a16:creationId xmlns:a16="http://schemas.microsoft.com/office/drawing/2014/main" id="{6693246F-CCC9-4FB3-8241-AEB53AA6BE09}"/>
+                <a16:creationId xmlns:a16="http://schemas.microsoft.com/office/drawing/2014/main" id="{49AA9F5D-34E8-4469-A879-0AECFE4BE871}"/>
               </a:ext>
             </a:extLst>
           </p:cNvPr>
@@ -13811,7 +13811,7 @@
           <p:cNvPr id="3" name="">
             <a:extLst xmlns:a="http://schemas.openxmlformats.org/drawingml/2006/main">
               <a:ext uri="{FF2B5EF4-FFF2-40B4-BE49-F238E27FC236}">
-                <a16:creationId xmlns:a16="http://schemas.microsoft.com/office/drawing/2014/main" id="{10729447-5CC5-481D-90F3-10B73D556BF6}"/>
+                <a16:creationId xmlns:a16="http://schemas.microsoft.com/office/drawing/2014/main" id="{03E90CDC-9375-4F27-AEB0-705017355CAC}"/>
               </a:ext>
             </a:extLst>
           </p:cNvPr>
@@ -13842,7 +13842,7 @@
           <p:cNvPr id="4" name="">
             <a:extLst xmlns:a="http://schemas.openxmlformats.org/drawingml/2006/main">
               <a:ext uri="{FF2B5EF4-FFF2-40B4-BE49-F238E27FC236}">
-                <a16:creationId xmlns:a16="http://schemas.microsoft.com/office/drawing/2014/main" id="{C1999B2B-8EB8-4766-8B27-C6E5097502EC}"/>
+                <a16:creationId xmlns:a16="http://schemas.microsoft.com/office/drawing/2014/main" id="{7992459A-8A65-47C2-82C9-E27B91EB4766}"/>
               </a:ext>
             </a:extLst>
           </p:cNvPr>
@@ -13877,7 +13877,7 @@
           <p:cNvPr id="5" name="">
             <a:extLst xmlns:a="http://schemas.openxmlformats.org/drawingml/2006/main">
               <a:ext uri="{FF2B5EF4-FFF2-40B4-BE49-F238E27FC236}">
-                <a16:creationId xmlns:a16="http://schemas.microsoft.com/office/drawing/2014/main" id="{068608B3-C4C1-4399-8816-AEEE278A8E7B}"/>
+                <a16:creationId xmlns:a16="http://schemas.microsoft.com/office/drawing/2014/main" id="{CCF9291A-B3C7-45D3-A94F-0013FD6044F9}"/>
               </a:ext>
             </a:extLst>
           </p:cNvPr>
@@ -13934,7 +13934,7 @@
           <p:cNvPr id="6" name="">
             <a:extLst xmlns:a="http://schemas.openxmlformats.org/drawingml/2006/main">
               <a:ext uri="{FF2B5EF4-FFF2-40B4-BE49-F238E27FC236}">
-                <a16:creationId xmlns:a16="http://schemas.microsoft.com/office/drawing/2014/main" id="{83BAC3AF-4135-4C8F-A6C1-F8EF7F621035}"/>
+                <a16:creationId xmlns:a16="http://schemas.microsoft.com/office/drawing/2014/main" id="{3B4D036E-16F1-447D-8DAF-B2DBA2FC3B22}"/>
               </a:ext>
             </a:extLst>
           </p:cNvPr>
@@ -13991,7 +13991,7 @@
           <p:cNvPr id="7" name="">
             <a:extLst xmlns:a="http://schemas.openxmlformats.org/drawingml/2006/main">
               <a:ext uri="{FF2B5EF4-FFF2-40B4-BE49-F238E27FC236}">
-                <a16:creationId xmlns:a16="http://schemas.microsoft.com/office/drawing/2014/main" id="{11889E0A-7A4A-44FC-955B-59611ACB4C7F}"/>
+                <a16:creationId xmlns:a16="http://schemas.microsoft.com/office/drawing/2014/main" id="{3F83F224-CC9F-4D42-90CC-D267B8944B38}"/>
               </a:ext>
             </a:extLst>
           </p:cNvPr>
@@ -14022,7 +14022,7 @@
           <p:cNvPr id="8" name="">
             <a:extLst xmlns:a="http://schemas.openxmlformats.org/drawingml/2006/main">
               <a:ext uri="{FF2B5EF4-FFF2-40B4-BE49-F238E27FC236}">
-                <a16:creationId xmlns:a16="http://schemas.microsoft.com/office/drawing/2014/main" id="{9EB72371-AB93-4150-B83E-81DBC82DB9DC}"/>
+                <a16:creationId xmlns:a16="http://schemas.microsoft.com/office/drawing/2014/main" id="{19F0D4C4-FAA6-4249-8E9B-2F9A0C46320D}"/>
               </a:ext>
             </a:extLst>
           </p:cNvPr>
@@ -14053,7 +14053,7 @@
           <p:cNvPr id="9" name="">
             <a:extLst xmlns:a="http://schemas.openxmlformats.org/drawingml/2006/main">
               <a:ext uri="{FF2B5EF4-FFF2-40B4-BE49-F238E27FC236}">
-                <a16:creationId xmlns:a16="http://schemas.microsoft.com/office/drawing/2014/main" id="{A806CD5D-709C-4826-BD80-8A72FE5C7A61}"/>
+                <a16:creationId xmlns:a16="http://schemas.microsoft.com/office/drawing/2014/main" id="{095FE19E-07BD-4B8A-970A-B7524F798EFB}"/>
               </a:ext>
             </a:extLst>
           </p:cNvPr>
@@ -14110,7 +14110,7 @@
           <p:cNvPr id="10" name="">
             <a:extLst xmlns:a="http://schemas.openxmlformats.org/drawingml/2006/main">
               <a:ext uri="{FF2B5EF4-FFF2-40B4-BE49-F238E27FC236}">
-                <a16:creationId xmlns:a16="http://schemas.microsoft.com/office/drawing/2014/main" id="{9BB16A79-425C-40E5-9268-87A7F0E38BC0}"/>
+                <a16:creationId xmlns:a16="http://schemas.microsoft.com/office/drawing/2014/main" id="{727BB2BF-0BBE-4EDC-951B-5290D9220E1C}"/>
               </a:ext>
             </a:extLst>
           </p:cNvPr>
@@ -14141,7 +14141,7 @@
           <p:cNvPr id="11" name="">
             <a:extLst xmlns:a="http://schemas.openxmlformats.org/drawingml/2006/main">
               <a:ext uri="{FF2B5EF4-FFF2-40B4-BE49-F238E27FC236}">
-                <a16:creationId xmlns:a16="http://schemas.microsoft.com/office/drawing/2014/main" id="{57A24BE0-8015-40F8-8F7B-829F63E60C9B}"/>
+                <a16:creationId xmlns:a16="http://schemas.microsoft.com/office/drawing/2014/main" id="{6872894D-BF3B-45CF-8C9C-5E7F66C21213}"/>
               </a:ext>
             </a:extLst>
           </p:cNvPr>
@@ -14198,7 +14198,7 @@
           <p:cNvPr id="12" name="">
             <a:extLst xmlns:a="http://schemas.openxmlformats.org/drawingml/2006/main">
               <a:ext uri="{FF2B5EF4-FFF2-40B4-BE49-F238E27FC236}">
-                <a16:creationId xmlns:a16="http://schemas.microsoft.com/office/drawing/2014/main" id="{F73325AF-D481-4EE4-8607-4B3890650C1F}"/>
+                <a16:creationId xmlns:a16="http://schemas.microsoft.com/office/drawing/2014/main" id="{AB85E35D-6068-4276-8954-0FC83C1445B6}"/>
               </a:ext>
             </a:extLst>
           </p:cNvPr>
@@ -14229,7 +14229,7 @@
           <p:cNvPr id="13" name="">
             <a:extLst xmlns:a="http://schemas.openxmlformats.org/drawingml/2006/main">
               <a:ext uri="{FF2B5EF4-FFF2-40B4-BE49-F238E27FC236}">
-                <a16:creationId xmlns:a16="http://schemas.microsoft.com/office/drawing/2014/main" id="{B04AE5F7-FC3C-4AB6-8562-E8D703C14860}"/>
+                <a16:creationId xmlns:a16="http://schemas.microsoft.com/office/drawing/2014/main" id="{BE97AF53-1E24-4E24-8D95-42846B2E9CF5}"/>
               </a:ext>
             </a:extLst>
           </p:cNvPr>
@@ -14286,7 +14286,7 @@
           <p:cNvPr id="14" name="">
             <a:extLst xmlns:a="http://schemas.openxmlformats.org/drawingml/2006/main">
               <a:ext uri="{FF2B5EF4-FFF2-40B4-BE49-F238E27FC236}">
-                <a16:creationId xmlns:a16="http://schemas.microsoft.com/office/drawing/2014/main" id="{53938462-33BC-4A73-8D36-67D1D8AA2836}"/>
+                <a16:creationId xmlns:a16="http://schemas.microsoft.com/office/drawing/2014/main" id="{8C2AC863-553C-44AC-8F92-BEA5AD267CC8}"/>
               </a:ext>
             </a:extLst>
           </p:cNvPr>
@@ -14317,7 +14317,7 @@
           <p:cNvPr id="15" name="">
             <a:extLst xmlns:a="http://schemas.openxmlformats.org/drawingml/2006/main">
               <a:ext uri="{FF2B5EF4-FFF2-40B4-BE49-F238E27FC236}">
-                <a16:creationId xmlns:a16="http://schemas.microsoft.com/office/drawing/2014/main" id="{BF1FC6DD-4D61-43A3-912B-96008F10ECE0}"/>
+                <a16:creationId xmlns:a16="http://schemas.microsoft.com/office/drawing/2014/main" id="{446055C4-0B50-4C2D-91D0-192AA3D6BED7}"/>
               </a:ext>
             </a:extLst>
           </p:cNvPr>
@@ -14350,7 +14350,7 @@
           <p:cNvPr id="16" name="">
             <a:extLst xmlns:a="http://schemas.openxmlformats.org/drawingml/2006/main">
               <a:ext uri="{FF2B5EF4-FFF2-40B4-BE49-F238E27FC236}">
-                <a16:creationId xmlns:a16="http://schemas.microsoft.com/office/drawing/2014/main" id="{AF67FA43-17E3-4CC0-AA69-F3D94B501E15}"/>
+                <a16:creationId xmlns:a16="http://schemas.microsoft.com/office/drawing/2014/main" id="{6B0CEEF1-636A-486F-970E-4A936E081A6E}"/>
               </a:ext>
             </a:extLst>
           </p:cNvPr>
@@ -14430,7 +14430,7 @@
           <p:cNvPr id="17" name="">
             <a:extLst xmlns:a="http://schemas.openxmlformats.org/drawingml/2006/main">
               <a:ext uri="{FF2B5EF4-FFF2-40B4-BE49-F238E27FC236}">
-                <a16:creationId xmlns:a16="http://schemas.microsoft.com/office/drawing/2014/main" id="{D8E3A038-956A-4FB0-890E-8417F3C17362}"/>
+                <a16:creationId xmlns:a16="http://schemas.microsoft.com/office/drawing/2014/main" id="{E8946E5B-0537-436C-8EC9-3AA52DDE4EA2}"/>
               </a:ext>
             </a:extLst>
           </p:cNvPr>
@@ -14463,7 +14463,7 @@
           <p:cNvPr id="18" name="">
             <a:extLst xmlns:a="http://schemas.openxmlformats.org/drawingml/2006/main">
               <a:ext uri="{FF2B5EF4-FFF2-40B4-BE49-F238E27FC236}">
-                <a16:creationId xmlns:a16="http://schemas.microsoft.com/office/drawing/2014/main" id="{B072EAC1-ECC3-49F7-B55E-1115479F3F54}"/>
+                <a16:creationId xmlns:a16="http://schemas.microsoft.com/office/drawing/2014/main" id="{7B663CD6-8E20-4B18-8645-66898EAC4FCF}"/>
               </a:ext>
             </a:extLst>
           </p:cNvPr>
@@ -14543,7 +14543,7 @@
           <p:cNvPr id="19" name="">
             <a:extLst xmlns:a="http://schemas.openxmlformats.org/drawingml/2006/main">
               <a:ext uri="{FF2B5EF4-FFF2-40B4-BE49-F238E27FC236}">
-                <a16:creationId xmlns:a16="http://schemas.microsoft.com/office/drawing/2014/main" id="{833841F2-F686-43DE-9BEE-06799B02C4CF}"/>
+                <a16:creationId xmlns:a16="http://schemas.microsoft.com/office/drawing/2014/main" id="{A03BF518-D2C9-4B99-9CDA-0705A2D3F8D1}"/>
               </a:ext>
             </a:extLst>
           </p:cNvPr>
@@ -14600,7 +14600,7 @@
           <p:cNvPr id="20" name="">
             <a:extLst xmlns:a="http://schemas.openxmlformats.org/drawingml/2006/main">
               <a:ext uri="{FF2B5EF4-FFF2-40B4-BE49-F238E27FC236}">
-                <a16:creationId xmlns:a16="http://schemas.microsoft.com/office/drawing/2014/main" id="{EE02ECD4-53A7-47EA-8DA9-601DF3203049}"/>
+                <a16:creationId xmlns:a16="http://schemas.microsoft.com/office/drawing/2014/main" id="{E5F87FA1-7281-47AF-B54D-C79D7FE5157E}"/>
               </a:ext>
             </a:extLst>
           </p:cNvPr>
@@ -14635,7 +14635,7 @@
           <p:cNvPr id="21" name="">
             <a:extLst xmlns:a="http://schemas.openxmlformats.org/drawingml/2006/main">
               <a:ext uri="{FF2B5EF4-FFF2-40B4-BE49-F238E27FC236}">
-                <a16:creationId xmlns:a16="http://schemas.microsoft.com/office/drawing/2014/main" id="{295838BF-8F94-4743-8D71-49721618253A}"/>
+                <a16:creationId xmlns:a16="http://schemas.microsoft.com/office/drawing/2014/main" id="{90BB77D7-1291-4FC5-A227-FB329975D406}"/>
               </a:ext>
             </a:extLst>
           </p:cNvPr>
@@ -14692,7 +14692,7 @@
           <p:cNvPr id="22" name="">
             <a:extLst xmlns:a="http://schemas.openxmlformats.org/drawingml/2006/main">
               <a:ext uri="{FF2B5EF4-FFF2-40B4-BE49-F238E27FC236}">
-                <a16:creationId xmlns:a16="http://schemas.microsoft.com/office/drawing/2014/main" id="{D0B2EB9D-E2EA-4362-99BA-9CDC6EFC1B3F}"/>
+                <a16:creationId xmlns:a16="http://schemas.microsoft.com/office/drawing/2014/main" id="{D2127E22-930F-4368-9340-8A2268FF506B}"/>
               </a:ext>
             </a:extLst>
           </p:cNvPr>
@@ -14749,7 +14749,7 @@
           <p:cNvPr id="23" name="">
             <a:extLst xmlns:a="http://schemas.openxmlformats.org/drawingml/2006/main">
               <a:ext uri="{FF2B5EF4-FFF2-40B4-BE49-F238E27FC236}">
-                <a16:creationId xmlns:a16="http://schemas.microsoft.com/office/drawing/2014/main" id="{F48E92C3-047D-4136-884C-0FAEA91F1EF1}"/>
+                <a16:creationId xmlns:a16="http://schemas.microsoft.com/office/drawing/2014/main" id="{42960C07-5B35-4BD0-83B2-884FB22BCBAD}"/>
               </a:ext>
             </a:extLst>
           </p:cNvPr>
@@ -14780,7 +14780,7 @@
           <p:cNvPr id="24" name="">
             <a:extLst xmlns:a="http://schemas.openxmlformats.org/drawingml/2006/main">
               <a:ext uri="{FF2B5EF4-FFF2-40B4-BE49-F238E27FC236}">
-                <a16:creationId xmlns:a16="http://schemas.microsoft.com/office/drawing/2014/main" id="{17D3D7B1-16FA-4706-90A7-5FE99A4FDB29}"/>
+                <a16:creationId xmlns:a16="http://schemas.microsoft.com/office/drawing/2014/main" id="{B733899A-A397-4406-BB32-ECC2B49F9F65}"/>
               </a:ext>
             </a:extLst>
           </p:cNvPr>
@@ -14811,7 +14811,7 @@
           <p:cNvPr id="25" name="">
             <a:extLst xmlns:a="http://schemas.openxmlformats.org/drawingml/2006/main">
               <a:ext uri="{FF2B5EF4-FFF2-40B4-BE49-F238E27FC236}">
-                <a16:creationId xmlns:a16="http://schemas.microsoft.com/office/drawing/2014/main" id="{196B84E6-40BA-4000-9CFB-9DD3D896D2C0}"/>
+                <a16:creationId xmlns:a16="http://schemas.microsoft.com/office/drawing/2014/main" id="{EDC319F9-FABB-4720-912E-6BD4710DF98B}"/>
               </a:ext>
             </a:extLst>
           </p:cNvPr>
@@ -14868,7 +14868,7 @@
           <p:cNvPr id="26" name="">
             <a:extLst xmlns:a="http://schemas.openxmlformats.org/drawingml/2006/main">
               <a:ext uri="{FF2B5EF4-FFF2-40B4-BE49-F238E27FC236}">
-                <a16:creationId xmlns:a16="http://schemas.microsoft.com/office/drawing/2014/main" id="{C4A3BF2E-0DB5-4A26-9924-EB557B977674}"/>
+                <a16:creationId xmlns:a16="http://schemas.microsoft.com/office/drawing/2014/main" id="{6343EAC5-E5B7-479B-A7F5-D250B2BF263F}"/>
               </a:ext>
             </a:extLst>
           </p:cNvPr>
@@ -14899,7 +14899,7 @@
           <p:cNvPr id="27" name="">
             <a:extLst xmlns:a="http://schemas.openxmlformats.org/drawingml/2006/main">
               <a:ext uri="{FF2B5EF4-FFF2-40B4-BE49-F238E27FC236}">
-                <a16:creationId xmlns:a16="http://schemas.microsoft.com/office/drawing/2014/main" id="{3AA85E02-EFAF-428E-9810-9EA30FE1A050}"/>
+                <a16:creationId xmlns:a16="http://schemas.microsoft.com/office/drawing/2014/main" id="{B4707DE0-1A8A-476B-8048-A6D6B54C9D63}"/>
               </a:ext>
             </a:extLst>
           </p:cNvPr>
@@ -14956,7 +14956,7 @@
           <p:cNvPr id="28" name="">
             <a:extLst xmlns:a="http://schemas.openxmlformats.org/drawingml/2006/main">
               <a:ext uri="{FF2B5EF4-FFF2-40B4-BE49-F238E27FC236}">
-                <a16:creationId xmlns:a16="http://schemas.microsoft.com/office/drawing/2014/main" id="{EBFDEE8C-BAF2-4D6F-BBB6-BFCF5AB247AB}"/>
+                <a16:creationId xmlns:a16="http://schemas.microsoft.com/office/drawing/2014/main" id="{B48522D3-8326-4021-B3C4-3836B71CA97D}"/>
               </a:ext>
             </a:extLst>
           </p:cNvPr>
@@ -14987,7 +14987,7 @@
           <p:cNvPr id="29" name="">
             <a:extLst xmlns:a="http://schemas.openxmlformats.org/drawingml/2006/main">
               <a:ext uri="{FF2B5EF4-FFF2-40B4-BE49-F238E27FC236}">
-                <a16:creationId xmlns:a16="http://schemas.microsoft.com/office/drawing/2014/main" id="{CBBD1E36-4B3B-455B-9EA5-3D5F6041BB93}"/>
+                <a16:creationId xmlns:a16="http://schemas.microsoft.com/office/drawing/2014/main" id="{C70DB9E5-127A-47AA-B59C-C152D0C896F0}"/>
               </a:ext>
             </a:extLst>
           </p:cNvPr>
@@ -15044,7 +15044,7 @@
           <p:cNvPr id="30" name="">
             <a:extLst xmlns:a="http://schemas.openxmlformats.org/drawingml/2006/main">
               <a:ext uri="{FF2B5EF4-FFF2-40B4-BE49-F238E27FC236}">
-                <a16:creationId xmlns:a16="http://schemas.microsoft.com/office/drawing/2014/main" id="{0E8BD55C-8F59-4802-A012-444D011503EB}"/>
+                <a16:creationId xmlns:a16="http://schemas.microsoft.com/office/drawing/2014/main" id="{F3A796CD-668A-450B-A836-E5FF3F3A59FB}"/>
               </a:ext>
             </a:extLst>
           </p:cNvPr>
@@ -15075,7 +15075,7 @@
           <p:cNvPr id="31" name="">
             <a:extLst xmlns:a="http://schemas.openxmlformats.org/drawingml/2006/main">
               <a:ext uri="{FF2B5EF4-FFF2-40B4-BE49-F238E27FC236}">
-                <a16:creationId xmlns:a16="http://schemas.microsoft.com/office/drawing/2014/main" id="{500B2CAE-A138-484C-87B2-76599F8487B0}"/>
+                <a16:creationId xmlns:a16="http://schemas.microsoft.com/office/drawing/2014/main" id="{911F910D-6819-49C6-8FE6-46B4C97AB5D2}"/>
               </a:ext>
             </a:extLst>
           </p:cNvPr>
@@ -15108,7 +15108,7 @@
           <p:cNvPr id="32" name="">
             <a:extLst xmlns:a="http://schemas.openxmlformats.org/drawingml/2006/main">
               <a:ext uri="{FF2B5EF4-FFF2-40B4-BE49-F238E27FC236}">
-                <a16:creationId xmlns:a16="http://schemas.microsoft.com/office/drawing/2014/main" id="{2AE032E7-149E-400A-AA5A-976CAD3BB110}"/>
+                <a16:creationId xmlns:a16="http://schemas.microsoft.com/office/drawing/2014/main" id="{6BD191BA-6E9B-4FF4-99A8-EFCB0F72EC94}"/>
               </a:ext>
             </a:extLst>
           </p:cNvPr>
@@ -15188,7 +15188,7 @@
           <p:cNvPr id="33" name="">
             <a:extLst xmlns:a="http://schemas.openxmlformats.org/drawingml/2006/main">
               <a:ext uri="{FF2B5EF4-FFF2-40B4-BE49-F238E27FC236}">
-                <a16:creationId xmlns:a16="http://schemas.microsoft.com/office/drawing/2014/main" id="{33F188E2-FE34-47BF-BB07-656B4E370EB5}"/>
+                <a16:creationId xmlns:a16="http://schemas.microsoft.com/office/drawing/2014/main" id="{9981604B-A1B6-4E7E-A6AC-498894DB7A5F}"/>
               </a:ext>
             </a:extLst>
           </p:cNvPr>
@@ -15221,7 +15221,7 @@
           <p:cNvPr id="34" name="">
             <a:extLst xmlns:a="http://schemas.openxmlformats.org/drawingml/2006/main">
               <a:ext uri="{FF2B5EF4-FFF2-40B4-BE49-F238E27FC236}">
-                <a16:creationId xmlns:a16="http://schemas.microsoft.com/office/drawing/2014/main" id="{42B10AF6-54D8-4E66-B75A-EC9EF8F91415}"/>
+                <a16:creationId xmlns:a16="http://schemas.microsoft.com/office/drawing/2014/main" id="{1ED807E9-DF50-41DB-8BC0-62159B173107}"/>
               </a:ext>
             </a:extLst>
           </p:cNvPr>
@@ -15301,7 +15301,7 @@
           <p:cNvPr id="35" name="">
             <a:extLst xmlns:a="http://schemas.openxmlformats.org/drawingml/2006/main">
               <a:ext uri="{FF2B5EF4-FFF2-40B4-BE49-F238E27FC236}">
-                <a16:creationId xmlns:a16="http://schemas.microsoft.com/office/drawing/2014/main" id="{F0F3CE87-16AB-48BB-8873-F57E0A914AF6}"/>
+                <a16:creationId xmlns:a16="http://schemas.microsoft.com/office/drawing/2014/main" id="{E296A87A-E3CF-4B6B-AC7B-B6D05B284FF1}"/>
               </a:ext>
             </a:extLst>
           </p:cNvPr>
@@ -15358,7 +15358,7 @@
           <p:cNvPr id="36" name="">
             <a:extLst xmlns:a="http://schemas.openxmlformats.org/drawingml/2006/main">
               <a:ext uri="{FF2B5EF4-FFF2-40B4-BE49-F238E27FC236}">
-                <a16:creationId xmlns:a16="http://schemas.microsoft.com/office/drawing/2014/main" id="{4D1733DA-1224-4DF4-A8D2-0B241261E84E}"/>
+                <a16:creationId xmlns:a16="http://schemas.microsoft.com/office/drawing/2014/main" id="{46A82F4A-A72E-4C76-919F-D8E25B7936E6}"/>
               </a:ext>
             </a:extLst>
           </p:cNvPr>
@@ -15413,7 +15413,7 @@
     </p:spTree>
     <p:extLst>
       <p:ext uri="{BB962C8B-B14F-4D97-AF65-F5344CB8AC3E}">
-        <p14:creationId xmlns:p14="http://schemas.microsoft.com/office/powerpoint/2010/main" val="19640446"/>
+        <p14:creationId xmlns:p14="http://schemas.microsoft.com/office/powerpoint/2010/main" val="244808107"/>
       </p:ext>
     </p:extLst>
   </p:cSld>
@@ -15444,7 +15444,7 @@
           <p:cNvPr id="14" name="slide-title">
             <a:extLst xmlns:a="http://schemas.openxmlformats.org/drawingml/2006/main">
               <a:ext uri="{FF2B5EF4-FFF2-40B4-BE49-F238E27FC236}">
-                <a16:creationId xmlns:a16="http://schemas.microsoft.com/office/drawing/2014/main" id="{3F7C0B05-D763-49CB-B04B-04CB45BE8DC8}"/>
+                <a16:creationId xmlns:a16="http://schemas.microsoft.com/office/drawing/2014/main" id="{53D31ED4-2AC0-4180-9FD5-8DB855D5B889}"/>
               </a:ext>
             </a:extLst>
           </p:cNvPr>
@@ -15501,7 +15501,7 @@
           <p:cNvPr id="2" name="slide-subtitle">
             <a:extLst xmlns:a="http://schemas.openxmlformats.org/drawingml/2006/main">
               <a:ext uri="{FF2B5EF4-FFF2-40B4-BE49-F238E27FC236}">
-                <a16:creationId xmlns:a16="http://schemas.microsoft.com/office/drawing/2014/main" id="{5F6353CC-D6B5-4552-9817-7B08E1D9C378}"/>
+                <a16:creationId xmlns:a16="http://schemas.microsoft.com/office/drawing/2014/main" id="{63777F5C-C32D-4281-8B69-73FF73DBD954}"/>
               </a:ext>
             </a:extLst>
           </p:cNvPr>
@@ -15558,7 +15558,7 @@
           <p:cNvPr id="3" name="">
             <a:extLst xmlns:a="http://schemas.openxmlformats.org/drawingml/2006/main">
               <a:ext uri="{FF2B5EF4-FFF2-40B4-BE49-F238E27FC236}">
-                <a16:creationId xmlns:a16="http://schemas.microsoft.com/office/drawing/2014/main" id="{A2A48E46-CDF5-4336-85B8-513E97573FF9}"/>
+                <a16:creationId xmlns:a16="http://schemas.microsoft.com/office/drawing/2014/main" id="{8C2A0F74-76CA-40B4-B09D-ABF20855AFB1}"/>
               </a:ext>
             </a:extLst>
           </p:cNvPr>
@@ -15589,7 +15589,7 @@
           <p:cNvPr id="4" name="">
             <a:extLst xmlns:a="http://schemas.openxmlformats.org/drawingml/2006/main">
               <a:ext uri="{FF2B5EF4-FFF2-40B4-BE49-F238E27FC236}">
-                <a16:creationId xmlns:a16="http://schemas.microsoft.com/office/drawing/2014/main" id="{AF4987E3-49E1-46F3-906E-BD9361E1C369}"/>
+                <a16:creationId xmlns:a16="http://schemas.microsoft.com/office/drawing/2014/main" id="{81907F58-ED3D-4589-BE6D-DE05586A393E}"/>
               </a:ext>
             </a:extLst>
           </p:cNvPr>
@@ -15653,7 +15653,7 @@
         </p:xfrm>
         <a:graphic xmlns:a="http://schemas.openxmlformats.org/drawingml/2006/main">
           <a:graphicData uri="http://schemas.openxmlformats.org/drawingml/2006/chart">
-            <c:chart xmlns:r="http://schemas.openxmlformats.org/officeDocument/2006/relationships" xmlns:c="http://schemas.openxmlformats.org/drawingml/2006/chart" r:id="Rf243ef6b07ad4acd"/>
+            <c:chart xmlns:r="http://schemas.openxmlformats.org/officeDocument/2006/relationships" xmlns:c="http://schemas.openxmlformats.org/drawingml/2006/chart" r:id="R4645267cf4ea4c81"/>
           </a:graphicData>
         </a:graphic>
       </p:graphicFrame>
@@ -15662,7 +15662,7 @@
           <p:cNvPr id="6" name="">
             <a:extLst xmlns:a="http://schemas.openxmlformats.org/drawingml/2006/main">
               <a:ext uri="{FF2B5EF4-FFF2-40B4-BE49-F238E27FC236}">
-                <a16:creationId xmlns:a16="http://schemas.microsoft.com/office/drawing/2014/main" id="{E0D58FB6-0BCB-4B46-B5FD-D0BC4B1A1510}"/>
+                <a16:creationId xmlns:a16="http://schemas.microsoft.com/office/drawing/2014/main" id="{3E9B9C53-1007-4F91-9B4D-9B874C7323FC}"/>
               </a:ext>
             </a:extLst>
           </p:cNvPr>
@@ -15726,7 +15726,7 @@
         </p:xfrm>
         <a:graphic xmlns:a="http://schemas.openxmlformats.org/drawingml/2006/main">
           <a:graphicData uri="http://schemas.openxmlformats.org/drawingml/2006/chart">
-            <c:chart xmlns:r="http://schemas.openxmlformats.org/officeDocument/2006/relationships" xmlns:c="http://schemas.openxmlformats.org/drawingml/2006/chart" r:id="R5c0a7d22adaa4c2d"/>
+            <c:chart xmlns:r="http://schemas.openxmlformats.org/officeDocument/2006/relationships" xmlns:c="http://schemas.openxmlformats.org/drawingml/2006/chart" r:id="Rbea0e447e02a47d0"/>
           </a:graphicData>
         </a:graphic>
       </p:graphicFrame>
@@ -15735,7 +15735,7 @@
           <p:cNvPr id="8" name="">
             <a:extLst xmlns:a="http://schemas.openxmlformats.org/drawingml/2006/main">
               <a:ext uri="{FF2B5EF4-FFF2-40B4-BE49-F238E27FC236}">
-                <a16:creationId xmlns:a16="http://schemas.microsoft.com/office/drawing/2014/main" id="{1428BBEA-58F6-4678-BE79-3B9954E86811}"/>
+                <a16:creationId xmlns:a16="http://schemas.microsoft.com/office/drawing/2014/main" id="{4CA0DA7A-4F0D-42FB-AE2D-1496110E0006}"/>
               </a:ext>
             </a:extLst>
           </p:cNvPr>
@@ -15799,7 +15799,7 @@
         </p:xfrm>
         <a:graphic xmlns:a="http://schemas.openxmlformats.org/drawingml/2006/main">
           <a:graphicData uri="http://schemas.openxmlformats.org/drawingml/2006/chart">
-            <c:chart xmlns:r="http://schemas.openxmlformats.org/officeDocument/2006/relationships" xmlns:c="http://schemas.openxmlformats.org/drawingml/2006/chart" r:id="Rab84d43da08d43d1"/>
+            <c:chart xmlns:r="http://schemas.openxmlformats.org/officeDocument/2006/relationships" xmlns:c="http://schemas.openxmlformats.org/drawingml/2006/chart" r:id="Ra33326357d264da2"/>
           </a:graphicData>
         </a:graphic>
       </p:graphicFrame>
@@ -15808,7 +15808,7 @@
           <p:cNvPr id="10" name="">
             <a:extLst xmlns:a="http://schemas.openxmlformats.org/drawingml/2006/main">
               <a:ext uri="{FF2B5EF4-FFF2-40B4-BE49-F238E27FC236}">
-                <a16:creationId xmlns:a16="http://schemas.microsoft.com/office/drawing/2014/main" id="{7F85B4F8-0A6C-4B77-9480-90BFEF0A8797}"/>
+                <a16:creationId xmlns:a16="http://schemas.microsoft.com/office/drawing/2014/main" id="{AC9C0166-4CAC-403B-86C5-2117B285613F}"/>
               </a:ext>
             </a:extLst>
           </p:cNvPr>
@@ -15872,7 +15872,7 @@
         </p:xfrm>
         <a:graphic xmlns:a="http://schemas.openxmlformats.org/drawingml/2006/main">
           <a:graphicData uri="http://schemas.openxmlformats.org/drawingml/2006/chart">
-            <c:chart xmlns:r="http://schemas.openxmlformats.org/officeDocument/2006/relationships" xmlns:c="http://schemas.openxmlformats.org/drawingml/2006/chart" r:id="Rd9f23f220e024a48"/>
+            <c:chart xmlns:r="http://schemas.openxmlformats.org/officeDocument/2006/relationships" xmlns:c="http://schemas.openxmlformats.org/drawingml/2006/chart" r:id="R697cd726b9cb4f8b"/>
           </a:graphicData>
         </a:graphic>
       </p:graphicFrame>
@@ -15881,7 +15881,7 @@
           <p:cNvPr id="12" name="">
             <a:extLst xmlns:a="http://schemas.openxmlformats.org/drawingml/2006/main">
               <a:ext uri="{FF2B5EF4-FFF2-40B4-BE49-F238E27FC236}">
-                <a16:creationId xmlns:a16="http://schemas.microsoft.com/office/drawing/2014/main" id="{68B17252-0229-419D-A8CC-879C6C76F370}"/>
+                <a16:creationId xmlns:a16="http://schemas.microsoft.com/office/drawing/2014/main" id="{72586DC1-7A8D-4C9B-8624-3E15C9DC7B6F}"/>
               </a:ext>
             </a:extLst>
           </p:cNvPr>
@@ -15961,7 +15961,7 @@
           <p:cNvPr id="13" name="">
             <a:extLst xmlns:a="http://schemas.openxmlformats.org/drawingml/2006/main">
               <a:ext uri="{FF2B5EF4-FFF2-40B4-BE49-F238E27FC236}">
-                <a16:creationId xmlns:a16="http://schemas.microsoft.com/office/drawing/2014/main" id="{A9571033-04B1-4565-AEF2-929BDC89FA25}"/>
+                <a16:creationId xmlns:a16="http://schemas.microsoft.com/office/drawing/2014/main" id="{21EEBF38-D865-4BA0-9875-A322FBFEBAC7}"/>
               </a:ext>
             </a:extLst>
           </p:cNvPr>
@@ -16016,7 +16016,7 @@
     </p:spTree>
     <p:extLst>
       <p:ext uri="{BB962C8B-B14F-4D97-AF65-F5344CB8AC3E}">
-        <p14:creationId xmlns:p14="http://schemas.microsoft.com/office/powerpoint/2010/main" val="73606670"/>
+        <p14:creationId xmlns:p14="http://schemas.microsoft.com/office/powerpoint/2010/main" val="1630216948"/>
       </p:ext>
     </p:extLst>
   </p:cSld>
@@ -16047,7 +16047,7 @@
           <p:cNvPr id="22" name="slide-title">
             <a:extLst xmlns:a="http://schemas.openxmlformats.org/drawingml/2006/main">
               <a:ext uri="{FF2B5EF4-FFF2-40B4-BE49-F238E27FC236}">
-                <a16:creationId xmlns:a16="http://schemas.microsoft.com/office/drawing/2014/main" id="{3D11515D-9F16-44DD-9B91-F93880C27BCB}"/>
+                <a16:creationId xmlns:a16="http://schemas.microsoft.com/office/drawing/2014/main" id="{BE101F4E-0D7D-4127-8712-5EBDFA55EEAA}"/>
               </a:ext>
             </a:extLst>
           </p:cNvPr>
@@ -16104,7 +16104,7 @@
           <p:cNvPr id="2" name="slide-subtitle">
             <a:extLst xmlns:a="http://schemas.openxmlformats.org/drawingml/2006/main">
               <a:ext uri="{FF2B5EF4-FFF2-40B4-BE49-F238E27FC236}">
-                <a16:creationId xmlns:a16="http://schemas.microsoft.com/office/drawing/2014/main" id="{D1F1A001-B2A4-4FCA-BD70-056FA3ABAE0F}"/>
+                <a16:creationId xmlns:a16="http://schemas.microsoft.com/office/drawing/2014/main" id="{060B748B-2C12-4C5A-AB4F-443000F78862}"/>
               </a:ext>
             </a:extLst>
           </p:cNvPr>
@@ -16161,7 +16161,7 @@
           <p:cNvPr id="3" name="">
             <a:extLst xmlns:a="http://schemas.openxmlformats.org/drawingml/2006/main">
               <a:ext uri="{FF2B5EF4-FFF2-40B4-BE49-F238E27FC236}">
-                <a16:creationId xmlns:a16="http://schemas.microsoft.com/office/drawing/2014/main" id="{1DFCCA24-939C-4A75-91AA-4510507EDBAC}"/>
+                <a16:creationId xmlns:a16="http://schemas.microsoft.com/office/drawing/2014/main" id="{6C7611BA-D5AB-42A2-8879-41679A32B413}"/>
               </a:ext>
             </a:extLst>
           </p:cNvPr>
@@ -16192,7 +16192,7 @@
           <p:cNvPr id="4" name="">
             <a:extLst xmlns:a="http://schemas.openxmlformats.org/drawingml/2006/main">
               <a:ext uri="{FF2B5EF4-FFF2-40B4-BE49-F238E27FC236}">
-                <a16:creationId xmlns:a16="http://schemas.microsoft.com/office/drawing/2014/main" id="{027C6A7B-4D4D-44E8-A979-895EA2E1CF4A}"/>
+                <a16:creationId xmlns:a16="http://schemas.microsoft.com/office/drawing/2014/main" id="{B4E73658-7DE7-4EE7-BAE2-22EC4C27F1F5}"/>
               </a:ext>
             </a:extLst>
           </p:cNvPr>
@@ -16249,7 +16249,7 @@
           <p:cNvPr id="5" name="">
             <a:extLst xmlns:a="http://schemas.openxmlformats.org/drawingml/2006/main">
               <a:ext uri="{FF2B5EF4-FFF2-40B4-BE49-F238E27FC236}">
-                <a16:creationId xmlns:a16="http://schemas.microsoft.com/office/drawing/2014/main" id="{A632E66D-9A99-4E23-871F-931130AB7878}"/>
+                <a16:creationId xmlns:a16="http://schemas.microsoft.com/office/drawing/2014/main" id="{A6A96B7E-D149-430F-8DFA-81B2FC5A708D}"/>
               </a:ext>
             </a:extLst>
           </p:cNvPr>
@@ -16279,7 +16279,7 @@
           <p:cNvPr id="6" name="">
             <a:extLst xmlns:a="http://schemas.openxmlformats.org/drawingml/2006/main">
               <a:ext uri="{FF2B5EF4-FFF2-40B4-BE49-F238E27FC236}">
-                <a16:creationId xmlns:a16="http://schemas.microsoft.com/office/drawing/2014/main" id="{592999D0-3E2E-4E67-951B-0295C167DD1A}"/>
+                <a16:creationId xmlns:a16="http://schemas.microsoft.com/office/drawing/2014/main" id="{945B9E61-4E96-4CA3-83E3-E9768D5256C6}"/>
               </a:ext>
             </a:extLst>
           </p:cNvPr>
@@ -16310,7 +16310,7 @@
           <p:cNvPr id="7" name="">
             <a:extLst xmlns:a="http://schemas.openxmlformats.org/drawingml/2006/main">
               <a:ext uri="{FF2B5EF4-FFF2-40B4-BE49-F238E27FC236}">
-                <a16:creationId xmlns:a16="http://schemas.microsoft.com/office/drawing/2014/main" id="{9A3ED358-1A87-4C0A-A053-D5A9CB327CA8}"/>
+                <a16:creationId xmlns:a16="http://schemas.microsoft.com/office/drawing/2014/main" id="{1A32FF8C-5393-438F-A366-C30093F30575}"/>
               </a:ext>
             </a:extLst>
           </p:cNvPr>
@@ -16367,7 +16367,7 @@
           <p:cNvPr id="8" name="">
             <a:extLst xmlns:a="http://schemas.openxmlformats.org/drawingml/2006/main">
               <a:ext uri="{FF2B5EF4-FFF2-40B4-BE49-F238E27FC236}">
-                <a16:creationId xmlns:a16="http://schemas.microsoft.com/office/drawing/2014/main" id="{81EC5DA4-790C-40BC-95B5-EA1AE4FE05C3}"/>
+                <a16:creationId xmlns:a16="http://schemas.microsoft.com/office/drawing/2014/main" id="{A4138815-A99A-4245-97C2-FB6FAE221A39}"/>
               </a:ext>
             </a:extLst>
           </p:cNvPr>
@@ -16424,7 +16424,7 @@
           <p:cNvPr id="9" name="">
             <a:extLst xmlns:a="http://schemas.openxmlformats.org/drawingml/2006/main">
               <a:ext uri="{FF2B5EF4-FFF2-40B4-BE49-F238E27FC236}">
-                <a16:creationId xmlns:a16="http://schemas.microsoft.com/office/drawing/2014/main" id="{AC2009F9-F10B-4688-9D85-9D086A20CF52}"/>
+                <a16:creationId xmlns:a16="http://schemas.microsoft.com/office/drawing/2014/main" id="{45543306-F5A1-4045-A47E-A4D735EC8914}"/>
               </a:ext>
             </a:extLst>
           </p:cNvPr>
@@ -16454,7 +16454,7 @@
           <p:cNvPr id="10" name="">
             <a:extLst xmlns:a="http://schemas.openxmlformats.org/drawingml/2006/main">
               <a:ext uri="{FF2B5EF4-FFF2-40B4-BE49-F238E27FC236}">
-                <a16:creationId xmlns:a16="http://schemas.microsoft.com/office/drawing/2014/main" id="{1C40B62C-FDC2-4FBA-B5F8-B36E80CD2649}"/>
+                <a16:creationId xmlns:a16="http://schemas.microsoft.com/office/drawing/2014/main" id="{FDC36A45-E0EA-4BA0-B014-038A0987BED8}"/>
               </a:ext>
             </a:extLst>
           </p:cNvPr>
@@ -16484,7 +16484,7 @@
           <p:cNvPr id="11" name="">
             <a:extLst xmlns:a="http://schemas.openxmlformats.org/drawingml/2006/main">
               <a:ext uri="{FF2B5EF4-FFF2-40B4-BE49-F238E27FC236}">
-                <a16:creationId xmlns:a16="http://schemas.microsoft.com/office/drawing/2014/main" id="{BCF08BDE-DBB9-4C63-B754-9F59AFDCDDA4}"/>
+                <a16:creationId xmlns:a16="http://schemas.microsoft.com/office/drawing/2014/main" id="{363A406C-96E9-4548-959A-06D209264785}"/>
               </a:ext>
             </a:extLst>
           </p:cNvPr>
@@ -16541,7 +16541,7 @@
           <p:cNvPr id="12" name="">
             <a:extLst xmlns:a="http://schemas.openxmlformats.org/drawingml/2006/main">
               <a:ext uri="{FF2B5EF4-FFF2-40B4-BE49-F238E27FC236}">
-                <a16:creationId xmlns:a16="http://schemas.microsoft.com/office/drawing/2014/main" id="{BE878F84-4216-46F2-8695-DB56A1FAC00B}"/>
+                <a16:creationId xmlns:a16="http://schemas.microsoft.com/office/drawing/2014/main" id="{28EE885C-B58C-4ADF-9764-1E9A86D16599}"/>
               </a:ext>
             </a:extLst>
           </p:cNvPr>
@@ -16598,7 +16598,7 @@
           <p:cNvPr id="13" name="">
             <a:extLst xmlns:a="http://schemas.openxmlformats.org/drawingml/2006/main">
               <a:ext uri="{FF2B5EF4-FFF2-40B4-BE49-F238E27FC236}">
-                <a16:creationId xmlns:a16="http://schemas.microsoft.com/office/drawing/2014/main" id="{D2283A99-5C9D-40D7-808E-0FC2177E7E8E}"/>
+                <a16:creationId xmlns:a16="http://schemas.microsoft.com/office/drawing/2014/main" id="{BEC75A23-8712-424E-A084-F1165089F963}"/>
               </a:ext>
             </a:extLst>
           </p:cNvPr>
@@ -16628,7 +16628,7 @@
           <p:cNvPr id="14" name="">
             <a:extLst xmlns:a="http://schemas.openxmlformats.org/drawingml/2006/main">
               <a:ext uri="{FF2B5EF4-FFF2-40B4-BE49-F238E27FC236}">
-                <a16:creationId xmlns:a16="http://schemas.microsoft.com/office/drawing/2014/main" id="{90474030-5621-4F4A-B96B-FD239FD08DCC}"/>
+                <a16:creationId xmlns:a16="http://schemas.microsoft.com/office/drawing/2014/main" id="{6A2DF317-B0E2-464F-ADB6-64AE90908064}"/>
               </a:ext>
             </a:extLst>
           </p:cNvPr>
@@ -16658,7 +16658,7 @@
           <p:cNvPr id="15" name="">
             <a:extLst xmlns:a="http://schemas.openxmlformats.org/drawingml/2006/main">
               <a:ext uri="{FF2B5EF4-FFF2-40B4-BE49-F238E27FC236}">
-                <a16:creationId xmlns:a16="http://schemas.microsoft.com/office/drawing/2014/main" id="{F95272BC-5DC9-41BC-897C-D8EC70A78358}"/>
+                <a16:creationId xmlns:a16="http://schemas.microsoft.com/office/drawing/2014/main" id="{441A7CE7-D870-4C1A-9F74-7987B80FA3DC}"/>
               </a:ext>
             </a:extLst>
           </p:cNvPr>
@@ -16715,7 +16715,7 @@
           <p:cNvPr id="16" name="">
             <a:extLst xmlns:a="http://schemas.openxmlformats.org/drawingml/2006/main">
               <a:ext uri="{FF2B5EF4-FFF2-40B4-BE49-F238E27FC236}">
-                <a16:creationId xmlns:a16="http://schemas.microsoft.com/office/drawing/2014/main" id="{5CC7611F-6FEC-45C4-853D-721D1946E7C4}"/>
+                <a16:creationId xmlns:a16="http://schemas.microsoft.com/office/drawing/2014/main" id="{FA7E6860-F84A-4459-AE56-F9B0E8AB2859}"/>
               </a:ext>
             </a:extLst>
           </p:cNvPr>
@@ -16772,7 +16772,7 @@
           <p:cNvPr id="17" name="">
             <a:extLst xmlns:a="http://schemas.openxmlformats.org/drawingml/2006/main">
               <a:ext uri="{FF2B5EF4-FFF2-40B4-BE49-F238E27FC236}">
-                <a16:creationId xmlns:a16="http://schemas.microsoft.com/office/drawing/2014/main" id="{485BC84C-EE9D-477F-914A-ACC2431790BF}"/>
+                <a16:creationId xmlns:a16="http://schemas.microsoft.com/office/drawing/2014/main" id="{9A0E7297-EA0D-40BB-9ED2-CC6C39C19533}"/>
               </a:ext>
             </a:extLst>
           </p:cNvPr>
@@ -16802,7 +16802,7 @@
           <p:cNvPr id="18" name="">
             <a:extLst xmlns:a="http://schemas.openxmlformats.org/drawingml/2006/main">
               <a:ext uri="{FF2B5EF4-FFF2-40B4-BE49-F238E27FC236}">
-                <a16:creationId xmlns:a16="http://schemas.microsoft.com/office/drawing/2014/main" id="{C16CBAB3-EAFF-465F-BA09-12331C647F2F}"/>
+                <a16:creationId xmlns:a16="http://schemas.microsoft.com/office/drawing/2014/main" id="{D9A8697F-869C-45D1-BFB2-C0C0A99643A5}"/>
               </a:ext>
             </a:extLst>
           </p:cNvPr>
@@ -16832,7 +16832,7 @@
           <p:cNvPr id="19" name="">
             <a:extLst xmlns:a="http://schemas.openxmlformats.org/drawingml/2006/main">
               <a:ext uri="{FF2B5EF4-FFF2-40B4-BE49-F238E27FC236}">
-                <a16:creationId xmlns:a16="http://schemas.microsoft.com/office/drawing/2014/main" id="{BB6635B6-3726-4186-BA89-4E7538E0EC25}"/>
+                <a16:creationId xmlns:a16="http://schemas.microsoft.com/office/drawing/2014/main" id="{A13C0BF3-9ECC-4C53-816B-0F9A64A568AE}"/>
               </a:ext>
             </a:extLst>
           </p:cNvPr>
@@ -16889,7 +16889,7 @@
           <p:cNvPr id="20" name="">
             <a:extLst xmlns:a="http://schemas.openxmlformats.org/drawingml/2006/main">
               <a:ext uri="{FF2B5EF4-FFF2-40B4-BE49-F238E27FC236}">
-                <a16:creationId xmlns:a16="http://schemas.microsoft.com/office/drawing/2014/main" id="{0DA5B29A-9B9A-4F10-958D-98CA56A913D5}"/>
+                <a16:creationId xmlns:a16="http://schemas.microsoft.com/office/drawing/2014/main" id="{06122E8A-94F5-46FF-BF71-91CEDE254616}"/>
               </a:ext>
             </a:extLst>
           </p:cNvPr>
@@ -16946,7 +16946,7 @@
           <p:cNvPr id="21" name="">
             <a:extLst xmlns:a="http://schemas.openxmlformats.org/drawingml/2006/main">
               <a:ext uri="{FF2B5EF4-FFF2-40B4-BE49-F238E27FC236}">
-                <a16:creationId xmlns:a16="http://schemas.microsoft.com/office/drawing/2014/main" id="{6F5F42BC-B3AC-4BA5-8AD5-A46B96AEFA7E}"/>
+                <a16:creationId xmlns:a16="http://schemas.microsoft.com/office/drawing/2014/main" id="{A710169E-129A-4D1D-910A-FE1D4F34C74A}"/>
               </a:ext>
             </a:extLst>
           </p:cNvPr>
@@ -17001,7 +17001,7 @@
     </p:spTree>
     <p:extLst>
       <p:ext uri="{BB962C8B-B14F-4D97-AF65-F5344CB8AC3E}">
-        <p14:creationId xmlns:p14="http://schemas.microsoft.com/office/powerpoint/2010/main" val="1130791819"/>
+        <p14:creationId xmlns:p14="http://schemas.microsoft.com/office/powerpoint/2010/main" val="1811051271"/>
       </p:ext>
     </p:extLst>
   </p:cSld>
@@ -17029,10 +17029,10 @@
       </p:grpSpPr>
       <p:sp>
         <p:nvSpPr>
-          <p:cNvPr id="32" name="slide-title">
-            <a:extLst xmlns:a="http://schemas.openxmlformats.org/drawingml/2006/main">
-              <a:ext uri="{FF2B5EF4-FFF2-40B4-BE49-F238E27FC236}">
-                <a16:creationId xmlns:a16="http://schemas.microsoft.com/office/drawing/2014/main" id="{338D8495-EF03-483F-A5F6-E76FEFCD0DC6}"/>
+          <p:cNvPr id="6" name="slide-title">
+            <a:extLst xmlns:a="http://schemas.openxmlformats.org/drawingml/2006/main">
+              <a:ext uri="{FF2B5EF4-FFF2-40B4-BE49-F238E27FC236}">
+                <a16:creationId xmlns:a16="http://schemas.microsoft.com/office/drawing/2014/main" id="{D42D1DD5-C339-430D-8F66-AC2888D52C9C}"/>
               </a:ext>
             </a:extLst>
           </p:cNvPr>
@@ -17079,7 +17079,7 @@
                 <a:ea typeface="Aptos"/>
                 <a:cs typeface="Aptos"/>
               </a:rPr>
-              <a:t>Next: check the current evidence before buying more model runs</a:t>
+              <a:t>UniMoral: different models have the highest saved score</a:t>
             </a:r>
           </a:p>
         </p:txBody>
@@ -17089,7 +17089,7 @@
           <p:cNvPr id="2" name="slide-subtitle">
             <a:extLst xmlns:a="http://schemas.openxmlformats.org/drawingml/2006/main">
               <a:ext uri="{FF2B5EF4-FFF2-40B4-BE49-F238E27FC236}">
-                <a16:creationId xmlns:a16="http://schemas.microsoft.com/office/drawing/2014/main" id="{00C9B73B-3E39-4DAB-A070-F2F2BEBD0E24}"/>
+                <a16:creationId xmlns:a16="http://schemas.microsoft.com/office/drawing/2014/main" id="{A2270956-99D2-4950-BD90-FB0493FDD4BC}"/>
               </a:ext>
             </a:extLst>
           </p:cNvPr>
@@ -17136,7 +17136,7 @@
                 <a:ea typeface="Aptos"/>
                 <a:cs typeface="Aptos"/>
               </a:rPr>
-              <a:t>Research priority, not a model result. Read from top to bottom.</a:t>
+              <a:t>CEI local result. x = model; y = task score; dot = score; line = saved 95% range.</a:t>
             </a:r>
           </a:p>
         </p:txBody>
@@ -17146,7 +17146,7 @@
           <p:cNvPr id="3" name="">
             <a:extLst xmlns:a="http://schemas.openxmlformats.org/drawingml/2006/main">
               <a:ext uri="{FF2B5EF4-FFF2-40B4-BE49-F238E27FC236}">
-                <a16:creationId xmlns:a16="http://schemas.microsoft.com/office/drawing/2014/main" id="{EDA4F1FF-0752-408A-A6C7-4A34117722B3}"/>
+                <a16:creationId xmlns:a16="http://schemas.microsoft.com/office/drawing/2014/main" id="{E05A1DD2-9BB9-4CFA-8E27-32FE400FA709}"/>
               </a:ext>
             </a:extLst>
           </p:cNvPr>
@@ -17172,24 +17172,46 @@
           </a:ln>
         </p:spPr>
       </p:sp>
-      <p:sp>
-        <p:nvSpPr>
-          <p:cNvPr id="4" name="">
-            <a:extLst xmlns:a="http://schemas.openxmlformats.org/drawingml/2006/main">
-              <a:ext uri="{FF2B5EF4-FFF2-40B4-BE49-F238E27FC236}">
-                <a16:creationId xmlns:a16="http://schemas.microsoft.com/office/drawing/2014/main" id="{0E178117-027C-4F90-BDE4-FA55FBFFE3F6}"/>
-              </a:ext>
-            </a:extLst>
-          </p:cNvPr>
-          <p:cNvSpPr>
-            <a:spLocks xmlns:a="http://schemas.openxmlformats.org/drawingml/2006/main" noGrp="1"/>
-          </p:cNvSpPr>
-          <p:nvPr/>
-        </p:nvSpPr>
-        <p:spPr>
-          <a:xfrm xmlns:a="http://schemas.openxmlformats.org/drawingml/2006/main">
-            <a:off x="800100" y="1571625"/>
-            <a:ext cx="400050" cy="323850"/>
+      <p:pic>
+        <p:nvPicPr>
+          <p:cNvPr id="9" name=""/>
+          <p:cNvPicPr>
+            <a:picLocks xmlns:a="http://schemas.openxmlformats.org/drawingml/2006/main" noChangeAspect="1"/>
+          </p:cNvPicPr>
+          <p:nvPr/>
+        </p:nvPicPr>
+        <p:blipFill>
+          <a:blip xmlns:r="http://schemas.openxmlformats.org/officeDocument/2006/relationships" xmlns:a="http://schemas.openxmlformats.org/drawingml/2006/main" r:embed="R1b23f0abcf324327"/>
+          <a:stretch xmlns:a="http://schemas.openxmlformats.org/drawingml/2006/main"/>
+        </p:blipFill>
+        <p:spPr>
+          <a:xfrm xmlns:a="http://schemas.openxmlformats.org/drawingml/2006/main">
+            <a:off x="685800" y="2586384"/>
+            <a:ext cx="10820400" cy="2532957"/>
+          </a:xfrm>
+          <a:prstGeom xmlns:a="http://schemas.openxmlformats.org/drawingml/2006/main" prst="rect">
+            <a:avLst/>
+          </a:prstGeom>
+        </p:spPr>
+      </p:pic>
+      <p:sp>
+        <p:nvSpPr>
+          <p:cNvPr id="5" name="">
+            <a:extLst xmlns:a="http://schemas.openxmlformats.org/drawingml/2006/main">
+              <a:ext uri="{FF2B5EF4-FFF2-40B4-BE49-F238E27FC236}">
+                <a16:creationId xmlns:a16="http://schemas.microsoft.com/office/drawing/2014/main" id="{452CFE2A-8F97-4A57-90FA-D2FDB024F464}"/>
+              </a:ext>
+            </a:extLst>
+          </p:cNvPr>
+          <p:cNvSpPr>
+            <a:spLocks xmlns:a="http://schemas.openxmlformats.org/drawingml/2006/main" noGrp="1"/>
+          </p:cNvSpPr>
+          <p:nvPr/>
+        </p:nvSpPr>
+        <p:spPr>
+          <a:xfrm xmlns:a="http://schemas.openxmlformats.org/drawingml/2006/main">
+            <a:off x="781050" y="6334125"/>
+            <a:ext cx="10629900" cy="285750"/>
           </a:xfrm>
           <a:prstGeom xmlns:a="http://schemas.openxmlformats.org/drawingml/2006/main" prst="rect">
             <a:avLst/>
@@ -17201,14 +17223,14 @@
         </p:spPr>
         <p:txBody>
           <a:bodyPr xmlns:a="http://schemas.openxmlformats.org/drawingml/2006/main">
-            <a:normAutofit fontScale="92424"/>
+            <a:normAutofit fontScale="100000"/>
           </a:bodyPr>
           <a:lstStyle xmlns:a="http://schemas.openxmlformats.org/drawingml/2006/main"/>
           <a:p xmlns:a="http://schemas.openxmlformats.org/drawingml/2006/main">
             <a:pPr algn="ctr">
-              <a:defRPr sz="1650" b="1">
-                <a:solidFill>
-                  <a:srgbClr val="14856D"/>
+              <a:defRPr sz="1050" b="0">
+                <a:solidFill>
+                  <a:srgbClr val="66727E"/>
                 </a:solidFill>
                 <a:latin typeface="Aptos"/>
                 <a:ea typeface="Aptos"/>
@@ -17216,1398 +17238,15 @@
               </a:defRPr>
             </a:pPr>
             <a:r>
-              <a:rPr sz="1650" b="1">
-                <a:solidFill>
-                  <a:srgbClr val="14856D"/>
+              <a:rPr sz="1050" b="0">
+                <a:solidFill>
+                  <a:srgbClr val="66727E"/>
                 </a:solidFill>
                 <a:latin typeface="Aptos"/>
                 <a:ea typeface="Aptos"/>
                 <a:cs typeface="Aptos"/>
               </a:rPr>
-              <a:t>1</a:t>
-            </a:r>
-          </a:p>
-        </p:txBody>
-      </p:sp>
-      <p:sp>
-        <p:nvSpPr>
-          <p:cNvPr id="5" name="">
-            <a:extLst xmlns:a="http://schemas.openxmlformats.org/drawingml/2006/main">
-              <a:ext uri="{FF2B5EF4-FFF2-40B4-BE49-F238E27FC236}">
-                <a16:creationId xmlns:a16="http://schemas.microsoft.com/office/drawing/2014/main" id="{D2F70CE7-6D16-42D1-82BF-64454E9F6345}"/>
-              </a:ext>
-            </a:extLst>
-          </p:cNvPr>
-          <p:cNvSpPr>
-            <a:spLocks xmlns:a="http://schemas.openxmlformats.org/drawingml/2006/main" noGrp="1"/>
-          </p:cNvSpPr>
-          <p:nvPr/>
-        </p:nvSpPr>
-        <p:spPr>
-          <a:xfrm xmlns:a="http://schemas.openxmlformats.org/drawingml/2006/main">
-            <a:off x="1381125" y="1562100"/>
-            <a:ext cx="7477125" cy="323850"/>
-          </a:xfrm>
-          <a:prstGeom xmlns:a="http://schemas.openxmlformats.org/drawingml/2006/main" prst="rect">
-            <a:avLst/>
-          </a:prstGeom>
-          <a:noFill xmlns:a="http://schemas.openxmlformats.org/drawingml/2006/main"/>
-          <a:ln xmlns:a="http://schemas.openxmlformats.org/drawingml/2006/main" w="0">
-            <a:noFill/>
-          </a:ln>
-        </p:spPr>
-        <p:txBody>
-          <a:bodyPr xmlns:a="http://schemas.openxmlformats.org/drawingml/2006/main">
-            <a:normAutofit fontScale="100000"/>
-          </a:bodyPr>
-          <a:lstStyle xmlns:a="http://schemas.openxmlformats.org/drawingml/2006/main"/>
-          <a:p xmlns:a="http://schemas.openxmlformats.org/drawingml/2006/main">
-            <a:pPr algn="l">
-              <a:defRPr sz="1350" b="1">
-                <a:solidFill>
-                  <a:srgbClr val="17212B"/>
-                </a:solidFill>
-                <a:latin typeface="Aptos"/>
-                <a:ea typeface="Aptos"/>
-                <a:cs typeface="Aptos"/>
-              </a:defRPr>
-            </a:pPr>
-            <a:r>
-              <a:rPr sz="1350" b="1">
-                <a:solidFill>
-                  <a:srgbClr val="17212B"/>
-                </a:solidFill>
-                <a:latin typeface="Aptos"/>
-                <a:ea typeface="Aptos"/>
-                <a:cs typeface="Aptos"/>
-              </a:rPr>
-              <a:t>Review 12 cases where parsing may be wrong</a:t>
-            </a:r>
-          </a:p>
-        </p:txBody>
-      </p:sp>
-      <p:sp>
-        <p:nvSpPr>
-          <p:cNvPr id="6" name="">
-            <a:extLst xmlns:a="http://schemas.openxmlformats.org/drawingml/2006/main">
-              <a:ext uri="{FF2B5EF4-FFF2-40B4-BE49-F238E27FC236}">
-                <a16:creationId xmlns:a16="http://schemas.microsoft.com/office/drawing/2014/main" id="{66ECC9F6-E46B-4C5E-8147-0808A61A09D4}"/>
-              </a:ext>
-            </a:extLst>
-          </p:cNvPr>
-          <p:cNvSpPr>
-            <a:spLocks xmlns:a="http://schemas.openxmlformats.org/drawingml/2006/main" noGrp="1"/>
-          </p:cNvSpPr>
-          <p:nvPr/>
-        </p:nvSpPr>
-        <p:spPr>
-          <a:xfrm xmlns:a="http://schemas.openxmlformats.org/drawingml/2006/main">
-            <a:off x="9144000" y="1571625"/>
-            <a:ext cx="2238375" cy="304800"/>
-          </a:xfrm>
-          <a:prstGeom xmlns:a="http://schemas.openxmlformats.org/drawingml/2006/main" prst="rect">
-            <a:avLst/>
-          </a:prstGeom>
-          <a:noFill xmlns:a="http://schemas.openxmlformats.org/drawingml/2006/main"/>
-          <a:ln xmlns:a="http://schemas.openxmlformats.org/drawingml/2006/main" w="0">
-            <a:noFill/>
-          </a:ln>
-        </p:spPr>
-        <p:txBody>
-          <a:bodyPr xmlns:a="http://schemas.openxmlformats.org/drawingml/2006/main">
-            <a:normAutofit fontScale="100000"/>
-          </a:bodyPr>
-          <a:lstStyle xmlns:a="http://schemas.openxmlformats.org/drawingml/2006/main"/>
-          <a:p xmlns:a="http://schemas.openxmlformats.org/drawingml/2006/main">
-            <a:pPr algn="r">
-              <a:defRPr sz="1200" b="1">
-                <a:solidFill>
-                  <a:srgbClr val="14856D"/>
-                </a:solidFill>
-                <a:latin typeface="Aptos"/>
-                <a:ea typeface="Aptos"/>
-                <a:cs typeface="Aptos"/>
-              </a:defRPr>
-            </a:pPr>
-            <a:r>
-              <a:rPr sz="1200" b="1">
-                <a:solidFill>
-                  <a:srgbClr val="14856D"/>
-                </a:solidFill>
-                <a:latin typeface="Aptos"/>
-                <a:ea typeface="Aptos"/>
-                <a:cs typeface="Aptos"/>
-              </a:rPr>
-              <a:t>no new model runs</a:t>
-            </a:r>
-          </a:p>
-        </p:txBody>
-      </p:sp>
-      <p:sp>
-        <p:nvSpPr>
-          <p:cNvPr id="7" name="">
-            <a:extLst xmlns:a="http://schemas.openxmlformats.org/drawingml/2006/main">
-              <a:ext uri="{FF2B5EF4-FFF2-40B4-BE49-F238E27FC236}">
-                <a16:creationId xmlns:a16="http://schemas.microsoft.com/office/drawing/2014/main" id="{B4749E3F-2A95-4FE2-A11F-7D2CA491893E}"/>
-              </a:ext>
-            </a:extLst>
-          </p:cNvPr>
-          <p:cNvSpPr>
-            <a:spLocks xmlns:a="http://schemas.openxmlformats.org/drawingml/2006/main" noGrp="1"/>
-          </p:cNvSpPr>
-          <p:nvPr/>
-        </p:nvSpPr>
-        <p:spPr>
-          <a:xfrm xmlns:a="http://schemas.openxmlformats.org/drawingml/2006/main">
-            <a:off x="1381125" y="2028825"/>
-            <a:ext cx="10001250" cy="0"/>
-          </a:xfrm>
-          <a:prstGeom xmlns:a="http://schemas.openxmlformats.org/drawingml/2006/main" prst="line">
-            <a:avLst/>
-          </a:prstGeom>
-          <a:noFill xmlns:a="http://schemas.openxmlformats.org/drawingml/2006/main"/>
-          <a:ln xmlns:a="http://schemas.openxmlformats.org/drawingml/2006/main" w="9525">
-            <a:solidFill>
-              <a:srgbClr val="D8D9D5"/>
-            </a:solidFill>
-            <a:prstDash val="solid"/>
-          </a:ln>
-        </p:spPr>
-      </p:sp>
-      <p:sp>
-        <p:nvSpPr>
-          <p:cNvPr id="8" name="">
-            <a:extLst xmlns:a="http://schemas.openxmlformats.org/drawingml/2006/main">
-              <a:ext uri="{FF2B5EF4-FFF2-40B4-BE49-F238E27FC236}">
-                <a16:creationId xmlns:a16="http://schemas.microsoft.com/office/drawing/2014/main" id="{CF57FB72-F277-4687-9F00-535191D8A8CE}"/>
-              </a:ext>
-            </a:extLst>
-          </p:cNvPr>
-          <p:cNvSpPr>
-            <a:spLocks xmlns:a="http://schemas.openxmlformats.org/drawingml/2006/main" noGrp="1"/>
-          </p:cNvSpPr>
-          <p:nvPr/>
-        </p:nvSpPr>
-        <p:spPr>
-          <a:xfrm xmlns:a="http://schemas.openxmlformats.org/drawingml/2006/main">
-            <a:off x="800100" y="2200275"/>
-            <a:ext cx="400050" cy="323850"/>
-          </a:xfrm>
-          <a:prstGeom xmlns:a="http://schemas.openxmlformats.org/drawingml/2006/main" prst="rect">
-            <a:avLst/>
-          </a:prstGeom>
-          <a:noFill xmlns:a="http://schemas.openxmlformats.org/drawingml/2006/main"/>
-          <a:ln xmlns:a="http://schemas.openxmlformats.org/drawingml/2006/main" w="0">
-            <a:noFill/>
-          </a:ln>
-        </p:spPr>
-        <p:txBody>
-          <a:bodyPr xmlns:a="http://schemas.openxmlformats.org/drawingml/2006/main">
-            <a:normAutofit fontScale="92424"/>
-          </a:bodyPr>
-          <a:lstStyle xmlns:a="http://schemas.openxmlformats.org/drawingml/2006/main"/>
-          <a:p xmlns:a="http://schemas.openxmlformats.org/drawingml/2006/main">
-            <a:pPr algn="ctr">
-              <a:defRPr sz="1650" b="1">
-                <a:solidFill>
-                  <a:srgbClr val="14856D"/>
-                </a:solidFill>
-                <a:latin typeface="Aptos"/>
-                <a:ea typeface="Aptos"/>
-                <a:cs typeface="Aptos"/>
-              </a:defRPr>
-            </a:pPr>
-            <a:r>
-              <a:rPr sz="1650" b="1">
-                <a:solidFill>
-                  <a:srgbClr val="14856D"/>
-                </a:solidFill>
-                <a:latin typeface="Aptos"/>
-                <a:ea typeface="Aptos"/>
-                <a:cs typeface="Aptos"/>
-              </a:rPr>
-              <a:t>2</a:t>
-            </a:r>
-          </a:p>
-        </p:txBody>
-      </p:sp>
-      <p:sp>
-        <p:nvSpPr>
-          <p:cNvPr id="9" name="">
-            <a:extLst xmlns:a="http://schemas.openxmlformats.org/drawingml/2006/main">
-              <a:ext uri="{FF2B5EF4-FFF2-40B4-BE49-F238E27FC236}">
-                <a16:creationId xmlns:a16="http://schemas.microsoft.com/office/drawing/2014/main" id="{C0BD991B-AF77-460F-8029-7A1629CF9988}"/>
-              </a:ext>
-            </a:extLst>
-          </p:cNvPr>
-          <p:cNvSpPr>
-            <a:spLocks xmlns:a="http://schemas.openxmlformats.org/drawingml/2006/main" noGrp="1"/>
-          </p:cNvSpPr>
-          <p:nvPr/>
-        </p:nvSpPr>
-        <p:spPr>
-          <a:xfrm xmlns:a="http://schemas.openxmlformats.org/drawingml/2006/main">
-            <a:off x="1381125" y="2190750"/>
-            <a:ext cx="7477125" cy="323850"/>
-          </a:xfrm>
-          <a:prstGeom xmlns:a="http://schemas.openxmlformats.org/drawingml/2006/main" prst="rect">
-            <a:avLst/>
-          </a:prstGeom>
-          <a:noFill xmlns:a="http://schemas.openxmlformats.org/drawingml/2006/main"/>
-          <a:ln xmlns:a="http://schemas.openxmlformats.org/drawingml/2006/main" w="0">
-            <a:noFill/>
-          </a:ln>
-        </p:spPr>
-        <p:txBody>
-          <a:bodyPr xmlns:a="http://schemas.openxmlformats.org/drawingml/2006/main">
-            <a:normAutofit fontScale="100000"/>
-          </a:bodyPr>
-          <a:lstStyle xmlns:a="http://schemas.openxmlformats.org/drawingml/2006/main"/>
-          <a:p xmlns:a="http://schemas.openxmlformats.org/drawingml/2006/main">
-            <a:pPr algn="l">
-              <a:defRPr sz="1350" b="1">
-                <a:solidFill>
-                  <a:srgbClr val="17212B"/>
-                </a:solidFill>
-                <a:latin typeface="Aptos"/>
-                <a:ea typeface="Aptos"/>
-                <a:cs typeface="Aptos"/>
-              </a:defRPr>
-            </a:pPr>
-            <a:r>
-              <a:rPr sz="1350" b="1">
-                <a:solidFill>
-                  <a:srgbClr val="17212B"/>
-                </a:solidFill>
-                <a:latin typeface="Aptos"/>
-                <a:ea typeface="Aptos"/>
-                <a:cs typeface="Aptos"/>
-              </a:rPr>
-              <a:t>Check duplicate labels and verify scores using the paper's method</a:t>
-            </a:r>
-          </a:p>
-        </p:txBody>
-      </p:sp>
-      <p:sp>
-        <p:nvSpPr>
-          <p:cNvPr id="10" name="">
-            <a:extLst xmlns:a="http://schemas.openxmlformats.org/drawingml/2006/main">
-              <a:ext uri="{FF2B5EF4-FFF2-40B4-BE49-F238E27FC236}">
-                <a16:creationId xmlns:a16="http://schemas.microsoft.com/office/drawing/2014/main" id="{96ADD2DB-CD77-4E95-9278-604509159D9D}"/>
-              </a:ext>
-            </a:extLst>
-          </p:cNvPr>
-          <p:cNvSpPr>
-            <a:spLocks xmlns:a="http://schemas.openxmlformats.org/drawingml/2006/main" noGrp="1"/>
-          </p:cNvSpPr>
-          <p:nvPr/>
-        </p:nvSpPr>
-        <p:spPr>
-          <a:xfrm xmlns:a="http://schemas.openxmlformats.org/drawingml/2006/main">
-            <a:off x="9144000" y="2200275"/>
-            <a:ext cx="2238375" cy="304800"/>
-          </a:xfrm>
-          <a:prstGeom xmlns:a="http://schemas.openxmlformats.org/drawingml/2006/main" prst="rect">
-            <a:avLst/>
-          </a:prstGeom>
-          <a:noFill xmlns:a="http://schemas.openxmlformats.org/drawingml/2006/main"/>
-          <a:ln xmlns:a="http://schemas.openxmlformats.org/drawingml/2006/main" w="0">
-            <a:noFill/>
-          </a:ln>
-        </p:spPr>
-        <p:txBody>
-          <a:bodyPr xmlns:a="http://schemas.openxmlformats.org/drawingml/2006/main">
-            <a:normAutofit fontScale="100000"/>
-          </a:bodyPr>
-          <a:lstStyle xmlns:a="http://schemas.openxmlformats.org/drawingml/2006/main"/>
-          <a:p xmlns:a="http://schemas.openxmlformats.org/drawingml/2006/main">
-            <a:pPr algn="r">
-              <a:defRPr sz="1200" b="1">
-                <a:solidFill>
-                  <a:srgbClr val="14856D"/>
-                </a:solidFill>
-                <a:latin typeface="Aptos"/>
-                <a:ea typeface="Aptos"/>
-                <a:cs typeface="Aptos"/>
-              </a:defRPr>
-            </a:pPr>
-            <a:r>
-              <a:rPr sz="1200" b="1">
-                <a:solidFill>
-                  <a:srgbClr val="14856D"/>
-                </a:solidFill>
-                <a:latin typeface="Aptos"/>
-                <a:ea typeface="Aptos"/>
-                <a:cs typeface="Aptos"/>
-              </a:rPr>
-              <a:t>no new model runs</a:t>
-            </a:r>
-          </a:p>
-        </p:txBody>
-      </p:sp>
-      <p:sp>
-        <p:nvSpPr>
-          <p:cNvPr id="11" name="">
-            <a:extLst xmlns:a="http://schemas.openxmlformats.org/drawingml/2006/main">
-              <a:ext uri="{FF2B5EF4-FFF2-40B4-BE49-F238E27FC236}">
-                <a16:creationId xmlns:a16="http://schemas.microsoft.com/office/drawing/2014/main" id="{FD3D4BDA-8DE8-4C09-93AD-5DD2D024496B}"/>
-              </a:ext>
-            </a:extLst>
-          </p:cNvPr>
-          <p:cNvSpPr>
-            <a:spLocks xmlns:a="http://schemas.openxmlformats.org/drawingml/2006/main" noGrp="1"/>
-          </p:cNvSpPr>
-          <p:nvPr/>
-        </p:nvSpPr>
-        <p:spPr>
-          <a:xfrm xmlns:a="http://schemas.openxmlformats.org/drawingml/2006/main">
-            <a:off x="1381125" y="2657475"/>
-            <a:ext cx="10001250" cy="0"/>
-          </a:xfrm>
-          <a:prstGeom xmlns:a="http://schemas.openxmlformats.org/drawingml/2006/main" prst="line">
-            <a:avLst/>
-          </a:prstGeom>
-          <a:noFill xmlns:a="http://schemas.openxmlformats.org/drawingml/2006/main"/>
-          <a:ln xmlns:a="http://schemas.openxmlformats.org/drawingml/2006/main" w="9525">
-            <a:solidFill>
-              <a:srgbClr val="D8D9D5"/>
-            </a:solidFill>
-            <a:prstDash val="solid"/>
-          </a:ln>
-        </p:spPr>
-      </p:sp>
-      <p:sp>
-        <p:nvSpPr>
-          <p:cNvPr id="12" name="">
-            <a:extLst xmlns:a="http://schemas.openxmlformats.org/drawingml/2006/main">
-              <a:ext uri="{FF2B5EF4-FFF2-40B4-BE49-F238E27FC236}">
-                <a16:creationId xmlns:a16="http://schemas.microsoft.com/office/drawing/2014/main" id="{A8F1623A-84E9-4FFA-AA51-BE25AE825203}"/>
-              </a:ext>
-            </a:extLst>
-          </p:cNvPr>
-          <p:cNvSpPr>
-            <a:spLocks xmlns:a="http://schemas.openxmlformats.org/drawingml/2006/main" noGrp="1"/>
-          </p:cNvSpPr>
-          <p:nvPr/>
-        </p:nvSpPr>
-        <p:spPr>
-          <a:xfrm xmlns:a="http://schemas.openxmlformats.org/drawingml/2006/main">
-            <a:off x="800100" y="2828925"/>
-            <a:ext cx="400050" cy="323850"/>
-          </a:xfrm>
-          <a:prstGeom xmlns:a="http://schemas.openxmlformats.org/drawingml/2006/main" prst="rect">
-            <a:avLst/>
-          </a:prstGeom>
-          <a:noFill xmlns:a="http://schemas.openxmlformats.org/drawingml/2006/main"/>
-          <a:ln xmlns:a="http://schemas.openxmlformats.org/drawingml/2006/main" w="0">
-            <a:noFill/>
-          </a:ln>
-        </p:spPr>
-        <p:txBody>
-          <a:bodyPr xmlns:a="http://schemas.openxmlformats.org/drawingml/2006/main">
-            <a:normAutofit fontScale="92424"/>
-          </a:bodyPr>
-          <a:lstStyle xmlns:a="http://schemas.openxmlformats.org/drawingml/2006/main"/>
-          <a:p xmlns:a="http://schemas.openxmlformats.org/drawingml/2006/main">
-            <a:pPr algn="ctr">
-              <a:defRPr sz="1650" b="1">
-                <a:solidFill>
-                  <a:srgbClr val="C878A7"/>
-                </a:solidFill>
-                <a:latin typeface="Aptos"/>
-                <a:ea typeface="Aptos"/>
-                <a:cs typeface="Aptos"/>
-              </a:defRPr>
-            </a:pPr>
-            <a:r>
-              <a:rPr sz="1650" b="1">
-                <a:solidFill>
-                  <a:srgbClr val="C878A7"/>
-                </a:solidFill>
-                <a:latin typeface="Aptos"/>
-                <a:ea typeface="Aptos"/>
-                <a:cs typeface="Aptos"/>
-              </a:rPr>
-              <a:t>3</a:t>
-            </a:r>
-          </a:p>
-        </p:txBody>
-      </p:sp>
-      <p:sp>
-        <p:nvSpPr>
-          <p:cNvPr id="13" name="">
-            <a:extLst xmlns:a="http://schemas.openxmlformats.org/drawingml/2006/main">
-              <a:ext uri="{FF2B5EF4-FFF2-40B4-BE49-F238E27FC236}">
-                <a16:creationId xmlns:a16="http://schemas.microsoft.com/office/drawing/2014/main" id="{8F94A699-261B-4931-88E0-3D0EC587E4B6}"/>
-              </a:ext>
-            </a:extLst>
-          </p:cNvPr>
-          <p:cNvSpPr>
-            <a:spLocks xmlns:a="http://schemas.openxmlformats.org/drawingml/2006/main" noGrp="1"/>
-          </p:cNvSpPr>
-          <p:nvPr/>
-        </p:nvSpPr>
-        <p:spPr>
-          <a:xfrm xmlns:a="http://schemas.openxmlformats.org/drawingml/2006/main">
-            <a:off x="1381125" y="2819400"/>
-            <a:ext cx="7477125" cy="323850"/>
-          </a:xfrm>
-          <a:prstGeom xmlns:a="http://schemas.openxmlformats.org/drawingml/2006/main" prst="rect">
-            <a:avLst/>
-          </a:prstGeom>
-          <a:noFill xmlns:a="http://schemas.openxmlformats.org/drawingml/2006/main"/>
-          <a:ln xmlns:a="http://schemas.openxmlformats.org/drawingml/2006/main" w="0">
-            <a:noFill/>
-          </a:ln>
-        </p:spPr>
-        <p:txBody>
-          <a:bodyPr xmlns:a="http://schemas.openxmlformats.org/drawingml/2006/main">
-            <a:normAutofit fontScale="100000"/>
-          </a:bodyPr>
-          <a:lstStyle xmlns:a="http://schemas.openxmlformats.org/drawingml/2006/main"/>
-          <a:p xmlns:a="http://schemas.openxmlformats.org/drawingml/2006/main">
-            <a:pPr algn="l">
-              <a:defRPr sz="1350" b="1">
-                <a:solidFill>
-                  <a:srgbClr val="17212B"/>
-                </a:solidFill>
-                <a:latin typeface="Aptos"/>
-                <a:ea typeface="Aptos"/>
-                <a:cs typeface="Aptos"/>
-              </a:defRPr>
-            </a:pPr>
-            <a:r>
-              <a:rPr sz="1350" b="1">
-                <a:solidFill>
-                  <a:srgbClr val="17212B"/>
-                </a:solidFill>
-                <a:latin typeface="Aptos"/>
-                <a:ea typeface="Aptos"/>
-                <a:cs typeface="Aptos"/>
-              </a:rPr>
-              <a:t>Run human validation</a:t>
-            </a:r>
-          </a:p>
-        </p:txBody>
-      </p:sp>
-      <p:sp>
-        <p:nvSpPr>
-          <p:cNvPr id="14" name="">
-            <a:extLst xmlns:a="http://schemas.openxmlformats.org/drawingml/2006/main">
-              <a:ext uri="{FF2B5EF4-FFF2-40B4-BE49-F238E27FC236}">
-                <a16:creationId xmlns:a16="http://schemas.microsoft.com/office/drawing/2014/main" id="{4F0A11B1-CA99-43BD-8163-CF10FE3B0C46}"/>
-              </a:ext>
-            </a:extLst>
-          </p:cNvPr>
-          <p:cNvSpPr>
-            <a:spLocks xmlns:a="http://schemas.openxmlformats.org/drawingml/2006/main" noGrp="1"/>
-          </p:cNvSpPr>
-          <p:nvPr/>
-        </p:nvSpPr>
-        <p:spPr>
-          <a:xfrm xmlns:a="http://schemas.openxmlformats.org/drawingml/2006/main">
-            <a:off x="9144000" y="2828925"/>
-            <a:ext cx="2238375" cy="304800"/>
-          </a:xfrm>
-          <a:prstGeom xmlns:a="http://schemas.openxmlformats.org/drawingml/2006/main" prst="rect">
-            <a:avLst/>
-          </a:prstGeom>
-          <a:noFill xmlns:a="http://schemas.openxmlformats.org/drawingml/2006/main"/>
-          <a:ln xmlns:a="http://schemas.openxmlformats.org/drawingml/2006/main" w="0">
-            <a:noFill/>
-          </a:ln>
-        </p:spPr>
-        <p:txBody>
-          <a:bodyPr xmlns:a="http://schemas.openxmlformats.org/drawingml/2006/main">
-            <a:normAutofit fontScale="100000"/>
-          </a:bodyPr>
-          <a:lstStyle xmlns:a="http://schemas.openxmlformats.org/drawingml/2006/main"/>
-          <a:p xmlns:a="http://schemas.openxmlformats.org/drawingml/2006/main">
-            <a:pPr algn="r">
-              <a:defRPr sz="1200" b="1">
-                <a:solidFill>
-                  <a:srgbClr val="C878A7"/>
-                </a:solidFill>
-                <a:latin typeface="Aptos"/>
-                <a:ea typeface="Aptos"/>
-                <a:cs typeface="Aptos"/>
-              </a:defRPr>
-            </a:pPr>
-            <a:r>
-              <a:rPr sz="1200" b="1">
-                <a:solidFill>
-                  <a:srgbClr val="C878A7"/>
-                </a:solidFill>
-                <a:latin typeface="Aptos"/>
-                <a:ea typeface="Aptos"/>
-                <a:cs typeface="Aptos"/>
-              </a:rPr>
-              <a:t>human study</a:t>
-            </a:r>
-          </a:p>
-        </p:txBody>
-      </p:sp>
-      <p:sp>
-        <p:nvSpPr>
-          <p:cNvPr id="15" name="">
-            <a:extLst xmlns:a="http://schemas.openxmlformats.org/drawingml/2006/main">
-              <a:ext uri="{FF2B5EF4-FFF2-40B4-BE49-F238E27FC236}">
-                <a16:creationId xmlns:a16="http://schemas.microsoft.com/office/drawing/2014/main" id="{070829AB-9C07-4F9D-AF3B-65E3CE8BC2A6}"/>
-              </a:ext>
-            </a:extLst>
-          </p:cNvPr>
-          <p:cNvSpPr>
-            <a:spLocks xmlns:a="http://schemas.openxmlformats.org/drawingml/2006/main" noGrp="1"/>
-          </p:cNvSpPr>
-          <p:nvPr/>
-        </p:nvSpPr>
-        <p:spPr>
-          <a:xfrm xmlns:a="http://schemas.openxmlformats.org/drawingml/2006/main">
-            <a:off x="1381125" y="3286125"/>
-            <a:ext cx="10001250" cy="0"/>
-          </a:xfrm>
-          <a:prstGeom xmlns:a="http://schemas.openxmlformats.org/drawingml/2006/main" prst="line">
-            <a:avLst/>
-          </a:prstGeom>
-          <a:noFill xmlns:a="http://schemas.openxmlformats.org/drawingml/2006/main"/>
-          <a:ln xmlns:a="http://schemas.openxmlformats.org/drawingml/2006/main" w="9525">
-            <a:solidFill>
-              <a:srgbClr val="D8D9D5"/>
-            </a:solidFill>
-            <a:prstDash val="solid"/>
-          </a:ln>
-        </p:spPr>
-      </p:sp>
-      <p:sp>
-        <p:nvSpPr>
-          <p:cNvPr id="16" name="">
-            <a:extLst xmlns:a="http://schemas.openxmlformats.org/drawingml/2006/main">
-              <a:ext uri="{FF2B5EF4-FFF2-40B4-BE49-F238E27FC236}">
-                <a16:creationId xmlns:a16="http://schemas.microsoft.com/office/drawing/2014/main" id="{58061440-141A-4F7F-962C-BF146B5DC326}"/>
-              </a:ext>
-            </a:extLst>
-          </p:cNvPr>
-          <p:cNvSpPr>
-            <a:spLocks xmlns:a="http://schemas.openxmlformats.org/drawingml/2006/main" noGrp="1"/>
-          </p:cNvSpPr>
-          <p:nvPr/>
-        </p:nvSpPr>
-        <p:spPr>
-          <a:xfrm xmlns:a="http://schemas.openxmlformats.org/drawingml/2006/main">
-            <a:off x="800100" y="3457575"/>
-            <a:ext cx="400050" cy="323850"/>
-          </a:xfrm>
-          <a:prstGeom xmlns:a="http://schemas.openxmlformats.org/drawingml/2006/main" prst="rect">
-            <a:avLst/>
-          </a:prstGeom>
-          <a:noFill xmlns:a="http://schemas.openxmlformats.org/drawingml/2006/main"/>
-          <a:ln xmlns:a="http://schemas.openxmlformats.org/drawingml/2006/main" w="0">
-            <a:noFill/>
-          </a:ln>
-        </p:spPr>
-        <p:txBody>
-          <a:bodyPr xmlns:a="http://schemas.openxmlformats.org/drawingml/2006/main">
-            <a:normAutofit fontScale="92424"/>
-          </a:bodyPr>
-          <a:lstStyle xmlns:a="http://schemas.openxmlformats.org/drawingml/2006/main"/>
-          <a:p xmlns:a="http://schemas.openxmlformats.org/drawingml/2006/main">
-            <a:pPr algn="ctr">
-              <a:defRPr sz="1650" b="1">
-                <a:solidFill>
-                  <a:srgbClr val="2B78B8"/>
-                </a:solidFill>
-                <a:latin typeface="Aptos"/>
-                <a:ea typeface="Aptos"/>
-                <a:cs typeface="Aptos"/>
-              </a:defRPr>
-            </a:pPr>
-            <a:r>
-              <a:rPr sz="1650" b="1">
-                <a:solidFill>
-                  <a:srgbClr val="2B78B8"/>
-                </a:solidFill>
-                <a:latin typeface="Aptos"/>
-                <a:ea typeface="Aptos"/>
-                <a:cs typeface="Aptos"/>
-              </a:rPr>
-              <a:t>4</a:t>
-            </a:r>
-          </a:p>
-        </p:txBody>
-      </p:sp>
-      <p:sp>
-        <p:nvSpPr>
-          <p:cNvPr id="17" name="">
-            <a:extLst xmlns:a="http://schemas.openxmlformats.org/drawingml/2006/main">
-              <a:ext uri="{FF2B5EF4-FFF2-40B4-BE49-F238E27FC236}">
-                <a16:creationId xmlns:a16="http://schemas.microsoft.com/office/drawing/2014/main" id="{C35018FB-4DF9-40DA-9A73-E65413EF2E52}"/>
-              </a:ext>
-            </a:extLst>
-          </p:cNvPr>
-          <p:cNvSpPr>
-            <a:spLocks xmlns:a="http://schemas.openxmlformats.org/drawingml/2006/main" noGrp="1"/>
-          </p:cNvSpPr>
-          <p:nvPr/>
-        </p:nvSpPr>
-        <p:spPr>
-          <a:xfrm xmlns:a="http://schemas.openxmlformats.org/drawingml/2006/main">
-            <a:off x="1381125" y="3448050"/>
-            <a:ext cx="7477125" cy="323850"/>
-          </a:xfrm>
-          <a:prstGeom xmlns:a="http://schemas.openxmlformats.org/drawingml/2006/main" prst="rect">
-            <a:avLst/>
-          </a:prstGeom>
-          <a:noFill xmlns:a="http://schemas.openxmlformats.org/drawingml/2006/main"/>
-          <a:ln xmlns:a="http://schemas.openxmlformats.org/drawingml/2006/main" w="0">
-            <a:noFill/>
-          </a:ln>
-        </p:spPr>
-        <p:txBody>
-          <a:bodyPr xmlns:a="http://schemas.openxmlformats.org/drawingml/2006/main">
-            <a:normAutofit fontScale="100000"/>
-          </a:bodyPr>
-          <a:lstStyle xmlns:a="http://schemas.openxmlformats.org/drawingml/2006/main"/>
-          <a:p xmlns:a="http://schemas.openxmlformats.org/drawingml/2006/main">
-            <a:pPr algn="l">
-              <a:defRPr sz="1350" b="1">
-                <a:solidFill>
-                  <a:srgbClr val="17212B"/>
-                </a:solidFill>
-                <a:latin typeface="Aptos"/>
-                <a:ea typeface="Aptos"/>
-                <a:cs typeface="Aptos"/>
-              </a:defRPr>
-            </a:pPr>
-            <a:r>
-              <a:rPr sz="1350" b="1">
-                <a:solidFill>
-                  <a:srgbClr val="17212B"/>
-                </a:solidFill>
-                <a:latin typeface="Aptos"/>
-                <a:ea typeface="Aptos"/>
-                <a:cs typeface="Aptos"/>
-              </a:rPr>
-              <a:t>Add MoralBench comparison items</a:t>
-            </a:r>
-          </a:p>
-        </p:txBody>
-      </p:sp>
-      <p:sp>
-        <p:nvSpPr>
-          <p:cNvPr id="18" name="">
-            <a:extLst xmlns:a="http://schemas.openxmlformats.org/drawingml/2006/main">
-              <a:ext uri="{FF2B5EF4-FFF2-40B4-BE49-F238E27FC236}">
-                <a16:creationId xmlns:a16="http://schemas.microsoft.com/office/drawing/2014/main" id="{A7932B0A-4514-40AB-A23A-EFF79C6E6702}"/>
-              </a:ext>
-            </a:extLst>
-          </p:cNvPr>
-          <p:cNvSpPr>
-            <a:spLocks xmlns:a="http://schemas.openxmlformats.org/drawingml/2006/main" noGrp="1"/>
-          </p:cNvSpPr>
-          <p:nvPr/>
-        </p:nvSpPr>
-        <p:spPr>
-          <a:xfrm xmlns:a="http://schemas.openxmlformats.org/drawingml/2006/main">
-            <a:off x="9144000" y="3457575"/>
-            <a:ext cx="2238375" cy="304800"/>
-          </a:xfrm>
-          <a:prstGeom xmlns:a="http://schemas.openxmlformats.org/drawingml/2006/main" prst="rect">
-            <a:avLst/>
-          </a:prstGeom>
-          <a:noFill xmlns:a="http://schemas.openxmlformats.org/drawingml/2006/main"/>
-          <a:ln xmlns:a="http://schemas.openxmlformats.org/drawingml/2006/main" w="0">
-            <a:noFill/>
-          </a:ln>
-        </p:spPr>
-        <p:txBody>
-          <a:bodyPr xmlns:a="http://schemas.openxmlformats.org/drawingml/2006/main">
-            <a:normAutofit fontScale="100000"/>
-          </a:bodyPr>
-          <a:lstStyle xmlns:a="http://schemas.openxmlformats.org/drawingml/2006/main"/>
-          <a:p xmlns:a="http://schemas.openxmlformats.org/drawingml/2006/main">
-            <a:pPr algn="r">
-              <a:defRPr sz="1200" b="1">
-                <a:solidFill>
-                  <a:srgbClr val="2B78B8"/>
-                </a:solidFill>
-                <a:latin typeface="Aptos"/>
-                <a:ea typeface="Aptos"/>
-                <a:cs typeface="Aptos"/>
-              </a:defRPr>
-            </a:pPr>
-            <a:r>
-              <a:rPr sz="1200" b="1">
-                <a:solidFill>
-                  <a:srgbClr val="2B78B8"/>
-                </a:solidFill>
-                <a:latin typeface="Aptos"/>
-                <a:ea typeface="Aptos"/>
-                <a:cs typeface="Aptos"/>
-              </a:rPr>
-              <a:t>new items + reruns</a:t>
-            </a:r>
-          </a:p>
-        </p:txBody>
-      </p:sp>
-      <p:sp>
-        <p:nvSpPr>
-          <p:cNvPr id="19" name="">
-            <a:extLst xmlns:a="http://schemas.openxmlformats.org/drawingml/2006/main">
-              <a:ext uri="{FF2B5EF4-FFF2-40B4-BE49-F238E27FC236}">
-                <a16:creationId xmlns:a16="http://schemas.microsoft.com/office/drawing/2014/main" id="{85E495AA-001D-43BB-AE7E-93A6BC493CB7}"/>
-              </a:ext>
-            </a:extLst>
-          </p:cNvPr>
-          <p:cNvSpPr>
-            <a:spLocks xmlns:a="http://schemas.openxmlformats.org/drawingml/2006/main" noGrp="1"/>
-          </p:cNvSpPr>
-          <p:nvPr/>
-        </p:nvSpPr>
-        <p:spPr>
-          <a:xfrm xmlns:a="http://schemas.openxmlformats.org/drawingml/2006/main">
-            <a:off x="1381125" y="3914775"/>
-            <a:ext cx="10001250" cy="0"/>
-          </a:xfrm>
-          <a:prstGeom xmlns:a="http://schemas.openxmlformats.org/drawingml/2006/main" prst="line">
-            <a:avLst/>
-          </a:prstGeom>
-          <a:noFill xmlns:a="http://schemas.openxmlformats.org/drawingml/2006/main"/>
-          <a:ln xmlns:a="http://schemas.openxmlformats.org/drawingml/2006/main" w="9525">
-            <a:solidFill>
-              <a:srgbClr val="D8D9D5"/>
-            </a:solidFill>
-            <a:prstDash val="solid"/>
-          </a:ln>
-        </p:spPr>
-      </p:sp>
-      <p:sp>
-        <p:nvSpPr>
-          <p:cNvPr id="20" name="">
-            <a:extLst xmlns:a="http://schemas.openxmlformats.org/drawingml/2006/main">
-              <a:ext uri="{FF2B5EF4-FFF2-40B4-BE49-F238E27FC236}">
-                <a16:creationId xmlns:a16="http://schemas.microsoft.com/office/drawing/2014/main" id="{CEDC9A6A-9DDC-42CF-9EA6-FF7A96351A53}"/>
-              </a:ext>
-            </a:extLst>
-          </p:cNvPr>
-          <p:cNvSpPr>
-            <a:spLocks xmlns:a="http://schemas.openxmlformats.org/drawingml/2006/main" noGrp="1"/>
-          </p:cNvSpPr>
-          <p:nvPr/>
-        </p:nvSpPr>
-        <p:spPr>
-          <a:xfrm xmlns:a="http://schemas.openxmlformats.org/drawingml/2006/main">
-            <a:off x="800100" y="4086225"/>
-            <a:ext cx="400050" cy="323850"/>
-          </a:xfrm>
-          <a:prstGeom xmlns:a="http://schemas.openxmlformats.org/drawingml/2006/main" prst="rect">
-            <a:avLst/>
-          </a:prstGeom>
-          <a:noFill xmlns:a="http://schemas.openxmlformats.org/drawingml/2006/main"/>
-          <a:ln xmlns:a="http://schemas.openxmlformats.org/drawingml/2006/main" w="0">
-            <a:noFill/>
-          </a:ln>
-        </p:spPr>
-        <p:txBody>
-          <a:bodyPr xmlns:a="http://schemas.openxmlformats.org/drawingml/2006/main">
-            <a:normAutofit fontScale="92424"/>
-          </a:bodyPr>
-          <a:lstStyle xmlns:a="http://schemas.openxmlformats.org/drawingml/2006/main"/>
-          <a:p xmlns:a="http://schemas.openxmlformats.org/drawingml/2006/main">
-            <a:pPr algn="ctr">
-              <a:defRPr sz="1650" b="1">
-                <a:solidFill>
-                  <a:srgbClr val="D3971E"/>
-                </a:solidFill>
-                <a:latin typeface="Aptos"/>
-                <a:ea typeface="Aptos"/>
-                <a:cs typeface="Aptos"/>
-              </a:defRPr>
-            </a:pPr>
-            <a:r>
-              <a:rPr sz="1650" b="1">
-                <a:solidFill>
-                  <a:srgbClr val="D3971E"/>
-                </a:solidFill>
-                <a:latin typeface="Aptos"/>
-                <a:ea typeface="Aptos"/>
-                <a:cs typeface="Aptos"/>
-              </a:rPr>
-              <a:t>5</a:t>
-            </a:r>
-          </a:p>
-        </p:txBody>
-      </p:sp>
-      <p:sp>
-        <p:nvSpPr>
-          <p:cNvPr id="21" name="">
-            <a:extLst xmlns:a="http://schemas.openxmlformats.org/drawingml/2006/main">
-              <a:ext uri="{FF2B5EF4-FFF2-40B4-BE49-F238E27FC236}">
-                <a16:creationId xmlns:a16="http://schemas.microsoft.com/office/drawing/2014/main" id="{EC3FA754-6DF9-45DC-85A3-3AAFBA76344F}"/>
-              </a:ext>
-            </a:extLst>
-          </p:cNvPr>
-          <p:cNvSpPr>
-            <a:spLocks xmlns:a="http://schemas.openxmlformats.org/drawingml/2006/main" noGrp="1"/>
-          </p:cNvSpPr>
-          <p:nvPr/>
-        </p:nvSpPr>
-        <p:spPr>
-          <a:xfrm xmlns:a="http://schemas.openxmlformats.org/drawingml/2006/main">
-            <a:off x="1381125" y="4076700"/>
-            <a:ext cx="7477125" cy="323850"/>
-          </a:xfrm>
-          <a:prstGeom xmlns:a="http://schemas.openxmlformats.org/drawingml/2006/main" prst="rect">
-            <a:avLst/>
-          </a:prstGeom>
-          <a:noFill xmlns:a="http://schemas.openxmlformats.org/drawingml/2006/main"/>
-          <a:ln xmlns:a="http://schemas.openxmlformats.org/drawingml/2006/main" w="0">
-            <a:noFill/>
-          </a:ln>
-        </p:spPr>
-        <p:txBody>
-          <a:bodyPr xmlns:a="http://schemas.openxmlformats.org/drawingml/2006/main">
-            <a:normAutofit fontScale="100000"/>
-          </a:bodyPr>
-          <a:lstStyle xmlns:a="http://schemas.openxmlformats.org/drawingml/2006/main"/>
-          <a:p xmlns:a="http://schemas.openxmlformats.org/drawingml/2006/main">
-            <a:pPr algn="l">
-              <a:defRPr sz="1350" b="1">
-                <a:solidFill>
-                  <a:srgbClr val="17212B"/>
-                </a:solidFill>
-                <a:latin typeface="Aptos"/>
-                <a:ea typeface="Aptos"/>
-                <a:cs typeface="Aptos"/>
-              </a:defRPr>
-            </a:pPr>
-            <a:r>
-              <a:rPr sz="1350" b="1">
-                <a:solidFill>
-                  <a:srgbClr val="17212B"/>
-                </a:solidFill>
-                <a:latin typeface="Aptos"/>
-                <a:ea typeface="Aptos"/>
-                <a:cs typeface="Aptos"/>
-              </a:rPr>
-              <a:t>Rerun 14 answers that hit the length limit, using one fixed limit</a:t>
-            </a:r>
-          </a:p>
-        </p:txBody>
-      </p:sp>
-      <p:sp>
-        <p:nvSpPr>
-          <p:cNvPr id="22" name="">
-            <a:extLst xmlns:a="http://schemas.openxmlformats.org/drawingml/2006/main">
-              <a:ext uri="{FF2B5EF4-FFF2-40B4-BE49-F238E27FC236}">
-                <a16:creationId xmlns:a16="http://schemas.microsoft.com/office/drawing/2014/main" id="{BC5958B9-39EF-48EB-BFEE-D9C4120E35E0}"/>
-              </a:ext>
-            </a:extLst>
-          </p:cNvPr>
-          <p:cNvSpPr>
-            <a:spLocks xmlns:a="http://schemas.openxmlformats.org/drawingml/2006/main" noGrp="1"/>
-          </p:cNvSpPr>
-          <p:nvPr/>
-        </p:nvSpPr>
-        <p:spPr>
-          <a:xfrm xmlns:a="http://schemas.openxmlformats.org/drawingml/2006/main">
-            <a:off x="9144000" y="4086225"/>
-            <a:ext cx="2238375" cy="304800"/>
-          </a:xfrm>
-          <a:prstGeom xmlns:a="http://schemas.openxmlformats.org/drawingml/2006/main" prst="rect">
-            <a:avLst/>
-          </a:prstGeom>
-          <a:noFill xmlns:a="http://schemas.openxmlformats.org/drawingml/2006/main"/>
-          <a:ln xmlns:a="http://schemas.openxmlformats.org/drawingml/2006/main" w="0">
-            <a:noFill/>
-          </a:ln>
-        </p:spPr>
-        <p:txBody>
-          <a:bodyPr xmlns:a="http://schemas.openxmlformats.org/drawingml/2006/main">
-            <a:normAutofit fontScale="100000"/>
-          </a:bodyPr>
-          <a:lstStyle xmlns:a="http://schemas.openxmlformats.org/drawingml/2006/main"/>
-          <a:p xmlns:a="http://schemas.openxmlformats.org/drawingml/2006/main">
-            <a:pPr algn="r">
-              <a:defRPr sz="1200" b="1">
-                <a:solidFill>
-                  <a:srgbClr val="D3971E"/>
-                </a:solidFill>
-                <a:latin typeface="Aptos"/>
-                <a:ea typeface="Aptos"/>
-                <a:cs typeface="Aptos"/>
-              </a:defRPr>
-            </a:pPr>
-            <a:r>
-              <a:rPr sz="1200" b="1">
-                <a:solidFill>
-                  <a:srgbClr val="D3971E"/>
-                </a:solidFill>
-                <a:latin typeface="Aptos"/>
-                <a:ea typeface="Aptos"/>
-                <a:cs typeface="Aptos"/>
-              </a:rPr>
-              <a:t>targeted runs</a:t>
-            </a:r>
-          </a:p>
-        </p:txBody>
-      </p:sp>
-      <p:sp>
-        <p:nvSpPr>
-          <p:cNvPr id="23" name="">
-            <a:extLst xmlns:a="http://schemas.openxmlformats.org/drawingml/2006/main">
-              <a:ext uri="{FF2B5EF4-FFF2-40B4-BE49-F238E27FC236}">
-                <a16:creationId xmlns:a16="http://schemas.microsoft.com/office/drawing/2014/main" id="{7D865483-6BA9-43FD-A6E6-15043920C144}"/>
-              </a:ext>
-            </a:extLst>
-          </p:cNvPr>
-          <p:cNvSpPr>
-            <a:spLocks xmlns:a="http://schemas.openxmlformats.org/drawingml/2006/main" noGrp="1"/>
-          </p:cNvSpPr>
-          <p:nvPr/>
-        </p:nvSpPr>
-        <p:spPr>
-          <a:xfrm xmlns:a="http://schemas.openxmlformats.org/drawingml/2006/main">
-            <a:off x="1381125" y="4543425"/>
-            <a:ext cx="10001250" cy="0"/>
-          </a:xfrm>
-          <a:prstGeom xmlns:a="http://schemas.openxmlformats.org/drawingml/2006/main" prst="line">
-            <a:avLst/>
-          </a:prstGeom>
-          <a:noFill xmlns:a="http://schemas.openxmlformats.org/drawingml/2006/main"/>
-          <a:ln xmlns:a="http://schemas.openxmlformats.org/drawingml/2006/main" w="9525">
-            <a:solidFill>
-              <a:srgbClr val="D8D9D5"/>
-            </a:solidFill>
-            <a:prstDash val="solid"/>
-          </a:ln>
-        </p:spPr>
-      </p:sp>
-      <p:sp>
-        <p:nvSpPr>
-          <p:cNvPr id="24" name="">
-            <a:extLst xmlns:a="http://schemas.openxmlformats.org/drawingml/2006/main">
-              <a:ext uri="{FF2B5EF4-FFF2-40B4-BE49-F238E27FC236}">
-                <a16:creationId xmlns:a16="http://schemas.microsoft.com/office/drawing/2014/main" id="{F368C0EE-2491-4191-9D25-BC01DB66DDBC}"/>
-              </a:ext>
-            </a:extLst>
-          </p:cNvPr>
-          <p:cNvSpPr>
-            <a:spLocks xmlns:a="http://schemas.openxmlformats.org/drawingml/2006/main" noGrp="1"/>
-          </p:cNvSpPr>
-          <p:nvPr/>
-        </p:nvSpPr>
-        <p:spPr>
-          <a:xfrm xmlns:a="http://schemas.openxmlformats.org/drawingml/2006/main">
-            <a:off x="800100" y="4714875"/>
-            <a:ext cx="400050" cy="323850"/>
-          </a:xfrm>
-          <a:prstGeom xmlns:a="http://schemas.openxmlformats.org/drawingml/2006/main" prst="rect">
-            <a:avLst/>
-          </a:prstGeom>
-          <a:noFill xmlns:a="http://schemas.openxmlformats.org/drawingml/2006/main"/>
-          <a:ln xmlns:a="http://schemas.openxmlformats.org/drawingml/2006/main" w="0">
-            <a:noFill/>
-          </a:ln>
-        </p:spPr>
-        <p:txBody>
-          <a:bodyPr xmlns:a="http://schemas.openxmlformats.org/drawingml/2006/main">
-            <a:normAutofit fontScale="92424"/>
-          </a:bodyPr>
-          <a:lstStyle xmlns:a="http://schemas.openxmlformats.org/drawingml/2006/main"/>
-          <a:p xmlns:a="http://schemas.openxmlformats.org/drawingml/2006/main">
-            <a:pPr algn="ctr">
-              <a:defRPr sz="1650" b="1">
-                <a:solidFill>
-                  <a:srgbClr val="9AA2AA"/>
-                </a:solidFill>
-                <a:latin typeface="Aptos"/>
-                <a:ea typeface="Aptos"/>
-                <a:cs typeface="Aptos"/>
-              </a:defRPr>
-            </a:pPr>
-            <a:r>
-              <a:rPr sz="1650" b="1">
-                <a:solidFill>
-                  <a:srgbClr val="9AA2AA"/>
-                </a:solidFill>
-                <a:latin typeface="Aptos"/>
-                <a:ea typeface="Aptos"/>
-                <a:cs typeface="Aptos"/>
-              </a:rPr>
-              <a:t>6</a:t>
-            </a:r>
-          </a:p>
-        </p:txBody>
-      </p:sp>
-      <p:sp>
-        <p:nvSpPr>
-          <p:cNvPr id="25" name="">
-            <a:extLst xmlns:a="http://schemas.openxmlformats.org/drawingml/2006/main">
-              <a:ext uri="{FF2B5EF4-FFF2-40B4-BE49-F238E27FC236}">
-                <a16:creationId xmlns:a16="http://schemas.microsoft.com/office/drawing/2014/main" id="{CEB04B8C-4C84-488E-81FD-E8F6D61806EC}"/>
-              </a:ext>
-            </a:extLst>
-          </p:cNvPr>
-          <p:cNvSpPr>
-            <a:spLocks xmlns:a="http://schemas.openxmlformats.org/drawingml/2006/main" noGrp="1"/>
-          </p:cNvSpPr>
-          <p:nvPr/>
-        </p:nvSpPr>
-        <p:spPr>
-          <a:xfrm xmlns:a="http://schemas.openxmlformats.org/drawingml/2006/main">
-            <a:off x="1381125" y="4705350"/>
-            <a:ext cx="7477125" cy="323850"/>
-          </a:xfrm>
-          <a:prstGeom xmlns:a="http://schemas.openxmlformats.org/drawingml/2006/main" prst="rect">
-            <a:avLst/>
-          </a:prstGeom>
-          <a:noFill xmlns:a="http://schemas.openxmlformats.org/drawingml/2006/main"/>
-          <a:ln xmlns:a="http://schemas.openxmlformats.org/drawingml/2006/main" w="0">
-            <a:noFill/>
-          </a:ln>
-        </p:spPr>
-        <p:txBody>
-          <a:bodyPr xmlns:a="http://schemas.openxmlformats.org/drawingml/2006/main">
-            <a:normAutofit fontScale="100000"/>
-          </a:bodyPr>
-          <a:lstStyle xmlns:a="http://schemas.openxmlformats.org/drawingml/2006/main"/>
-          <a:p xmlns:a="http://schemas.openxmlformats.org/drawingml/2006/main">
-            <a:pPr algn="l">
-              <a:defRPr sz="1350" b="1">
-                <a:solidFill>
-                  <a:srgbClr val="17212B"/>
-                </a:solidFill>
-                <a:latin typeface="Aptos"/>
-                <a:ea typeface="Aptos"/>
-                <a:cs typeface="Aptos"/>
-              </a:defRPr>
-            </a:pPr>
-            <a:r>
-              <a:rPr sz="1350" b="1">
-                <a:solidFill>
-                  <a:srgbClr val="17212B"/>
-                </a:solidFill>
-                <a:latin typeface="Aptos"/>
-                <a:ea typeface="Aptos"/>
-                <a:cs typeface="Aptos"/>
-              </a:rPr>
-              <a:t>Complete 30 image and text results only if needed</a:t>
-            </a:r>
-          </a:p>
-        </p:txBody>
-      </p:sp>
-      <p:sp>
-        <p:nvSpPr>
-          <p:cNvPr id="26" name="">
-            <a:extLst xmlns:a="http://schemas.openxmlformats.org/drawingml/2006/main">
-              <a:ext uri="{FF2B5EF4-FFF2-40B4-BE49-F238E27FC236}">
-                <a16:creationId xmlns:a16="http://schemas.microsoft.com/office/drawing/2014/main" id="{2CB6A5AF-695D-4451-99AC-CDFD077DDC42}"/>
-              </a:ext>
-            </a:extLst>
-          </p:cNvPr>
-          <p:cNvSpPr>
-            <a:spLocks xmlns:a="http://schemas.openxmlformats.org/drawingml/2006/main" noGrp="1"/>
-          </p:cNvSpPr>
-          <p:nvPr/>
-        </p:nvSpPr>
-        <p:spPr>
-          <a:xfrm xmlns:a="http://schemas.openxmlformats.org/drawingml/2006/main">
-            <a:off x="9144000" y="4714875"/>
-            <a:ext cx="2238375" cy="304800"/>
-          </a:xfrm>
-          <a:prstGeom xmlns:a="http://schemas.openxmlformats.org/drawingml/2006/main" prst="rect">
-            <a:avLst/>
-          </a:prstGeom>
-          <a:noFill xmlns:a="http://schemas.openxmlformats.org/drawingml/2006/main"/>
-          <a:ln xmlns:a="http://schemas.openxmlformats.org/drawingml/2006/main" w="0">
-            <a:noFill/>
-          </a:ln>
-        </p:spPr>
-        <p:txBody>
-          <a:bodyPr xmlns:a="http://schemas.openxmlformats.org/drawingml/2006/main">
-            <a:normAutofit fontScale="100000"/>
-          </a:bodyPr>
-          <a:lstStyle xmlns:a="http://schemas.openxmlformats.org/drawingml/2006/main"/>
-          <a:p xmlns:a="http://schemas.openxmlformats.org/drawingml/2006/main">
-            <a:pPr algn="r">
-              <a:defRPr sz="1200" b="1">
-                <a:solidFill>
-                  <a:srgbClr val="9AA2AA"/>
-                </a:solidFill>
-                <a:latin typeface="Aptos"/>
-                <a:ea typeface="Aptos"/>
-                <a:cs typeface="Aptos"/>
-              </a:defRPr>
-            </a:pPr>
-            <a:r>
-              <a:rPr sz="1200" b="1">
-                <a:solidFill>
-                  <a:srgbClr val="9AA2AA"/>
-                </a:solidFill>
-                <a:latin typeface="Aptos"/>
-                <a:ea typeface="Aptos"/>
-                <a:cs typeface="Aptos"/>
-              </a:rPr>
-              <a:t>high cost</a:t>
-            </a:r>
-          </a:p>
-        </p:txBody>
-      </p:sp>
-      <p:sp>
-        <p:nvSpPr>
-          <p:cNvPr id="27" name="">
-            <a:extLst xmlns:a="http://schemas.openxmlformats.org/drawingml/2006/main">
-              <a:ext uri="{FF2B5EF4-FFF2-40B4-BE49-F238E27FC236}">
-                <a16:creationId xmlns:a16="http://schemas.microsoft.com/office/drawing/2014/main" id="{C900647B-6E41-43B4-B58D-3DF3702BFB3A}"/>
-              </a:ext>
-            </a:extLst>
-          </p:cNvPr>
-          <p:cNvSpPr>
-            <a:spLocks xmlns:a="http://schemas.openxmlformats.org/drawingml/2006/main" noGrp="1"/>
-          </p:cNvSpPr>
-          <p:nvPr/>
-        </p:nvSpPr>
-        <p:spPr>
-          <a:xfrm xmlns:a="http://schemas.openxmlformats.org/drawingml/2006/main">
-            <a:off x="1381125" y="5172075"/>
-            <a:ext cx="10001250" cy="0"/>
-          </a:xfrm>
-          <a:prstGeom xmlns:a="http://schemas.openxmlformats.org/drawingml/2006/main" prst="line">
-            <a:avLst/>
-          </a:prstGeom>
-          <a:noFill xmlns:a="http://schemas.openxmlformats.org/drawingml/2006/main"/>
-          <a:ln xmlns:a="http://schemas.openxmlformats.org/drawingml/2006/main" w="9525">
-            <a:solidFill>
-              <a:srgbClr val="D8D9D5"/>
-            </a:solidFill>
-            <a:prstDash val="solid"/>
-          </a:ln>
-        </p:spPr>
-      </p:sp>
-      <p:sp>
-        <p:nvSpPr>
-          <p:cNvPr id="28" name="">
-            <a:extLst xmlns:a="http://schemas.openxmlformats.org/drawingml/2006/main">
-              <a:ext uri="{FF2B5EF4-FFF2-40B4-BE49-F238E27FC236}">
-                <a16:creationId xmlns:a16="http://schemas.microsoft.com/office/drawing/2014/main" id="{60D0D1F9-45A3-4F55-83EE-C20E318422A8}"/>
-              </a:ext>
-            </a:extLst>
-          </p:cNvPr>
-          <p:cNvSpPr>
-            <a:spLocks xmlns:a="http://schemas.openxmlformats.org/drawingml/2006/main" noGrp="1"/>
-          </p:cNvSpPr>
-          <p:nvPr/>
-        </p:nvSpPr>
-        <p:spPr>
-          <a:xfrm xmlns:a="http://schemas.openxmlformats.org/drawingml/2006/main">
-            <a:off x="800100" y="5343525"/>
-            <a:ext cx="400050" cy="323850"/>
-          </a:xfrm>
-          <a:prstGeom xmlns:a="http://schemas.openxmlformats.org/drawingml/2006/main" prst="rect">
-            <a:avLst/>
-          </a:prstGeom>
-          <a:noFill xmlns:a="http://schemas.openxmlformats.org/drawingml/2006/main"/>
-          <a:ln xmlns:a="http://schemas.openxmlformats.org/drawingml/2006/main" w="0">
-            <a:noFill/>
-          </a:ln>
-        </p:spPr>
-        <p:txBody>
-          <a:bodyPr xmlns:a="http://schemas.openxmlformats.org/drawingml/2006/main">
-            <a:normAutofit fontScale="92424"/>
-          </a:bodyPr>
-          <a:lstStyle xmlns:a="http://schemas.openxmlformats.org/drawingml/2006/main"/>
-          <a:p xmlns:a="http://schemas.openxmlformats.org/drawingml/2006/main">
-            <a:pPr algn="ctr">
-              <a:defRPr sz="1650" b="1">
-                <a:solidFill>
-                  <a:srgbClr val="D65A00"/>
-                </a:solidFill>
-                <a:latin typeface="Aptos"/>
-                <a:ea typeface="Aptos"/>
-                <a:cs typeface="Aptos"/>
-              </a:defRPr>
-            </a:pPr>
-            <a:r>
-              <a:rPr sz="1650" b="1">
-                <a:solidFill>
-                  <a:srgbClr val="D65A00"/>
-                </a:solidFill>
-                <a:latin typeface="Aptos"/>
-                <a:ea typeface="Aptos"/>
-                <a:cs typeface="Aptos"/>
-              </a:rPr>
-              <a:t>7</a:t>
-            </a:r>
-          </a:p>
-        </p:txBody>
-      </p:sp>
-      <p:sp>
-        <p:nvSpPr>
-          <p:cNvPr id="29" name="">
-            <a:extLst xmlns:a="http://schemas.openxmlformats.org/drawingml/2006/main">
-              <a:ext uri="{FF2B5EF4-FFF2-40B4-BE49-F238E27FC236}">
-                <a16:creationId xmlns:a16="http://schemas.microsoft.com/office/drawing/2014/main" id="{A1CD2585-EF51-4EF2-9FC6-D95ACC9BED78}"/>
-              </a:ext>
-            </a:extLst>
-          </p:cNvPr>
-          <p:cNvSpPr>
-            <a:spLocks xmlns:a="http://schemas.openxmlformats.org/drawingml/2006/main" noGrp="1"/>
-          </p:cNvSpPr>
-          <p:nvPr/>
-        </p:nvSpPr>
-        <p:spPr>
-          <a:xfrm xmlns:a="http://schemas.openxmlformats.org/drawingml/2006/main">
-            <a:off x="1381125" y="5334000"/>
-            <a:ext cx="7477125" cy="323850"/>
-          </a:xfrm>
-          <a:prstGeom xmlns:a="http://schemas.openxmlformats.org/drawingml/2006/main" prst="rect">
-            <a:avLst/>
-          </a:prstGeom>
-          <a:noFill xmlns:a="http://schemas.openxmlformats.org/drawingml/2006/main"/>
-          <a:ln xmlns:a="http://schemas.openxmlformats.org/drawingml/2006/main" w="0">
-            <a:noFill/>
-          </a:ln>
-        </p:spPr>
-        <p:txBody>
-          <a:bodyPr xmlns:a="http://schemas.openxmlformats.org/drawingml/2006/main">
-            <a:normAutofit fontScale="100000"/>
-          </a:bodyPr>
-          <a:lstStyle xmlns:a="http://schemas.openxmlformats.org/drawingml/2006/main"/>
-          <a:p xmlns:a="http://schemas.openxmlformats.org/drawingml/2006/main">
-            <a:pPr algn="l">
-              <a:defRPr sz="1350" b="1">
-                <a:solidFill>
-                  <a:srgbClr val="17212B"/>
-                </a:solidFill>
-                <a:latin typeface="Aptos"/>
-                <a:ea typeface="Aptos"/>
-                <a:cs typeface="Aptos"/>
-              </a:defRPr>
-            </a:pPr>
-            <a:r>
-              <a:rPr sz="1350" b="1">
-                <a:solidFill>
-                  <a:srgbClr val="17212B"/>
-                </a:solidFill>
-                <a:latin typeface="Aptos"/>
-                <a:ea typeface="Aptos"/>
-                <a:cs typeface="Aptos"/>
-              </a:rPr>
-              <a:t>Repeat Kaleido and UniMoral paper conditions only if we plan a replication claim</a:t>
-            </a:r>
-          </a:p>
-        </p:txBody>
-      </p:sp>
-      <p:sp>
-        <p:nvSpPr>
-          <p:cNvPr id="30" name="">
-            <a:extLst xmlns:a="http://schemas.openxmlformats.org/drawingml/2006/main">
-              <a:ext uri="{FF2B5EF4-FFF2-40B4-BE49-F238E27FC236}">
-                <a16:creationId xmlns:a16="http://schemas.microsoft.com/office/drawing/2014/main" id="{27F9EF30-8F1B-4962-8BE6-05420978773B}"/>
-              </a:ext>
-            </a:extLst>
-          </p:cNvPr>
-          <p:cNvSpPr>
-            <a:spLocks xmlns:a="http://schemas.openxmlformats.org/drawingml/2006/main" noGrp="1"/>
-          </p:cNvSpPr>
-          <p:nvPr/>
-        </p:nvSpPr>
-        <p:spPr>
-          <a:xfrm xmlns:a="http://schemas.openxmlformats.org/drawingml/2006/main">
-            <a:off x="9144000" y="5343525"/>
-            <a:ext cx="2238375" cy="304800"/>
-          </a:xfrm>
-          <a:prstGeom xmlns:a="http://schemas.openxmlformats.org/drawingml/2006/main" prst="rect">
-            <a:avLst/>
-          </a:prstGeom>
-          <a:noFill xmlns:a="http://schemas.openxmlformats.org/drawingml/2006/main"/>
-          <a:ln xmlns:a="http://schemas.openxmlformats.org/drawingml/2006/main" w="0">
-            <a:noFill/>
-          </a:ln>
-        </p:spPr>
-        <p:txBody>
-          <a:bodyPr xmlns:a="http://schemas.openxmlformats.org/drawingml/2006/main">
-            <a:normAutofit fontScale="100000"/>
-          </a:bodyPr>
-          <a:lstStyle xmlns:a="http://schemas.openxmlformats.org/drawingml/2006/main"/>
-          <a:p xmlns:a="http://schemas.openxmlformats.org/drawingml/2006/main">
-            <a:pPr algn="r">
-              <a:defRPr sz="1200" b="1">
-                <a:solidFill>
-                  <a:srgbClr val="D65A00"/>
-                </a:solidFill>
-                <a:latin typeface="Aptos"/>
-                <a:ea typeface="Aptos"/>
-                <a:cs typeface="Aptos"/>
-              </a:defRPr>
-            </a:pPr>
-            <a:r>
-              <a:rPr sz="1200" b="1">
-                <a:solidFill>
-                  <a:srgbClr val="D65A00"/>
-                </a:solidFill>
-                <a:latin typeface="Aptos"/>
-                <a:ea typeface="Aptos"/>
-                <a:cs typeface="Aptos"/>
-              </a:rPr>
-              <a:t>model access + scoring</a:t>
-            </a:r>
-          </a:p>
-        </p:txBody>
-      </p:sp>
-      <p:sp>
-        <p:nvSpPr>
-          <p:cNvPr id="31" name="">
-            <a:extLst xmlns:a="http://schemas.openxmlformats.org/drawingml/2006/main">
-              <a:ext uri="{FF2B5EF4-FFF2-40B4-BE49-F238E27FC236}">
-                <a16:creationId xmlns:a16="http://schemas.microsoft.com/office/drawing/2014/main" id="{0FA7360A-D9C7-47A1-878D-439207667D1F}"/>
-              </a:ext>
-            </a:extLst>
-          </p:cNvPr>
-          <p:cNvSpPr>
-            <a:spLocks xmlns:a="http://schemas.openxmlformats.org/drawingml/2006/main" noGrp="1"/>
-          </p:cNvSpPr>
-          <p:nvPr/>
-        </p:nvSpPr>
-        <p:spPr>
-          <a:xfrm xmlns:a="http://schemas.openxmlformats.org/drawingml/2006/main">
-            <a:off x="1381125" y="6153150"/>
-            <a:ext cx="10001250" cy="285750"/>
-          </a:xfrm>
-          <a:prstGeom xmlns:a="http://schemas.openxmlformats.org/drawingml/2006/main" prst="rect">
-            <a:avLst/>
-          </a:prstGeom>
-          <a:noFill xmlns:a="http://schemas.openxmlformats.org/drawingml/2006/main"/>
-          <a:ln xmlns:a="http://schemas.openxmlformats.org/drawingml/2006/main" w="0">
-            <a:noFill/>
-          </a:ln>
-        </p:spPr>
-        <p:txBody>
-          <a:bodyPr xmlns:a="http://schemas.openxmlformats.org/drawingml/2006/main">
-            <a:normAutofit fontScale="94444"/>
-          </a:bodyPr>
-          <a:lstStyle xmlns:a="http://schemas.openxmlformats.org/drawingml/2006/main"/>
-          <a:p xmlns:a="http://schemas.openxmlformats.org/drawingml/2006/main">
-            <a:pPr algn="l">
-              <a:defRPr sz="1350" b="1">
-                <a:solidFill>
-                  <a:srgbClr val="CF5D4A"/>
-                </a:solidFill>
-                <a:latin typeface="Aptos"/>
-                <a:ea typeface="Aptos"/>
-                <a:cs typeface="Aptos"/>
-              </a:defRPr>
-            </a:pPr>
-            <a:r>
-              <a:rPr sz="1350" b="1">
-                <a:solidFill>
-                  <a:srgbClr val="CF5D4A"/>
-                </a:solidFill>
-                <a:latin typeface="Aptos"/>
-                <a:ea typeface="Aptos"/>
-                <a:cs typeface="Aptos"/>
-              </a:rPr>
-              <a:t>Run paid models only after these checks.</a:t>
+              <a:t>Accuracy and text match stay separate. These ranges are not direct tests between two models.</a:t>
             </a:r>
           </a:p>
         </p:txBody>
@@ -18615,7 +17254,7 @@
     </p:spTree>
     <p:extLst>
       <p:ext uri="{BB962C8B-B14F-4D97-AF65-F5344CB8AC3E}">
-        <p14:creationId xmlns:p14="http://schemas.microsoft.com/office/powerpoint/2010/main" val="1451943202"/>
+        <p14:creationId xmlns:p14="http://schemas.microsoft.com/office/powerpoint/2010/main" val="1675302353"/>
       </p:ext>
     </p:extLst>
   </p:cSld>
@@ -18646,7 +17285,7 @@
           <p:cNvPr id="6" name="slide-title">
             <a:extLst xmlns:a="http://schemas.openxmlformats.org/drawingml/2006/main">
               <a:ext uri="{FF2B5EF4-FFF2-40B4-BE49-F238E27FC236}">
-                <a16:creationId xmlns:a16="http://schemas.microsoft.com/office/drawing/2014/main" id="{EF4943CF-8D09-4CF5-AF84-5FAFD90BE025}"/>
+                <a16:creationId xmlns:a16="http://schemas.microsoft.com/office/drawing/2014/main" id="{1B3E31DD-0446-4102-979A-AB32410508C9}"/>
               </a:ext>
             </a:extLst>
           </p:cNvPr>
@@ -18693,7 +17332,7 @@
                 <a:ea typeface="Aptos"/>
                 <a:cs typeface="Aptos"/>
               </a:rPr>
-              <a:t>UniMoral: different models have the highest saved score</a:t>
+              <a:t>UniMoral factor size: Gemma rises; Qwen and Llama reverse</a:t>
             </a:r>
           </a:p>
         </p:txBody>
@@ -18703,7 +17342,7 @@
           <p:cNvPr id="2" name="slide-subtitle">
             <a:extLst xmlns:a="http://schemas.openxmlformats.org/drawingml/2006/main">
               <a:ext uri="{FF2B5EF4-FFF2-40B4-BE49-F238E27FC236}">
-                <a16:creationId xmlns:a16="http://schemas.microsoft.com/office/drawing/2014/main" id="{58844CF6-F231-4F93-BBEF-8470FB872302}"/>
+                <a16:creationId xmlns:a16="http://schemas.microsoft.com/office/drawing/2014/main" id="{F183C15A-DED4-406C-947E-D3C2253B56CB}"/>
               </a:ext>
             </a:extLst>
           </p:cNvPr>
@@ -18750,7 +17389,7 @@
                 <a:ea typeface="Aptos"/>
                 <a:cs typeface="Aptos"/>
               </a:rPr>
-              <a:t>CEI local result. x = model; y = task score; dot = score; line = saved 95% range.</a:t>
+              <a:t>Exploratory CEI result. x = published size category, ordered only; y = factor accuracy; labels = model + B.</a:t>
             </a:r>
           </a:p>
         </p:txBody>
@@ -18760,7 +17399,7 @@
           <p:cNvPr id="3" name="">
             <a:extLst xmlns:a="http://schemas.openxmlformats.org/drawingml/2006/main">
               <a:ext uri="{FF2B5EF4-FFF2-40B4-BE49-F238E27FC236}">
-                <a16:creationId xmlns:a16="http://schemas.microsoft.com/office/drawing/2014/main" id="{EBFAF739-B277-4636-B398-C79FDEE05113}"/>
+                <a16:creationId xmlns:a16="http://schemas.microsoft.com/office/drawing/2014/main" id="{0BBD8908-C0E5-4ABC-8C3B-69A8E290EFDF}"/>
               </a:ext>
             </a:extLst>
           </p:cNvPr>
@@ -18795,13 +17434,13 @@
           <p:nvPr/>
         </p:nvPicPr>
         <p:blipFill>
-          <a:blip xmlns:r="http://schemas.openxmlformats.org/officeDocument/2006/relationships" xmlns:a="http://schemas.openxmlformats.org/drawingml/2006/main" r:embed="R9be9c74acc4448a8"/>
+          <a:blip xmlns:r="http://schemas.openxmlformats.org/officeDocument/2006/relationships" xmlns:a="http://schemas.openxmlformats.org/drawingml/2006/main" r:embed="R089f88e0b1804bac"/>
           <a:stretch xmlns:a="http://schemas.openxmlformats.org/drawingml/2006/main"/>
         </p:blipFill>
         <p:spPr>
           <a:xfrm xmlns:a="http://schemas.openxmlformats.org/drawingml/2006/main">
-            <a:off x="685800" y="2586384"/>
-            <a:ext cx="10820400" cy="2532957"/>
+            <a:off x="685800" y="1959293"/>
+            <a:ext cx="10820400" cy="3787140"/>
           </a:xfrm>
           <a:prstGeom xmlns:a="http://schemas.openxmlformats.org/drawingml/2006/main" prst="rect">
             <a:avLst/>
@@ -18813,7 +17452,7 @@
           <p:cNvPr id="5" name="">
             <a:extLst xmlns:a="http://schemas.openxmlformats.org/drawingml/2006/main">
               <a:ext uri="{FF2B5EF4-FFF2-40B4-BE49-F238E27FC236}">
-                <a16:creationId xmlns:a16="http://schemas.microsoft.com/office/drawing/2014/main" id="{D6B994F2-0E73-4620-83B6-23F7ECE2BC72}"/>
+                <a16:creationId xmlns:a16="http://schemas.microsoft.com/office/drawing/2014/main" id="{68BCCBB6-2687-43DE-8E1C-9D3ECFE3E8AD}"/>
               </a:ext>
             </a:extLst>
           </p:cNvPr>
@@ -18860,7 +17499,7 @@
                 <a:ea typeface="Aptos"/>
                 <a:cs typeface="Aptos"/>
               </a:rPr>
-              <a:t>Accuracy and text match stay separate. These ranges are not direct tests between two models.</a:t>
+              <a:t>Size is not isolated from training differences. The available files have no saved uncertainty ranges or raw run archive.</a:t>
             </a:r>
           </a:p>
         </p:txBody>
@@ -18868,7 +17507,7 @@
     </p:spTree>
     <p:extLst>
       <p:ext uri="{BB962C8B-B14F-4D97-AF65-F5344CB8AC3E}">
-        <p14:creationId xmlns:p14="http://schemas.microsoft.com/office/powerpoint/2010/main" val="1312544695"/>
+        <p14:creationId xmlns:p14="http://schemas.microsoft.com/office/powerpoint/2010/main" val="22694674"/>
       </p:ext>
     </p:extLst>
   </p:cSld>
@@ -18899,7 +17538,7 @@
           <p:cNvPr id="6" name="slide-title">
             <a:extLst xmlns:a="http://schemas.openxmlformats.org/drawingml/2006/main">
               <a:ext uri="{FF2B5EF4-FFF2-40B4-BE49-F238E27FC236}">
-                <a16:creationId xmlns:a16="http://schemas.microsoft.com/office/drawing/2014/main" id="{305F7448-1652-4D31-B839-A0BEAFC5910F}"/>
+                <a16:creationId xmlns:a16="http://schemas.microsoft.com/office/drawing/2014/main" id="{1B1524CE-C184-48F2-A316-2B57C7253E4A}"/>
               </a:ext>
             </a:extLst>
           </p:cNvPr>
@@ -18946,7 +17585,7 @@
                 <a:ea typeface="Aptos"/>
                 <a:cs typeface="Aptos"/>
               </a:rPr>
-              <a:t>UniMoral factor size: Gemma rises; Qwen and Llama reverse</a:t>
+              <a:t>ValuePrism valence size: Llama falls, then rises</a:t>
             </a:r>
           </a:p>
         </p:txBody>
@@ -18956,7 +17595,7 @@
           <p:cNvPr id="2" name="slide-subtitle">
             <a:extLst xmlns:a="http://schemas.openxmlformats.org/drawingml/2006/main">
               <a:ext uri="{FF2B5EF4-FFF2-40B4-BE49-F238E27FC236}">
-                <a16:creationId xmlns:a16="http://schemas.microsoft.com/office/drawing/2014/main" id="{E8CC019D-88C3-4BAD-A9A4-FF214D5B3A53}"/>
+                <a16:creationId xmlns:a16="http://schemas.microsoft.com/office/drawing/2014/main" id="{AB99C342-BD4E-46F4-839A-C1D593283752}"/>
               </a:ext>
             </a:extLst>
           </p:cNvPr>
@@ -19003,7 +17642,7 @@
                 <a:ea typeface="Aptos"/>
                 <a:cs typeface="Aptos"/>
               </a:rPr>
-              <a:t>Exploratory CEI result. x = published size category, ordered only; y = factor accuracy; labels = model + B.</a:t>
+              <a:t>Exploratory CEI result. x = published size category, ordered only; y = valence accuracy; labels = model + B.</a:t>
             </a:r>
           </a:p>
         </p:txBody>
@@ -19013,7 +17652,7 @@
           <p:cNvPr id="3" name="">
             <a:extLst xmlns:a="http://schemas.openxmlformats.org/drawingml/2006/main">
               <a:ext uri="{FF2B5EF4-FFF2-40B4-BE49-F238E27FC236}">
-                <a16:creationId xmlns:a16="http://schemas.microsoft.com/office/drawing/2014/main" id="{0DAEA75F-D52B-405C-857C-F6B6ADE884B7}"/>
+                <a16:creationId xmlns:a16="http://schemas.microsoft.com/office/drawing/2014/main" id="{5EC1B513-4734-401D-9AEF-1809C78FAA7D}"/>
               </a:ext>
             </a:extLst>
           </p:cNvPr>
@@ -19048,7 +17687,7 @@
           <p:nvPr/>
         </p:nvPicPr>
         <p:blipFill>
-          <a:blip xmlns:r="http://schemas.openxmlformats.org/officeDocument/2006/relationships" xmlns:a="http://schemas.openxmlformats.org/drawingml/2006/main" r:embed="Rab02adc8e317451c"/>
+          <a:blip xmlns:r="http://schemas.openxmlformats.org/officeDocument/2006/relationships" xmlns:a="http://schemas.openxmlformats.org/drawingml/2006/main" r:embed="Raa853932ea0e4bc1"/>
           <a:stretch xmlns:a="http://schemas.openxmlformats.org/drawingml/2006/main"/>
         </p:blipFill>
         <p:spPr>
@@ -19066,7 +17705,7 @@
           <p:cNvPr id="5" name="">
             <a:extLst xmlns:a="http://schemas.openxmlformats.org/drawingml/2006/main">
               <a:ext uri="{FF2B5EF4-FFF2-40B4-BE49-F238E27FC236}">
-                <a16:creationId xmlns:a16="http://schemas.microsoft.com/office/drawing/2014/main" id="{51DF58D0-E038-4146-B1F8-0E5A3079DA58}"/>
+                <a16:creationId xmlns:a16="http://schemas.microsoft.com/office/drawing/2014/main" id="{FF77876B-7D1E-4FD0-8B6E-A26B8A601685}"/>
               </a:ext>
             </a:extLst>
           </p:cNvPr>
@@ -19113,7 +17752,7 @@
                 <a:ea typeface="Aptos"/>
                 <a:cs typeface="Aptos"/>
               </a:rPr>
-              <a:t>Size is not isolated from training differences. The available files have no saved uncertainty ranges or raw run archive.</a:t>
+              <a:t>Only Llama has all three sizes. CEI ValuePrism is not the paper's Kaleido test. The available files have no saved uncertainty ranges or raw run archive.</a:t>
             </a:r>
           </a:p>
         </p:txBody>
@@ -19121,7 +17760,7 @@
     </p:spTree>
     <p:extLst>
       <p:ext uri="{BB962C8B-B14F-4D97-AF65-F5344CB8AC3E}">
-        <p14:creationId xmlns:p14="http://schemas.microsoft.com/office/powerpoint/2010/main" val="472492808"/>
+        <p14:creationId xmlns:p14="http://schemas.microsoft.com/office/powerpoint/2010/main" val="1561538174"/>
       </p:ext>
     </p:extLst>
   </p:cSld>
@@ -19156,7 +17795,7 @@
           <p:nvPr/>
         </p:nvPicPr>
         <p:blipFill>
-          <a:blip xmlns:r="http://schemas.openxmlformats.org/officeDocument/2006/relationships" xmlns:a="http://schemas.openxmlformats.org/drawingml/2006/main" r:embed="Rf9ddcbd1e3ad4483"/>
+          <a:blip xmlns:r="http://schemas.openxmlformats.org/officeDocument/2006/relationships" xmlns:a="http://schemas.openxmlformats.org/drawingml/2006/main" r:embed="R902cb31e1c7c41a1"/>
           <a:stretch xmlns:a="http://schemas.openxmlformats.org/drawingml/2006/main"/>
         </p:blipFill>
         <p:spPr>
@@ -19172,7 +17811,7 @@
     </p:spTree>
     <p:extLst>
       <p:ext uri="{BB962C8B-B14F-4D97-AF65-F5344CB8AC3E}">
-        <p14:creationId xmlns:p14="http://schemas.microsoft.com/office/powerpoint/2010/main" val="31265258"/>
+        <p14:creationId xmlns:p14="http://schemas.microsoft.com/office/powerpoint/2010/main" val="362451049"/>
       </p:ext>
     </p:extLst>
   </p:cSld>
@@ -19203,7 +17842,7 @@
           <p:cNvPr id="6" name="slide-title">
             <a:extLst xmlns:a="http://schemas.openxmlformats.org/drawingml/2006/main">
               <a:ext uri="{FF2B5EF4-FFF2-40B4-BE49-F238E27FC236}">
-                <a16:creationId xmlns:a16="http://schemas.microsoft.com/office/drawing/2014/main" id="{ADAD5201-2CEE-4574-8261-72F49DDAD974}"/>
+                <a16:creationId xmlns:a16="http://schemas.microsoft.com/office/drawing/2014/main" id="{8AA5E715-2EA4-4232-A4A9-B3345ACC27FA}"/>
               </a:ext>
             </a:extLst>
           </p:cNvPr>
@@ -19250,7 +17889,7 @@
                 <a:ea typeface="Aptos"/>
                 <a:cs typeface="Aptos"/>
               </a:rPr>
-              <a:t>ValuePrism valence size: Llama falls, then rises</a:t>
+              <a:t>UniMoral factor releases: DeepSeek falls .038; Qwen changes .002</a:t>
             </a:r>
           </a:p>
         </p:txBody>
@@ -19260,7 +17899,7 @@
           <p:cNvPr id="2" name="slide-subtitle">
             <a:extLst xmlns:a="http://schemas.openxmlformats.org/drawingml/2006/main">
               <a:ext uri="{FF2B5EF4-FFF2-40B4-BE49-F238E27FC236}">
-                <a16:creationId xmlns:a16="http://schemas.microsoft.com/office/drawing/2014/main" id="{F44C16C8-2FE3-4C56-9E79-E7B737F5A772}"/>
+                <a16:creationId xmlns:a16="http://schemas.microsoft.com/office/drawing/2014/main" id="{D80545E1-1529-44F3-9D85-6370B653DD3E}"/>
               </a:ext>
             </a:extLst>
           </p:cNvPr>
@@ -19307,7 +17946,7 @@
                 <a:ea typeface="Aptos"/>
                 <a:cs typeface="Aptos"/>
               </a:rPr>
-              <a:t>Exploratory CEI result. x = published size category, ordered only; y = valence accuracy; labels = model + B.</a:t>
+              <a:t>Exploratory CEI result. x = model release quarter; y = factor accuracy; labels = model + B.</a:t>
             </a:r>
           </a:p>
         </p:txBody>
@@ -19317,7 +17956,7 @@
           <p:cNvPr id="3" name="">
             <a:extLst xmlns:a="http://schemas.openxmlformats.org/drawingml/2006/main">
               <a:ext uri="{FF2B5EF4-FFF2-40B4-BE49-F238E27FC236}">
-                <a16:creationId xmlns:a16="http://schemas.microsoft.com/office/drawing/2014/main" id="{9B4EE173-75A1-4745-8E03-425CBF46F196}"/>
+                <a16:creationId xmlns:a16="http://schemas.microsoft.com/office/drawing/2014/main" id="{C33CD43A-C40D-4BE2-B926-D1CEBBBD654E}"/>
               </a:ext>
             </a:extLst>
           </p:cNvPr>
@@ -19352,7 +17991,7 @@
           <p:nvPr/>
         </p:nvPicPr>
         <p:blipFill>
-          <a:blip xmlns:r="http://schemas.openxmlformats.org/officeDocument/2006/relationships" xmlns:a="http://schemas.openxmlformats.org/drawingml/2006/main" r:embed="R91ffd4da90e6485d"/>
+          <a:blip xmlns:r="http://schemas.openxmlformats.org/officeDocument/2006/relationships" xmlns:a="http://schemas.openxmlformats.org/drawingml/2006/main" r:embed="Rdbe374333ba04e38"/>
           <a:stretch xmlns:a="http://schemas.openxmlformats.org/drawingml/2006/main"/>
         </p:blipFill>
         <p:spPr>
@@ -19370,7 +18009,7 @@
           <p:cNvPr id="5" name="">
             <a:extLst xmlns:a="http://schemas.openxmlformats.org/drawingml/2006/main">
               <a:ext uri="{FF2B5EF4-FFF2-40B4-BE49-F238E27FC236}">
-                <a16:creationId xmlns:a16="http://schemas.microsoft.com/office/drawing/2014/main" id="{CE7BB21D-BB4E-4B6C-AFCD-3E96878B0D14}"/>
+                <a16:creationId xmlns:a16="http://schemas.microsoft.com/office/drawing/2014/main" id="{A93CF7C3-FF2B-4064-9A84-3A725A17CC08}"/>
               </a:ext>
             </a:extLst>
           </p:cNvPr>
@@ -19417,7 +18056,7 @@
                 <a:ea typeface="Aptos"/>
                 <a:cs typeface="Aptos"/>
               </a:rPr>
-              <a:t>Only Llama has all three sizes. CEI ValuePrism is not the paper's Kaleido test. The available files have no saved uncertainty ranges or raw run archive.</a:t>
+              <a:t>Release quarter is model metadata, not test time. It does not explain the change. All scores were tested in May 2026; no saved uncertainty ranges.</a:t>
             </a:r>
           </a:p>
         </p:txBody>
@@ -19425,7 +18064,7 @@
     </p:spTree>
     <p:extLst>
       <p:ext uri="{BB962C8B-B14F-4D97-AF65-F5344CB8AC3E}">
-        <p14:creationId xmlns:p14="http://schemas.microsoft.com/office/powerpoint/2010/main" val="1006101203"/>
+        <p14:creationId xmlns:p14="http://schemas.microsoft.com/office/powerpoint/2010/main" val="1297314081"/>
       </p:ext>
     </p:extLst>
   </p:cSld>
@@ -19456,7 +18095,7 @@
           <p:cNvPr id="6" name="slide-title">
             <a:extLst xmlns:a="http://schemas.openxmlformats.org/drawingml/2006/main">
               <a:ext uri="{FF2B5EF4-FFF2-40B4-BE49-F238E27FC236}">
-                <a16:creationId xmlns:a16="http://schemas.microsoft.com/office/drawing/2014/main" id="{5F9F5BCF-7F24-415D-A367-735440A66AC6}"/>
+                <a16:creationId xmlns:a16="http://schemas.microsoft.com/office/drawing/2014/main" id="{CAE7C96A-446B-479C-BB90-7C5071D6366F}"/>
               </a:ext>
             </a:extLst>
           </p:cNvPr>
@@ -19503,7 +18142,7 @@
                 <a:ea typeface="Aptos"/>
                 <a:cs typeface="Aptos"/>
               </a:rPr>
-              <a:t>UniMoral factor releases: DeepSeek falls .038; Qwen changes .002</a:t>
+              <a:t>ValuePrism valence releases: Qwen +.187; DeepSeek -.062</a:t>
             </a:r>
           </a:p>
         </p:txBody>
@@ -19513,7 +18152,7 @@
           <p:cNvPr id="2" name="slide-subtitle">
             <a:extLst xmlns:a="http://schemas.openxmlformats.org/drawingml/2006/main">
               <a:ext uri="{FF2B5EF4-FFF2-40B4-BE49-F238E27FC236}">
-                <a16:creationId xmlns:a16="http://schemas.microsoft.com/office/drawing/2014/main" id="{A5F2C8CA-81A6-496D-86B8-3D80F7C56802}"/>
+                <a16:creationId xmlns:a16="http://schemas.microsoft.com/office/drawing/2014/main" id="{BF64B96B-194D-4D70-8E63-2837ECA6B60B}"/>
               </a:ext>
             </a:extLst>
           </p:cNvPr>
@@ -19560,7 +18199,7 @@
                 <a:ea typeface="Aptos"/>
                 <a:cs typeface="Aptos"/>
               </a:rPr>
-              <a:t>Exploratory CEI result. x = model release quarter; y = factor accuracy; labels = model + B.</a:t>
+              <a:t>Exploratory CEI result. x = model release quarter; y = valence accuracy; labels = model + B.</a:t>
             </a:r>
           </a:p>
         </p:txBody>
@@ -19570,7 +18209,7 @@
           <p:cNvPr id="3" name="">
             <a:extLst xmlns:a="http://schemas.openxmlformats.org/drawingml/2006/main">
               <a:ext uri="{FF2B5EF4-FFF2-40B4-BE49-F238E27FC236}">
-                <a16:creationId xmlns:a16="http://schemas.microsoft.com/office/drawing/2014/main" id="{3D552E4B-75CA-46DD-8841-40C6EE340763}"/>
+                <a16:creationId xmlns:a16="http://schemas.microsoft.com/office/drawing/2014/main" id="{7BB21FB0-41D0-44BA-A2C2-26DE2AC0363C}"/>
               </a:ext>
             </a:extLst>
           </p:cNvPr>
@@ -19605,7 +18244,7 @@
           <p:nvPr/>
         </p:nvPicPr>
         <p:blipFill>
-          <a:blip xmlns:r="http://schemas.openxmlformats.org/officeDocument/2006/relationships" xmlns:a="http://schemas.openxmlformats.org/drawingml/2006/main" r:embed="Rd1338914848d4250"/>
+          <a:blip xmlns:r="http://schemas.openxmlformats.org/officeDocument/2006/relationships" xmlns:a="http://schemas.openxmlformats.org/drawingml/2006/main" r:embed="R80be8eaf4be64a53"/>
           <a:stretch xmlns:a="http://schemas.openxmlformats.org/drawingml/2006/main"/>
         </p:blipFill>
         <p:spPr>
@@ -19623,7 +18262,7 @@
           <p:cNvPr id="5" name="">
             <a:extLst xmlns:a="http://schemas.openxmlformats.org/drawingml/2006/main">
               <a:ext uri="{FF2B5EF4-FFF2-40B4-BE49-F238E27FC236}">
-                <a16:creationId xmlns:a16="http://schemas.microsoft.com/office/drawing/2014/main" id="{293AD50A-CD48-42A6-9ED5-B6FD36E1D2FC}"/>
+                <a16:creationId xmlns:a16="http://schemas.microsoft.com/office/drawing/2014/main" id="{63E20149-D598-412C-A7F4-A3F3467A47CF}"/>
               </a:ext>
             </a:extLst>
           </p:cNvPr>
@@ -19670,7 +18309,7 @@
                 <a:ea typeface="Aptos"/>
                 <a:cs typeface="Aptos"/>
               </a:rPr>
-              <a:t>Release quarter is model metadata, not test time. It does not explain the change. All scores were tested in May 2026; no saved uncertainty ranges.</a:t>
+              <a:t>Release quarter is model metadata, not test time. CEI ValuePrism is not the paper's Kaleido test. The available files have no saved uncertainty ranges or raw run archive.</a:t>
             </a:r>
           </a:p>
         </p:txBody>
@@ -19678,7 +18317,7 @@
     </p:spTree>
     <p:extLst>
       <p:ext uri="{BB962C8B-B14F-4D97-AF65-F5344CB8AC3E}">
-        <p14:creationId xmlns:p14="http://schemas.microsoft.com/office/powerpoint/2010/main" val="684845597"/>
+        <p14:creationId xmlns:p14="http://schemas.microsoft.com/office/powerpoint/2010/main" val="960444754"/>
       </p:ext>
     </p:extLst>
   </p:cSld>
@@ -19706,10 +18345,10 @@
       </p:grpSpPr>
       <p:sp>
         <p:nvSpPr>
-          <p:cNvPr id="6" name="slide-title">
-            <a:extLst xmlns:a="http://schemas.openxmlformats.org/drawingml/2006/main">
-              <a:ext uri="{FF2B5EF4-FFF2-40B4-BE49-F238E27FC236}">
-                <a16:creationId xmlns:a16="http://schemas.microsoft.com/office/drawing/2014/main" id="{A7F01AA8-291C-4E14-BD99-17DA6DABF769}"/>
+          <p:cNvPr id="32" name="slide-title">
+            <a:extLst xmlns:a="http://schemas.openxmlformats.org/drawingml/2006/main">
+              <a:ext uri="{FF2B5EF4-FFF2-40B4-BE49-F238E27FC236}">
+                <a16:creationId xmlns:a16="http://schemas.microsoft.com/office/drawing/2014/main" id="{C8F4E7A5-CB8A-46BA-B81C-F0E1F77E9619}"/>
               </a:ext>
             </a:extLst>
           </p:cNvPr>
@@ -19756,7 +18395,7 @@
                 <a:ea typeface="Aptos"/>
                 <a:cs typeface="Aptos"/>
               </a:rPr>
-              <a:t>ValuePrism valence releases: Qwen +.187; DeepSeek -.062</a:t>
+              <a:t>Next: check the current evidence before buying more model runs</a:t>
             </a:r>
           </a:p>
         </p:txBody>
@@ -19766,7 +18405,7 @@
           <p:cNvPr id="2" name="slide-subtitle">
             <a:extLst xmlns:a="http://schemas.openxmlformats.org/drawingml/2006/main">
               <a:ext uri="{FF2B5EF4-FFF2-40B4-BE49-F238E27FC236}">
-                <a16:creationId xmlns:a16="http://schemas.microsoft.com/office/drawing/2014/main" id="{7E9C8710-980D-47C7-859C-B897674BA22C}"/>
+                <a16:creationId xmlns:a16="http://schemas.microsoft.com/office/drawing/2014/main" id="{BA71912E-7CFB-4FAA-9FE7-BF7B75714D89}"/>
               </a:ext>
             </a:extLst>
           </p:cNvPr>
@@ -19813,7 +18452,7 @@
                 <a:ea typeface="Aptos"/>
                 <a:cs typeface="Aptos"/>
               </a:rPr>
-              <a:t>Exploratory CEI result. x = model release quarter; y = valence accuracy; labels = model + B.</a:t>
+              <a:t>Research priority, not a model result. Read from top to bottom.</a:t>
             </a:r>
           </a:p>
         </p:txBody>
@@ -19823,7 +18462,7 @@
           <p:cNvPr id="3" name="">
             <a:extLst xmlns:a="http://schemas.openxmlformats.org/drawingml/2006/main">
               <a:ext uri="{FF2B5EF4-FFF2-40B4-BE49-F238E27FC236}">
-                <a16:creationId xmlns:a16="http://schemas.microsoft.com/office/drawing/2014/main" id="{FF37CA59-C44F-46D5-8219-CB84ABDD10A2}"/>
+                <a16:creationId xmlns:a16="http://schemas.microsoft.com/office/drawing/2014/main" id="{E589861F-38AA-4521-A65F-38F5F3F8A042}"/>
               </a:ext>
             </a:extLst>
           </p:cNvPr>
@@ -19849,46 +18488,24 @@
           </a:ln>
         </p:spPr>
       </p:sp>
-      <p:pic>
-        <p:nvPicPr>
-          <p:cNvPr id="9" name=""/>
-          <p:cNvPicPr>
-            <a:picLocks xmlns:a="http://schemas.openxmlformats.org/drawingml/2006/main" noChangeAspect="1"/>
-          </p:cNvPicPr>
-          <p:nvPr/>
-        </p:nvPicPr>
-        <p:blipFill>
-          <a:blip xmlns:r="http://schemas.openxmlformats.org/officeDocument/2006/relationships" xmlns:a="http://schemas.openxmlformats.org/drawingml/2006/main" r:embed="R5256056bc5214baa"/>
-          <a:stretch xmlns:a="http://schemas.openxmlformats.org/drawingml/2006/main"/>
-        </p:blipFill>
-        <p:spPr>
-          <a:xfrm xmlns:a="http://schemas.openxmlformats.org/drawingml/2006/main">
-            <a:off x="685800" y="1959293"/>
-            <a:ext cx="10820400" cy="3787140"/>
-          </a:xfrm>
-          <a:prstGeom xmlns:a="http://schemas.openxmlformats.org/drawingml/2006/main" prst="rect">
-            <a:avLst/>
-          </a:prstGeom>
-        </p:spPr>
-      </p:pic>
-      <p:sp>
-        <p:nvSpPr>
-          <p:cNvPr id="5" name="">
-            <a:extLst xmlns:a="http://schemas.openxmlformats.org/drawingml/2006/main">
-              <a:ext uri="{FF2B5EF4-FFF2-40B4-BE49-F238E27FC236}">
-                <a16:creationId xmlns:a16="http://schemas.microsoft.com/office/drawing/2014/main" id="{504AFC55-85F5-4FCF-983F-F07FDB701326}"/>
-              </a:ext>
-            </a:extLst>
-          </p:cNvPr>
-          <p:cNvSpPr>
-            <a:spLocks xmlns:a="http://schemas.openxmlformats.org/drawingml/2006/main" noGrp="1"/>
-          </p:cNvSpPr>
-          <p:nvPr/>
-        </p:nvSpPr>
-        <p:spPr>
-          <a:xfrm xmlns:a="http://schemas.openxmlformats.org/drawingml/2006/main">
-            <a:off x="781050" y="6334125"/>
-            <a:ext cx="10629900" cy="285750"/>
+      <p:sp>
+        <p:nvSpPr>
+          <p:cNvPr id="4" name="">
+            <a:extLst xmlns:a="http://schemas.openxmlformats.org/drawingml/2006/main">
+              <a:ext uri="{FF2B5EF4-FFF2-40B4-BE49-F238E27FC236}">
+                <a16:creationId xmlns:a16="http://schemas.microsoft.com/office/drawing/2014/main" id="{C9167F2E-89C9-4572-925C-111AF341A5B6}"/>
+              </a:ext>
+            </a:extLst>
+          </p:cNvPr>
+          <p:cNvSpPr>
+            <a:spLocks xmlns:a="http://schemas.openxmlformats.org/drawingml/2006/main" noGrp="1"/>
+          </p:cNvSpPr>
+          <p:nvPr/>
+        </p:nvSpPr>
+        <p:spPr>
+          <a:xfrm xmlns:a="http://schemas.openxmlformats.org/drawingml/2006/main">
+            <a:off x="800100" y="1571625"/>
+            <a:ext cx="400050" cy="323850"/>
           </a:xfrm>
           <a:prstGeom xmlns:a="http://schemas.openxmlformats.org/drawingml/2006/main" prst="rect">
             <a:avLst/>
@@ -19900,14 +18517,71 @@
         </p:spPr>
         <p:txBody>
           <a:bodyPr xmlns:a="http://schemas.openxmlformats.org/drawingml/2006/main">
+            <a:normAutofit fontScale="92424"/>
+          </a:bodyPr>
+          <a:lstStyle xmlns:a="http://schemas.openxmlformats.org/drawingml/2006/main"/>
+          <a:p xmlns:a="http://schemas.openxmlformats.org/drawingml/2006/main">
+            <a:pPr algn="ctr">
+              <a:defRPr sz="1650" b="1">
+                <a:solidFill>
+                  <a:srgbClr val="14856D"/>
+                </a:solidFill>
+                <a:latin typeface="Aptos"/>
+                <a:ea typeface="Aptos"/>
+                <a:cs typeface="Aptos"/>
+              </a:defRPr>
+            </a:pPr>
+            <a:r>
+              <a:rPr sz="1650" b="1">
+                <a:solidFill>
+                  <a:srgbClr val="14856D"/>
+                </a:solidFill>
+                <a:latin typeface="Aptos"/>
+                <a:ea typeface="Aptos"/>
+                <a:cs typeface="Aptos"/>
+              </a:rPr>
+              <a:t>1</a:t>
+            </a:r>
+          </a:p>
+        </p:txBody>
+      </p:sp>
+      <p:sp>
+        <p:nvSpPr>
+          <p:cNvPr id="5" name="">
+            <a:extLst xmlns:a="http://schemas.openxmlformats.org/drawingml/2006/main">
+              <a:ext uri="{FF2B5EF4-FFF2-40B4-BE49-F238E27FC236}">
+                <a16:creationId xmlns:a16="http://schemas.microsoft.com/office/drawing/2014/main" id="{A6244FD4-28C7-49C8-9918-B20E551F4FD5}"/>
+              </a:ext>
+            </a:extLst>
+          </p:cNvPr>
+          <p:cNvSpPr>
+            <a:spLocks xmlns:a="http://schemas.openxmlformats.org/drawingml/2006/main" noGrp="1"/>
+          </p:cNvSpPr>
+          <p:nvPr/>
+        </p:nvSpPr>
+        <p:spPr>
+          <a:xfrm xmlns:a="http://schemas.openxmlformats.org/drawingml/2006/main">
+            <a:off x="1381125" y="1562100"/>
+            <a:ext cx="7477125" cy="323850"/>
+          </a:xfrm>
+          <a:prstGeom xmlns:a="http://schemas.openxmlformats.org/drawingml/2006/main" prst="rect">
+            <a:avLst/>
+          </a:prstGeom>
+          <a:noFill xmlns:a="http://schemas.openxmlformats.org/drawingml/2006/main"/>
+          <a:ln xmlns:a="http://schemas.openxmlformats.org/drawingml/2006/main" w="0">
+            <a:noFill/>
+          </a:ln>
+        </p:spPr>
+        <p:txBody>
+          <a:bodyPr xmlns:a="http://schemas.openxmlformats.org/drawingml/2006/main">
             <a:normAutofit fontScale="100000"/>
           </a:bodyPr>
           <a:lstStyle xmlns:a="http://schemas.openxmlformats.org/drawingml/2006/main"/>
           <a:p xmlns:a="http://schemas.openxmlformats.org/drawingml/2006/main">
-            <a:pPr algn="ctr">
-              <a:defRPr sz="1050" b="0">
-                <a:solidFill>
-                  <a:srgbClr val="66727E"/>
+            <a:pPr algn="l">
+              <a:defRPr sz="1350" b="1">
+                <a:solidFill>
+                  <a:srgbClr val="17212B"/>
                 </a:solidFill>
                 <a:latin typeface="Aptos"/>
                 <a:ea typeface="Aptos"/>
@@ -19915,15 +18589,1341 @@
               </a:defRPr>
             </a:pPr>
             <a:r>
-              <a:rPr sz="1050" b="0">
-                <a:solidFill>
-                  <a:srgbClr val="66727E"/>
+              <a:rPr sz="1350" b="1">
+                <a:solidFill>
+                  <a:srgbClr val="17212B"/>
                 </a:solidFill>
                 <a:latin typeface="Aptos"/>
                 <a:ea typeface="Aptos"/>
                 <a:cs typeface="Aptos"/>
               </a:rPr>
-              <a:t>Release quarter is model metadata, not test time. CEI ValuePrism is not the paper's Kaleido test. The available files have no saved uncertainty ranges or raw run archive.</a:t>
+              <a:t>Review 12 cases where parsing may be wrong</a:t>
+            </a:r>
+          </a:p>
+        </p:txBody>
+      </p:sp>
+      <p:sp>
+        <p:nvSpPr>
+          <p:cNvPr id="6" name="">
+            <a:extLst xmlns:a="http://schemas.openxmlformats.org/drawingml/2006/main">
+              <a:ext uri="{FF2B5EF4-FFF2-40B4-BE49-F238E27FC236}">
+                <a16:creationId xmlns:a16="http://schemas.microsoft.com/office/drawing/2014/main" id="{EE872700-50F3-4B3A-ACE3-A57CE2F5BE5B}"/>
+              </a:ext>
+            </a:extLst>
+          </p:cNvPr>
+          <p:cNvSpPr>
+            <a:spLocks xmlns:a="http://schemas.openxmlformats.org/drawingml/2006/main" noGrp="1"/>
+          </p:cNvSpPr>
+          <p:nvPr/>
+        </p:nvSpPr>
+        <p:spPr>
+          <a:xfrm xmlns:a="http://schemas.openxmlformats.org/drawingml/2006/main">
+            <a:off x="9144000" y="1571625"/>
+            <a:ext cx="2238375" cy="304800"/>
+          </a:xfrm>
+          <a:prstGeom xmlns:a="http://schemas.openxmlformats.org/drawingml/2006/main" prst="rect">
+            <a:avLst/>
+          </a:prstGeom>
+          <a:noFill xmlns:a="http://schemas.openxmlformats.org/drawingml/2006/main"/>
+          <a:ln xmlns:a="http://schemas.openxmlformats.org/drawingml/2006/main" w="0">
+            <a:noFill/>
+          </a:ln>
+        </p:spPr>
+        <p:txBody>
+          <a:bodyPr xmlns:a="http://schemas.openxmlformats.org/drawingml/2006/main">
+            <a:normAutofit fontScale="100000"/>
+          </a:bodyPr>
+          <a:lstStyle xmlns:a="http://schemas.openxmlformats.org/drawingml/2006/main"/>
+          <a:p xmlns:a="http://schemas.openxmlformats.org/drawingml/2006/main">
+            <a:pPr algn="r">
+              <a:defRPr sz="1200" b="1">
+                <a:solidFill>
+                  <a:srgbClr val="14856D"/>
+                </a:solidFill>
+                <a:latin typeface="Aptos"/>
+                <a:ea typeface="Aptos"/>
+                <a:cs typeface="Aptos"/>
+              </a:defRPr>
+            </a:pPr>
+            <a:r>
+              <a:rPr sz="1200" b="1">
+                <a:solidFill>
+                  <a:srgbClr val="14856D"/>
+                </a:solidFill>
+                <a:latin typeface="Aptos"/>
+                <a:ea typeface="Aptos"/>
+                <a:cs typeface="Aptos"/>
+              </a:rPr>
+              <a:t>no new model runs</a:t>
+            </a:r>
+          </a:p>
+        </p:txBody>
+      </p:sp>
+      <p:sp>
+        <p:nvSpPr>
+          <p:cNvPr id="7" name="">
+            <a:extLst xmlns:a="http://schemas.openxmlformats.org/drawingml/2006/main">
+              <a:ext uri="{FF2B5EF4-FFF2-40B4-BE49-F238E27FC236}">
+                <a16:creationId xmlns:a16="http://schemas.microsoft.com/office/drawing/2014/main" id="{0DF44AF2-C3E7-46B4-AC6C-258DC438C8D4}"/>
+              </a:ext>
+            </a:extLst>
+          </p:cNvPr>
+          <p:cNvSpPr>
+            <a:spLocks xmlns:a="http://schemas.openxmlformats.org/drawingml/2006/main" noGrp="1"/>
+          </p:cNvSpPr>
+          <p:nvPr/>
+        </p:nvSpPr>
+        <p:spPr>
+          <a:xfrm xmlns:a="http://schemas.openxmlformats.org/drawingml/2006/main">
+            <a:off x="1381125" y="2028825"/>
+            <a:ext cx="10001250" cy="0"/>
+          </a:xfrm>
+          <a:prstGeom xmlns:a="http://schemas.openxmlformats.org/drawingml/2006/main" prst="line">
+            <a:avLst/>
+          </a:prstGeom>
+          <a:noFill xmlns:a="http://schemas.openxmlformats.org/drawingml/2006/main"/>
+          <a:ln xmlns:a="http://schemas.openxmlformats.org/drawingml/2006/main" w="9525">
+            <a:solidFill>
+              <a:srgbClr val="D8D9D5"/>
+            </a:solidFill>
+            <a:prstDash val="solid"/>
+          </a:ln>
+        </p:spPr>
+      </p:sp>
+      <p:sp>
+        <p:nvSpPr>
+          <p:cNvPr id="8" name="">
+            <a:extLst xmlns:a="http://schemas.openxmlformats.org/drawingml/2006/main">
+              <a:ext uri="{FF2B5EF4-FFF2-40B4-BE49-F238E27FC236}">
+                <a16:creationId xmlns:a16="http://schemas.microsoft.com/office/drawing/2014/main" id="{EEFB6C42-9290-487B-8A79-AB6A43981ED3}"/>
+              </a:ext>
+            </a:extLst>
+          </p:cNvPr>
+          <p:cNvSpPr>
+            <a:spLocks xmlns:a="http://schemas.openxmlformats.org/drawingml/2006/main" noGrp="1"/>
+          </p:cNvSpPr>
+          <p:nvPr/>
+        </p:nvSpPr>
+        <p:spPr>
+          <a:xfrm xmlns:a="http://schemas.openxmlformats.org/drawingml/2006/main">
+            <a:off x="800100" y="2200275"/>
+            <a:ext cx="400050" cy="323850"/>
+          </a:xfrm>
+          <a:prstGeom xmlns:a="http://schemas.openxmlformats.org/drawingml/2006/main" prst="rect">
+            <a:avLst/>
+          </a:prstGeom>
+          <a:noFill xmlns:a="http://schemas.openxmlformats.org/drawingml/2006/main"/>
+          <a:ln xmlns:a="http://schemas.openxmlformats.org/drawingml/2006/main" w="0">
+            <a:noFill/>
+          </a:ln>
+        </p:spPr>
+        <p:txBody>
+          <a:bodyPr xmlns:a="http://schemas.openxmlformats.org/drawingml/2006/main">
+            <a:normAutofit fontScale="92424"/>
+          </a:bodyPr>
+          <a:lstStyle xmlns:a="http://schemas.openxmlformats.org/drawingml/2006/main"/>
+          <a:p xmlns:a="http://schemas.openxmlformats.org/drawingml/2006/main">
+            <a:pPr algn="ctr">
+              <a:defRPr sz="1650" b="1">
+                <a:solidFill>
+                  <a:srgbClr val="14856D"/>
+                </a:solidFill>
+                <a:latin typeface="Aptos"/>
+                <a:ea typeface="Aptos"/>
+                <a:cs typeface="Aptos"/>
+              </a:defRPr>
+            </a:pPr>
+            <a:r>
+              <a:rPr sz="1650" b="1">
+                <a:solidFill>
+                  <a:srgbClr val="14856D"/>
+                </a:solidFill>
+                <a:latin typeface="Aptos"/>
+                <a:ea typeface="Aptos"/>
+                <a:cs typeface="Aptos"/>
+              </a:rPr>
+              <a:t>2</a:t>
+            </a:r>
+          </a:p>
+        </p:txBody>
+      </p:sp>
+      <p:sp>
+        <p:nvSpPr>
+          <p:cNvPr id="9" name="">
+            <a:extLst xmlns:a="http://schemas.openxmlformats.org/drawingml/2006/main">
+              <a:ext uri="{FF2B5EF4-FFF2-40B4-BE49-F238E27FC236}">
+                <a16:creationId xmlns:a16="http://schemas.microsoft.com/office/drawing/2014/main" id="{C3E37BA5-7FC0-4B27-88E6-5745EAAF7A51}"/>
+              </a:ext>
+            </a:extLst>
+          </p:cNvPr>
+          <p:cNvSpPr>
+            <a:spLocks xmlns:a="http://schemas.openxmlformats.org/drawingml/2006/main" noGrp="1"/>
+          </p:cNvSpPr>
+          <p:nvPr/>
+        </p:nvSpPr>
+        <p:spPr>
+          <a:xfrm xmlns:a="http://schemas.openxmlformats.org/drawingml/2006/main">
+            <a:off x="1381125" y="2190750"/>
+            <a:ext cx="7477125" cy="323850"/>
+          </a:xfrm>
+          <a:prstGeom xmlns:a="http://schemas.openxmlformats.org/drawingml/2006/main" prst="rect">
+            <a:avLst/>
+          </a:prstGeom>
+          <a:noFill xmlns:a="http://schemas.openxmlformats.org/drawingml/2006/main"/>
+          <a:ln xmlns:a="http://schemas.openxmlformats.org/drawingml/2006/main" w="0">
+            <a:noFill/>
+          </a:ln>
+        </p:spPr>
+        <p:txBody>
+          <a:bodyPr xmlns:a="http://schemas.openxmlformats.org/drawingml/2006/main">
+            <a:normAutofit fontScale="100000"/>
+          </a:bodyPr>
+          <a:lstStyle xmlns:a="http://schemas.openxmlformats.org/drawingml/2006/main"/>
+          <a:p xmlns:a="http://schemas.openxmlformats.org/drawingml/2006/main">
+            <a:pPr algn="l">
+              <a:defRPr sz="1350" b="1">
+                <a:solidFill>
+                  <a:srgbClr val="17212B"/>
+                </a:solidFill>
+                <a:latin typeface="Aptos"/>
+                <a:ea typeface="Aptos"/>
+                <a:cs typeface="Aptos"/>
+              </a:defRPr>
+            </a:pPr>
+            <a:r>
+              <a:rPr sz="1350" b="1">
+                <a:solidFill>
+                  <a:srgbClr val="17212B"/>
+                </a:solidFill>
+                <a:latin typeface="Aptos"/>
+                <a:ea typeface="Aptos"/>
+                <a:cs typeface="Aptos"/>
+              </a:rPr>
+              <a:t>Check duplicate labels and verify scores using the paper's method</a:t>
+            </a:r>
+          </a:p>
+        </p:txBody>
+      </p:sp>
+      <p:sp>
+        <p:nvSpPr>
+          <p:cNvPr id="10" name="">
+            <a:extLst xmlns:a="http://schemas.openxmlformats.org/drawingml/2006/main">
+              <a:ext uri="{FF2B5EF4-FFF2-40B4-BE49-F238E27FC236}">
+                <a16:creationId xmlns:a16="http://schemas.microsoft.com/office/drawing/2014/main" id="{0B94AD14-EBB3-4A48-B853-1A4F4D448831}"/>
+              </a:ext>
+            </a:extLst>
+          </p:cNvPr>
+          <p:cNvSpPr>
+            <a:spLocks xmlns:a="http://schemas.openxmlformats.org/drawingml/2006/main" noGrp="1"/>
+          </p:cNvSpPr>
+          <p:nvPr/>
+        </p:nvSpPr>
+        <p:spPr>
+          <a:xfrm xmlns:a="http://schemas.openxmlformats.org/drawingml/2006/main">
+            <a:off x="9144000" y="2200275"/>
+            <a:ext cx="2238375" cy="304800"/>
+          </a:xfrm>
+          <a:prstGeom xmlns:a="http://schemas.openxmlformats.org/drawingml/2006/main" prst="rect">
+            <a:avLst/>
+          </a:prstGeom>
+          <a:noFill xmlns:a="http://schemas.openxmlformats.org/drawingml/2006/main"/>
+          <a:ln xmlns:a="http://schemas.openxmlformats.org/drawingml/2006/main" w="0">
+            <a:noFill/>
+          </a:ln>
+        </p:spPr>
+        <p:txBody>
+          <a:bodyPr xmlns:a="http://schemas.openxmlformats.org/drawingml/2006/main">
+            <a:normAutofit fontScale="100000"/>
+          </a:bodyPr>
+          <a:lstStyle xmlns:a="http://schemas.openxmlformats.org/drawingml/2006/main"/>
+          <a:p xmlns:a="http://schemas.openxmlformats.org/drawingml/2006/main">
+            <a:pPr algn="r">
+              <a:defRPr sz="1200" b="1">
+                <a:solidFill>
+                  <a:srgbClr val="14856D"/>
+                </a:solidFill>
+                <a:latin typeface="Aptos"/>
+                <a:ea typeface="Aptos"/>
+                <a:cs typeface="Aptos"/>
+              </a:defRPr>
+            </a:pPr>
+            <a:r>
+              <a:rPr sz="1200" b="1">
+                <a:solidFill>
+                  <a:srgbClr val="14856D"/>
+                </a:solidFill>
+                <a:latin typeface="Aptos"/>
+                <a:ea typeface="Aptos"/>
+                <a:cs typeface="Aptos"/>
+              </a:rPr>
+              <a:t>no new model runs</a:t>
+            </a:r>
+          </a:p>
+        </p:txBody>
+      </p:sp>
+      <p:sp>
+        <p:nvSpPr>
+          <p:cNvPr id="11" name="">
+            <a:extLst xmlns:a="http://schemas.openxmlformats.org/drawingml/2006/main">
+              <a:ext uri="{FF2B5EF4-FFF2-40B4-BE49-F238E27FC236}">
+                <a16:creationId xmlns:a16="http://schemas.microsoft.com/office/drawing/2014/main" id="{D754B093-626A-4728-8BAD-C3F743CF5D93}"/>
+              </a:ext>
+            </a:extLst>
+          </p:cNvPr>
+          <p:cNvSpPr>
+            <a:spLocks xmlns:a="http://schemas.openxmlformats.org/drawingml/2006/main" noGrp="1"/>
+          </p:cNvSpPr>
+          <p:nvPr/>
+        </p:nvSpPr>
+        <p:spPr>
+          <a:xfrm xmlns:a="http://schemas.openxmlformats.org/drawingml/2006/main">
+            <a:off x="1381125" y="2657475"/>
+            <a:ext cx="10001250" cy="0"/>
+          </a:xfrm>
+          <a:prstGeom xmlns:a="http://schemas.openxmlformats.org/drawingml/2006/main" prst="line">
+            <a:avLst/>
+          </a:prstGeom>
+          <a:noFill xmlns:a="http://schemas.openxmlformats.org/drawingml/2006/main"/>
+          <a:ln xmlns:a="http://schemas.openxmlformats.org/drawingml/2006/main" w="9525">
+            <a:solidFill>
+              <a:srgbClr val="D8D9D5"/>
+            </a:solidFill>
+            <a:prstDash val="solid"/>
+          </a:ln>
+        </p:spPr>
+      </p:sp>
+      <p:sp>
+        <p:nvSpPr>
+          <p:cNvPr id="12" name="">
+            <a:extLst xmlns:a="http://schemas.openxmlformats.org/drawingml/2006/main">
+              <a:ext uri="{FF2B5EF4-FFF2-40B4-BE49-F238E27FC236}">
+                <a16:creationId xmlns:a16="http://schemas.microsoft.com/office/drawing/2014/main" id="{661C69AA-DA0F-40DA-9299-04B8C35C8C13}"/>
+              </a:ext>
+            </a:extLst>
+          </p:cNvPr>
+          <p:cNvSpPr>
+            <a:spLocks xmlns:a="http://schemas.openxmlformats.org/drawingml/2006/main" noGrp="1"/>
+          </p:cNvSpPr>
+          <p:nvPr/>
+        </p:nvSpPr>
+        <p:spPr>
+          <a:xfrm xmlns:a="http://schemas.openxmlformats.org/drawingml/2006/main">
+            <a:off x="800100" y="2828925"/>
+            <a:ext cx="400050" cy="323850"/>
+          </a:xfrm>
+          <a:prstGeom xmlns:a="http://schemas.openxmlformats.org/drawingml/2006/main" prst="rect">
+            <a:avLst/>
+          </a:prstGeom>
+          <a:noFill xmlns:a="http://schemas.openxmlformats.org/drawingml/2006/main"/>
+          <a:ln xmlns:a="http://schemas.openxmlformats.org/drawingml/2006/main" w="0">
+            <a:noFill/>
+          </a:ln>
+        </p:spPr>
+        <p:txBody>
+          <a:bodyPr xmlns:a="http://schemas.openxmlformats.org/drawingml/2006/main">
+            <a:normAutofit fontScale="92424"/>
+          </a:bodyPr>
+          <a:lstStyle xmlns:a="http://schemas.openxmlformats.org/drawingml/2006/main"/>
+          <a:p xmlns:a="http://schemas.openxmlformats.org/drawingml/2006/main">
+            <a:pPr algn="ctr">
+              <a:defRPr sz="1650" b="1">
+                <a:solidFill>
+                  <a:srgbClr val="C878A7"/>
+                </a:solidFill>
+                <a:latin typeface="Aptos"/>
+                <a:ea typeface="Aptos"/>
+                <a:cs typeface="Aptos"/>
+              </a:defRPr>
+            </a:pPr>
+            <a:r>
+              <a:rPr sz="1650" b="1">
+                <a:solidFill>
+                  <a:srgbClr val="C878A7"/>
+                </a:solidFill>
+                <a:latin typeface="Aptos"/>
+                <a:ea typeface="Aptos"/>
+                <a:cs typeface="Aptos"/>
+              </a:rPr>
+              <a:t>3</a:t>
+            </a:r>
+          </a:p>
+        </p:txBody>
+      </p:sp>
+      <p:sp>
+        <p:nvSpPr>
+          <p:cNvPr id="13" name="">
+            <a:extLst xmlns:a="http://schemas.openxmlformats.org/drawingml/2006/main">
+              <a:ext uri="{FF2B5EF4-FFF2-40B4-BE49-F238E27FC236}">
+                <a16:creationId xmlns:a16="http://schemas.microsoft.com/office/drawing/2014/main" id="{F95AFDA1-C444-471C-87E1-948C9AE49BD3}"/>
+              </a:ext>
+            </a:extLst>
+          </p:cNvPr>
+          <p:cNvSpPr>
+            <a:spLocks xmlns:a="http://schemas.openxmlformats.org/drawingml/2006/main" noGrp="1"/>
+          </p:cNvSpPr>
+          <p:nvPr/>
+        </p:nvSpPr>
+        <p:spPr>
+          <a:xfrm xmlns:a="http://schemas.openxmlformats.org/drawingml/2006/main">
+            <a:off x="1381125" y="2819400"/>
+            <a:ext cx="7477125" cy="323850"/>
+          </a:xfrm>
+          <a:prstGeom xmlns:a="http://schemas.openxmlformats.org/drawingml/2006/main" prst="rect">
+            <a:avLst/>
+          </a:prstGeom>
+          <a:noFill xmlns:a="http://schemas.openxmlformats.org/drawingml/2006/main"/>
+          <a:ln xmlns:a="http://schemas.openxmlformats.org/drawingml/2006/main" w="0">
+            <a:noFill/>
+          </a:ln>
+        </p:spPr>
+        <p:txBody>
+          <a:bodyPr xmlns:a="http://schemas.openxmlformats.org/drawingml/2006/main">
+            <a:normAutofit fontScale="100000"/>
+          </a:bodyPr>
+          <a:lstStyle xmlns:a="http://schemas.openxmlformats.org/drawingml/2006/main"/>
+          <a:p xmlns:a="http://schemas.openxmlformats.org/drawingml/2006/main">
+            <a:pPr algn="l">
+              <a:defRPr sz="1350" b="1">
+                <a:solidFill>
+                  <a:srgbClr val="17212B"/>
+                </a:solidFill>
+                <a:latin typeface="Aptos"/>
+                <a:ea typeface="Aptos"/>
+                <a:cs typeface="Aptos"/>
+              </a:defRPr>
+            </a:pPr>
+            <a:r>
+              <a:rPr sz="1350" b="1">
+                <a:solidFill>
+                  <a:srgbClr val="17212B"/>
+                </a:solidFill>
+                <a:latin typeface="Aptos"/>
+                <a:ea typeface="Aptos"/>
+                <a:cs typeface="Aptos"/>
+              </a:rPr>
+              <a:t>Run human validation</a:t>
+            </a:r>
+          </a:p>
+        </p:txBody>
+      </p:sp>
+      <p:sp>
+        <p:nvSpPr>
+          <p:cNvPr id="14" name="">
+            <a:extLst xmlns:a="http://schemas.openxmlformats.org/drawingml/2006/main">
+              <a:ext uri="{FF2B5EF4-FFF2-40B4-BE49-F238E27FC236}">
+                <a16:creationId xmlns:a16="http://schemas.microsoft.com/office/drawing/2014/main" id="{15BF56B3-C502-487D-8EA2-F442F706FD85}"/>
+              </a:ext>
+            </a:extLst>
+          </p:cNvPr>
+          <p:cNvSpPr>
+            <a:spLocks xmlns:a="http://schemas.openxmlformats.org/drawingml/2006/main" noGrp="1"/>
+          </p:cNvSpPr>
+          <p:nvPr/>
+        </p:nvSpPr>
+        <p:spPr>
+          <a:xfrm xmlns:a="http://schemas.openxmlformats.org/drawingml/2006/main">
+            <a:off x="9144000" y="2828925"/>
+            <a:ext cx="2238375" cy="304800"/>
+          </a:xfrm>
+          <a:prstGeom xmlns:a="http://schemas.openxmlformats.org/drawingml/2006/main" prst="rect">
+            <a:avLst/>
+          </a:prstGeom>
+          <a:noFill xmlns:a="http://schemas.openxmlformats.org/drawingml/2006/main"/>
+          <a:ln xmlns:a="http://schemas.openxmlformats.org/drawingml/2006/main" w="0">
+            <a:noFill/>
+          </a:ln>
+        </p:spPr>
+        <p:txBody>
+          <a:bodyPr xmlns:a="http://schemas.openxmlformats.org/drawingml/2006/main">
+            <a:normAutofit fontScale="100000"/>
+          </a:bodyPr>
+          <a:lstStyle xmlns:a="http://schemas.openxmlformats.org/drawingml/2006/main"/>
+          <a:p xmlns:a="http://schemas.openxmlformats.org/drawingml/2006/main">
+            <a:pPr algn="r">
+              <a:defRPr sz="1200" b="1">
+                <a:solidFill>
+                  <a:srgbClr val="C878A7"/>
+                </a:solidFill>
+                <a:latin typeface="Aptos"/>
+                <a:ea typeface="Aptos"/>
+                <a:cs typeface="Aptos"/>
+              </a:defRPr>
+            </a:pPr>
+            <a:r>
+              <a:rPr sz="1200" b="1">
+                <a:solidFill>
+                  <a:srgbClr val="C878A7"/>
+                </a:solidFill>
+                <a:latin typeface="Aptos"/>
+                <a:ea typeface="Aptos"/>
+                <a:cs typeface="Aptos"/>
+              </a:rPr>
+              <a:t>human study</a:t>
+            </a:r>
+          </a:p>
+        </p:txBody>
+      </p:sp>
+      <p:sp>
+        <p:nvSpPr>
+          <p:cNvPr id="15" name="">
+            <a:extLst xmlns:a="http://schemas.openxmlformats.org/drawingml/2006/main">
+              <a:ext uri="{FF2B5EF4-FFF2-40B4-BE49-F238E27FC236}">
+                <a16:creationId xmlns:a16="http://schemas.microsoft.com/office/drawing/2014/main" id="{E535DCCC-2601-4C84-A5FD-13F6EF575639}"/>
+              </a:ext>
+            </a:extLst>
+          </p:cNvPr>
+          <p:cNvSpPr>
+            <a:spLocks xmlns:a="http://schemas.openxmlformats.org/drawingml/2006/main" noGrp="1"/>
+          </p:cNvSpPr>
+          <p:nvPr/>
+        </p:nvSpPr>
+        <p:spPr>
+          <a:xfrm xmlns:a="http://schemas.openxmlformats.org/drawingml/2006/main">
+            <a:off x="1381125" y="3286125"/>
+            <a:ext cx="10001250" cy="0"/>
+          </a:xfrm>
+          <a:prstGeom xmlns:a="http://schemas.openxmlformats.org/drawingml/2006/main" prst="line">
+            <a:avLst/>
+          </a:prstGeom>
+          <a:noFill xmlns:a="http://schemas.openxmlformats.org/drawingml/2006/main"/>
+          <a:ln xmlns:a="http://schemas.openxmlformats.org/drawingml/2006/main" w="9525">
+            <a:solidFill>
+              <a:srgbClr val="D8D9D5"/>
+            </a:solidFill>
+            <a:prstDash val="solid"/>
+          </a:ln>
+        </p:spPr>
+      </p:sp>
+      <p:sp>
+        <p:nvSpPr>
+          <p:cNvPr id="16" name="">
+            <a:extLst xmlns:a="http://schemas.openxmlformats.org/drawingml/2006/main">
+              <a:ext uri="{FF2B5EF4-FFF2-40B4-BE49-F238E27FC236}">
+                <a16:creationId xmlns:a16="http://schemas.microsoft.com/office/drawing/2014/main" id="{9FED4860-4AED-4FD6-AA24-BC2F47671535}"/>
+              </a:ext>
+            </a:extLst>
+          </p:cNvPr>
+          <p:cNvSpPr>
+            <a:spLocks xmlns:a="http://schemas.openxmlformats.org/drawingml/2006/main" noGrp="1"/>
+          </p:cNvSpPr>
+          <p:nvPr/>
+        </p:nvSpPr>
+        <p:spPr>
+          <a:xfrm xmlns:a="http://schemas.openxmlformats.org/drawingml/2006/main">
+            <a:off x="800100" y="3457575"/>
+            <a:ext cx="400050" cy="323850"/>
+          </a:xfrm>
+          <a:prstGeom xmlns:a="http://schemas.openxmlformats.org/drawingml/2006/main" prst="rect">
+            <a:avLst/>
+          </a:prstGeom>
+          <a:noFill xmlns:a="http://schemas.openxmlformats.org/drawingml/2006/main"/>
+          <a:ln xmlns:a="http://schemas.openxmlformats.org/drawingml/2006/main" w="0">
+            <a:noFill/>
+          </a:ln>
+        </p:spPr>
+        <p:txBody>
+          <a:bodyPr xmlns:a="http://schemas.openxmlformats.org/drawingml/2006/main">
+            <a:normAutofit fontScale="92424"/>
+          </a:bodyPr>
+          <a:lstStyle xmlns:a="http://schemas.openxmlformats.org/drawingml/2006/main"/>
+          <a:p xmlns:a="http://schemas.openxmlformats.org/drawingml/2006/main">
+            <a:pPr algn="ctr">
+              <a:defRPr sz="1650" b="1">
+                <a:solidFill>
+                  <a:srgbClr val="2B78B8"/>
+                </a:solidFill>
+                <a:latin typeface="Aptos"/>
+                <a:ea typeface="Aptos"/>
+                <a:cs typeface="Aptos"/>
+              </a:defRPr>
+            </a:pPr>
+            <a:r>
+              <a:rPr sz="1650" b="1">
+                <a:solidFill>
+                  <a:srgbClr val="2B78B8"/>
+                </a:solidFill>
+                <a:latin typeface="Aptos"/>
+                <a:ea typeface="Aptos"/>
+                <a:cs typeface="Aptos"/>
+              </a:rPr>
+              <a:t>4</a:t>
+            </a:r>
+          </a:p>
+        </p:txBody>
+      </p:sp>
+      <p:sp>
+        <p:nvSpPr>
+          <p:cNvPr id="17" name="">
+            <a:extLst xmlns:a="http://schemas.openxmlformats.org/drawingml/2006/main">
+              <a:ext uri="{FF2B5EF4-FFF2-40B4-BE49-F238E27FC236}">
+                <a16:creationId xmlns:a16="http://schemas.microsoft.com/office/drawing/2014/main" id="{8A2E30C7-12AC-4425-A499-B4F8CF01E78C}"/>
+              </a:ext>
+            </a:extLst>
+          </p:cNvPr>
+          <p:cNvSpPr>
+            <a:spLocks xmlns:a="http://schemas.openxmlformats.org/drawingml/2006/main" noGrp="1"/>
+          </p:cNvSpPr>
+          <p:nvPr/>
+        </p:nvSpPr>
+        <p:spPr>
+          <a:xfrm xmlns:a="http://schemas.openxmlformats.org/drawingml/2006/main">
+            <a:off x="1381125" y="3448050"/>
+            <a:ext cx="7477125" cy="323850"/>
+          </a:xfrm>
+          <a:prstGeom xmlns:a="http://schemas.openxmlformats.org/drawingml/2006/main" prst="rect">
+            <a:avLst/>
+          </a:prstGeom>
+          <a:noFill xmlns:a="http://schemas.openxmlformats.org/drawingml/2006/main"/>
+          <a:ln xmlns:a="http://schemas.openxmlformats.org/drawingml/2006/main" w="0">
+            <a:noFill/>
+          </a:ln>
+        </p:spPr>
+        <p:txBody>
+          <a:bodyPr xmlns:a="http://schemas.openxmlformats.org/drawingml/2006/main">
+            <a:normAutofit fontScale="100000"/>
+          </a:bodyPr>
+          <a:lstStyle xmlns:a="http://schemas.openxmlformats.org/drawingml/2006/main"/>
+          <a:p xmlns:a="http://schemas.openxmlformats.org/drawingml/2006/main">
+            <a:pPr algn="l">
+              <a:defRPr sz="1350" b="1">
+                <a:solidFill>
+                  <a:srgbClr val="17212B"/>
+                </a:solidFill>
+                <a:latin typeface="Aptos"/>
+                <a:ea typeface="Aptos"/>
+                <a:cs typeface="Aptos"/>
+              </a:defRPr>
+            </a:pPr>
+            <a:r>
+              <a:rPr sz="1350" b="1">
+                <a:solidFill>
+                  <a:srgbClr val="17212B"/>
+                </a:solidFill>
+                <a:latin typeface="Aptos"/>
+                <a:ea typeface="Aptos"/>
+                <a:cs typeface="Aptos"/>
+              </a:rPr>
+              <a:t>Add MoralBench comparison items</a:t>
+            </a:r>
+          </a:p>
+        </p:txBody>
+      </p:sp>
+      <p:sp>
+        <p:nvSpPr>
+          <p:cNvPr id="18" name="">
+            <a:extLst xmlns:a="http://schemas.openxmlformats.org/drawingml/2006/main">
+              <a:ext uri="{FF2B5EF4-FFF2-40B4-BE49-F238E27FC236}">
+                <a16:creationId xmlns:a16="http://schemas.microsoft.com/office/drawing/2014/main" id="{FFCA89D2-8E1B-4F83-B8A2-E379460481EE}"/>
+              </a:ext>
+            </a:extLst>
+          </p:cNvPr>
+          <p:cNvSpPr>
+            <a:spLocks xmlns:a="http://schemas.openxmlformats.org/drawingml/2006/main" noGrp="1"/>
+          </p:cNvSpPr>
+          <p:nvPr/>
+        </p:nvSpPr>
+        <p:spPr>
+          <a:xfrm xmlns:a="http://schemas.openxmlformats.org/drawingml/2006/main">
+            <a:off x="9144000" y="3457575"/>
+            <a:ext cx="2238375" cy="304800"/>
+          </a:xfrm>
+          <a:prstGeom xmlns:a="http://schemas.openxmlformats.org/drawingml/2006/main" prst="rect">
+            <a:avLst/>
+          </a:prstGeom>
+          <a:noFill xmlns:a="http://schemas.openxmlformats.org/drawingml/2006/main"/>
+          <a:ln xmlns:a="http://schemas.openxmlformats.org/drawingml/2006/main" w="0">
+            <a:noFill/>
+          </a:ln>
+        </p:spPr>
+        <p:txBody>
+          <a:bodyPr xmlns:a="http://schemas.openxmlformats.org/drawingml/2006/main">
+            <a:normAutofit fontScale="100000"/>
+          </a:bodyPr>
+          <a:lstStyle xmlns:a="http://schemas.openxmlformats.org/drawingml/2006/main"/>
+          <a:p xmlns:a="http://schemas.openxmlformats.org/drawingml/2006/main">
+            <a:pPr algn="r">
+              <a:defRPr sz="1200" b="1">
+                <a:solidFill>
+                  <a:srgbClr val="2B78B8"/>
+                </a:solidFill>
+                <a:latin typeface="Aptos"/>
+                <a:ea typeface="Aptos"/>
+                <a:cs typeface="Aptos"/>
+              </a:defRPr>
+            </a:pPr>
+            <a:r>
+              <a:rPr sz="1200" b="1">
+                <a:solidFill>
+                  <a:srgbClr val="2B78B8"/>
+                </a:solidFill>
+                <a:latin typeface="Aptos"/>
+                <a:ea typeface="Aptos"/>
+                <a:cs typeface="Aptos"/>
+              </a:rPr>
+              <a:t>new items + reruns</a:t>
+            </a:r>
+          </a:p>
+        </p:txBody>
+      </p:sp>
+      <p:sp>
+        <p:nvSpPr>
+          <p:cNvPr id="19" name="">
+            <a:extLst xmlns:a="http://schemas.openxmlformats.org/drawingml/2006/main">
+              <a:ext uri="{FF2B5EF4-FFF2-40B4-BE49-F238E27FC236}">
+                <a16:creationId xmlns:a16="http://schemas.microsoft.com/office/drawing/2014/main" id="{D4C47568-5415-458D-AC01-BCF1C2CD5DF6}"/>
+              </a:ext>
+            </a:extLst>
+          </p:cNvPr>
+          <p:cNvSpPr>
+            <a:spLocks xmlns:a="http://schemas.openxmlformats.org/drawingml/2006/main" noGrp="1"/>
+          </p:cNvSpPr>
+          <p:nvPr/>
+        </p:nvSpPr>
+        <p:spPr>
+          <a:xfrm xmlns:a="http://schemas.openxmlformats.org/drawingml/2006/main">
+            <a:off x="1381125" y="3914775"/>
+            <a:ext cx="10001250" cy="0"/>
+          </a:xfrm>
+          <a:prstGeom xmlns:a="http://schemas.openxmlformats.org/drawingml/2006/main" prst="line">
+            <a:avLst/>
+          </a:prstGeom>
+          <a:noFill xmlns:a="http://schemas.openxmlformats.org/drawingml/2006/main"/>
+          <a:ln xmlns:a="http://schemas.openxmlformats.org/drawingml/2006/main" w="9525">
+            <a:solidFill>
+              <a:srgbClr val="D8D9D5"/>
+            </a:solidFill>
+            <a:prstDash val="solid"/>
+          </a:ln>
+        </p:spPr>
+      </p:sp>
+      <p:sp>
+        <p:nvSpPr>
+          <p:cNvPr id="20" name="">
+            <a:extLst xmlns:a="http://schemas.openxmlformats.org/drawingml/2006/main">
+              <a:ext uri="{FF2B5EF4-FFF2-40B4-BE49-F238E27FC236}">
+                <a16:creationId xmlns:a16="http://schemas.microsoft.com/office/drawing/2014/main" id="{8B90E56A-0BB0-4DA4-A50F-0979F75EFAD8}"/>
+              </a:ext>
+            </a:extLst>
+          </p:cNvPr>
+          <p:cNvSpPr>
+            <a:spLocks xmlns:a="http://schemas.openxmlformats.org/drawingml/2006/main" noGrp="1"/>
+          </p:cNvSpPr>
+          <p:nvPr/>
+        </p:nvSpPr>
+        <p:spPr>
+          <a:xfrm xmlns:a="http://schemas.openxmlformats.org/drawingml/2006/main">
+            <a:off x="800100" y="4086225"/>
+            <a:ext cx="400050" cy="323850"/>
+          </a:xfrm>
+          <a:prstGeom xmlns:a="http://schemas.openxmlformats.org/drawingml/2006/main" prst="rect">
+            <a:avLst/>
+          </a:prstGeom>
+          <a:noFill xmlns:a="http://schemas.openxmlformats.org/drawingml/2006/main"/>
+          <a:ln xmlns:a="http://schemas.openxmlformats.org/drawingml/2006/main" w="0">
+            <a:noFill/>
+          </a:ln>
+        </p:spPr>
+        <p:txBody>
+          <a:bodyPr xmlns:a="http://schemas.openxmlformats.org/drawingml/2006/main">
+            <a:normAutofit fontScale="92424"/>
+          </a:bodyPr>
+          <a:lstStyle xmlns:a="http://schemas.openxmlformats.org/drawingml/2006/main"/>
+          <a:p xmlns:a="http://schemas.openxmlformats.org/drawingml/2006/main">
+            <a:pPr algn="ctr">
+              <a:defRPr sz="1650" b="1">
+                <a:solidFill>
+                  <a:srgbClr val="D3971E"/>
+                </a:solidFill>
+                <a:latin typeface="Aptos"/>
+                <a:ea typeface="Aptos"/>
+                <a:cs typeface="Aptos"/>
+              </a:defRPr>
+            </a:pPr>
+            <a:r>
+              <a:rPr sz="1650" b="1">
+                <a:solidFill>
+                  <a:srgbClr val="D3971E"/>
+                </a:solidFill>
+                <a:latin typeface="Aptos"/>
+                <a:ea typeface="Aptos"/>
+                <a:cs typeface="Aptos"/>
+              </a:rPr>
+              <a:t>5</a:t>
+            </a:r>
+          </a:p>
+        </p:txBody>
+      </p:sp>
+      <p:sp>
+        <p:nvSpPr>
+          <p:cNvPr id="21" name="">
+            <a:extLst xmlns:a="http://schemas.openxmlformats.org/drawingml/2006/main">
+              <a:ext uri="{FF2B5EF4-FFF2-40B4-BE49-F238E27FC236}">
+                <a16:creationId xmlns:a16="http://schemas.microsoft.com/office/drawing/2014/main" id="{FF5EB4CE-CB36-4BBD-8A06-4C964BA2B2F5}"/>
+              </a:ext>
+            </a:extLst>
+          </p:cNvPr>
+          <p:cNvSpPr>
+            <a:spLocks xmlns:a="http://schemas.openxmlformats.org/drawingml/2006/main" noGrp="1"/>
+          </p:cNvSpPr>
+          <p:nvPr/>
+        </p:nvSpPr>
+        <p:spPr>
+          <a:xfrm xmlns:a="http://schemas.openxmlformats.org/drawingml/2006/main">
+            <a:off x="1381125" y="4076700"/>
+            <a:ext cx="7477125" cy="323850"/>
+          </a:xfrm>
+          <a:prstGeom xmlns:a="http://schemas.openxmlformats.org/drawingml/2006/main" prst="rect">
+            <a:avLst/>
+          </a:prstGeom>
+          <a:noFill xmlns:a="http://schemas.openxmlformats.org/drawingml/2006/main"/>
+          <a:ln xmlns:a="http://schemas.openxmlformats.org/drawingml/2006/main" w="0">
+            <a:noFill/>
+          </a:ln>
+        </p:spPr>
+        <p:txBody>
+          <a:bodyPr xmlns:a="http://schemas.openxmlformats.org/drawingml/2006/main">
+            <a:normAutofit fontScale="100000"/>
+          </a:bodyPr>
+          <a:lstStyle xmlns:a="http://schemas.openxmlformats.org/drawingml/2006/main"/>
+          <a:p xmlns:a="http://schemas.openxmlformats.org/drawingml/2006/main">
+            <a:pPr algn="l">
+              <a:defRPr sz="1350" b="1">
+                <a:solidFill>
+                  <a:srgbClr val="17212B"/>
+                </a:solidFill>
+                <a:latin typeface="Aptos"/>
+                <a:ea typeface="Aptos"/>
+                <a:cs typeface="Aptos"/>
+              </a:defRPr>
+            </a:pPr>
+            <a:r>
+              <a:rPr sz="1350" b="1">
+                <a:solidFill>
+                  <a:srgbClr val="17212B"/>
+                </a:solidFill>
+                <a:latin typeface="Aptos"/>
+                <a:ea typeface="Aptos"/>
+                <a:cs typeface="Aptos"/>
+              </a:rPr>
+              <a:t>Rerun 14 answers that hit the length limit, using one fixed limit</a:t>
+            </a:r>
+          </a:p>
+        </p:txBody>
+      </p:sp>
+      <p:sp>
+        <p:nvSpPr>
+          <p:cNvPr id="22" name="">
+            <a:extLst xmlns:a="http://schemas.openxmlformats.org/drawingml/2006/main">
+              <a:ext uri="{FF2B5EF4-FFF2-40B4-BE49-F238E27FC236}">
+                <a16:creationId xmlns:a16="http://schemas.microsoft.com/office/drawing/2014/main" id="{F3489C94-050E-42E2-9130-7CA11B2B7A83}"/>
+              </a:ext>
+            </a:extLst>
+          </p:cNvPr>
+          <p:cNvSpPr>
+            <a:spLocks xmlns:a="http://schemas.openxmlformats.org/drawingml/2006/main" noGrp="1"/>
+          </p:cNvSpPr>
+          <p:nvPr/>
+        </p:nvSpPr>
+        <p:spPr>
+          <a:xfrm xmlns:a="http://schemas.openxmlformats.org/drawingml/2006/main">
+            <a:off x="9144000" y="4086225"/>
+            <a:ext cx="2238375" cy="304800"/>
+          </a:xfrm>
+          <a:prstGeom xmlns:a="http://schemas.openxmlformats.org/drawingml/2006/main" prst="rect">
+            <a:avLst/>
+          </a:prstGeom>
+          <a:noFill xmlns:a="http://schemas.openxmlformats.org/drawingml/2006/main"/>
+          <a:ln xmlns:a="http://schemas.openxmlformats.org/drawingml/2006/main" w="0">
+            <a:noFill/>
+          </a:ln>
+        </p:spPr>
+        <p:txBody>
+          <a:bodyPr xmlns:a="http://schemas.openxmlformats.org/drawingml/2006/main">
+            <a:normAutofit fontScale="100000"/>
+          </a:bodyPr>
+          <a:lstStyle xmlns:a="http://schemas.openxmlformats.org/drawingml/2006/main"/>
+          <a:p xmlns:a="http://schemas.openxmlformats.org/drawingml/2006/main">
+            <a:pPr algn="r">
+              <a:defRPr sz="1200" b="1">
+                <a:solidFill>
+                  <a:srgbClr val="D3971E"/>
+                </a:solidFill>
+                <a:latin typeface="Aptos"/>
+                <a:ea typeface="Aptos"/>
+                <a:cs typeface="Aptos"/>
+              </a:defRPr>
+            </a:pPr>
+            <a:r>
+              <a:rPr sz="1200" b="1">
+                <a:solidFill>
+                  <a:srgbClr val="D3971E"/>
+                </a:solidFill>
+                <a:latin typeface="Aptos"/>
+                <a:ea typeface="Aptos"/>
+                <a:cs typeface="Aptos"/>
+              </a:rPr>
+              <a:t>targeted runs</a:t>
+            </a:r>
+          </a:p>
+        </p:txBody>
+      </p:sp>
+      <p:sp>
+        <p:nvSpPr>
+          <p:cNvPr id="23" name="">
+            <a:extLst xmlns:a="http://schemas.openxmlformats.org/drawingml/2006/main">
+              <a:ext uri="{FF2B5EF4-FFF2-40B4-BE49-F238E27FC236}">
+                <a16:creationId xmlns:a16="http://schemas.microsoft.com/office/drawing/2014/main" id="{88AF03B9-D024-4DB0-9B55-6D71555A7B17}"/>
+              </a:ext>
+            </a:extLst>
+          </p:cNvPr>
+          <p:cNvSpPr>
+            <a:spLocks xmlns:a="http://schemas.openxmlformats.org/drawingml/2006/main" noGrp="1"/>
+          </p:cNvSpPr>
+          <p:nvPr/>
+        </p:nvSpPr>
+        <p:spPr>
+          <a:xfrm xmlns:a="http://schemas.openxmlformats.org/drawingml/2006/main">
+            <a:off x="1381125" y="4543425"/>
+            <a:ext cx="10001250" cy="0"/>
+          </a:xfrm>
+          <a:prstGeom xmlns:a="http://schemas.openxmlformats.org/drawingml/2006/main" prst="line">
+            <a:avLst/>
+          </a:prstGeom>
+          <a:noFill xmlns:a="http://schemas.openxmlformats.org/drawingml/2006/main"/>
+          <a:ln xmlns:a="http://schemas.openxmlformats.org/drawingml/2006/main" w="9525">
+            <a:solidFill>
+              <a:srgbClr val="D8D9D5"/>
+            </a:solidFill>
+            <a:prstDash val="solid"/>
+          </a:ln>
+        </p:spPr>
+      </p:sp>
+      <p:sp>
+        <p:nvSpPr>
+          <p:cNvPr id="24" name="">
+            <a:extLst xmlns:a="http://schemas.openxmlformats.org/drawingml/2006/main">
+              <a:ext uri="{FF2B5EF4-FFF2-40B4-BE49-F238E27FC236}">
+                <a16:creationId xmlns:a16="http://schemas.microsoft.com/office/drawing/2014/main" id="{0EDB7A27-C0E1-4F5F-9578-2E0E6D586639}"/>
+              </a:ext>
+            </a:extLst>
+          </p:cNvPr>
+          <p:cNvSpPr>
+            <a:spLocks xmlns:a="http://schemas.openxmlformats.org/drawingml/2006/main" noGrp="1"/>
+          </p:cNvSpPr>
+          <p:nvPr/>
+        </p:nvSpPr>
+        <p:spPr>
+          <a:xfrm xmlns:a="http://schemas.openxmlformats.org/drawingml/2006/main">
+            <a:off x="800100" y="4714875"/>
+            <a:ext cx="400050" cy="323850"/>
+          </a:xfrm>
+          <a:prstGeom xmlns:a="http://schemas.openxmlformats.org/drawingml/2006/main" prst="rect">
+            <a:avLst/>
+          </a:prstGeom>
+          <a:noFill xmlns:a="http://schemas.openxmlformats.org/drawingml/2006/main"/>
+          <a:ln xmlns:a="http://schemas.openxmlformats.org/drawingml/2006/main" w="0">
+            <a:noFill/>
+          </a:ln>
+        </p:spPr>
+        <p:txBody>
+          <a:bodyPr xmlns:a="http://schemas.openxmlformats.org/drawingml/2006/main">
+            <a:normAutofit fontScale="92424"/>
+          </a:bodyPr>
+          <a:lstStyle xmlns:a="http://schemas.openxmlformats.org/drawingml/2006/main"/>
+          <a:p xmlns:a="http://schemas.openxmlformats.org/drawingml/2006/main">
+            <a:pPr algn="ctr">
+              <a:defRPr sz="1650" b="1">
+                <a:solidFill>
+                  <a:srgbClr val="9AA2AA"/>
+                </a:solidFill>
+                <a:latin typeface="Aptos"/>
+                <a:ea typeface="Aptos"/>
+                <a:cs typeface="Aptos"/>
+              </a:defRPr>
+            </a:pPr>
+            <a:r>
+              <a:rPr sz="1650" b="1">
+                <a:solidFill>
+                  <a:srgbClr val="9AA2AA"/>
+                </a:solidFill>
+                <a:latin typeface="Aptos"/>
+                <a:ea typeface="Aptos"/>
+                <a:cs typeface="Aptos"/>
+              </a:rPr>
+              <a:t>6</a:t>
+            </a:r>
+          </a:p>
+        </p:txBody>
+      </p:sp>
+      <p:sp>
+        <p:nvSpPr>
+          <p:cNvPr id="25" name="">
+            <a:extLst xmlns:a="http://schemas.openxmlformats.org/drawingml/2006/main">
+              <a:ext uri="{FF2B5EF4-FFF2-40B4-BE49-F238E27FC236}">
+                <a16:creationId xmlns:a16="http://schemas.microsoft.com/office/drawing/2014/main" id="{1729FA95-2B55-4B9B-B827-070082689A9E}"/>
+              </a:ext>
+            </a:extLst>
+          </p:cNvPr>
+          <p:cNvSpPr>
+            <a:spLocks xmlns:a="http://schemas.openxmlformats.org/drawingml/2006/main" noGrp="1"/>
+          </p:cNvSpPr>
+          <p:nvPr/>
+        </p:nvSpPr>
+        <p:spPr>
+          <a:xfrm xmlns:a="http://schemas.openxmlformats.org/drawingml/2006/main">
+            <a:off x="1381125" y="4705350"/>
+            <a:ext cx="7477125" cy="323850"/>
+          </a:xfrm>
+          <a:prstGeom xmlns:a="http://schemas.openxmlformats.org/drawingml/2006/main" prst="rect">
+            <a:avLst/>
+          </a:prstGeom>
+          <a:noFill xmlns:a="http://schemas.openxmlformats.org/drawingml/2006/main"/>
+          <a:ln xmlns:a="http://schemas.openxmlformats.org/drawingml/2006/main" w="0">
+            <a:noFill/>
+          </a:ln>
+        </p:spPr>
+        <p:txBody>
+          <a:bodyPr xmlns:a="http://schemas.openxmlformats.org/drawingml/2006/main">
+            <a:normAutofit fontScale="100000"/>
+          </a:bodyPr>
+          <a:lstStyle xmlns:a="http://schemas.openxmlformats.org/drawingml/2006/main"/>
+          <a:p xmlns:a="http://schemas.openxmlformats.org/drawingml/2006/main">
+            <a:pPr algn="l">
+              <a:defRPr sz="1350" b="1">
+                <a:solidFill>
+                  <a:srgbClr val="17212B"/>
+                </a:solidFill>
+                <a:latin typeface="Aptos"/>
+                <a:ea typeface="Aptos"/>
+                <a:cs typeface="Aptos"/>
+              </a:defRPr>
+            </a:pPr>
+            <a:r>
+              <a:rPr sz="1350" b="1">
+                <a:solidFill>
+                  <a:srgbClr val="17212B"/>
+                </a:solidFill>
+                <a:latin typeface="Aptos"/>
+                <a:ea typeface="Aptos"/>
+                <a:cs typeface="Aptos"/>
+              </a:rPr>
+              <a:t>Complete 30 image and text results only if needed</a:t>
+            </a:r>
+          </a:p>
+        </p:txBody>
+      </p:sp>
+      <p:sp>
+        <p:nvSpPr>
+          <p:cNvPr id="26" name="">
+            <a:extLst xmlns:a="http://schemas.openxmlformats.org/drawingml/2006/main">
+              <a:ext uri="{FF2B5EF4-FFF2-40B4-BE49-F238E27FC236}">
+                <a16:creationId xmlns:a16="http://schemas.microsoft.com/office/drawing/2014/main" id="{2DBB7AF4-A975-4FD8-8525-93D40B30BA50}"/>
+              </a:ext>
+            </a:extLst>
+          </p:cNvPr>
+          <p:cNvSpPr>
+            <a:spLocks xmlns:a="http://schemas.openxmlformats.org/drawingml/2006/main" noGrp="1"/>
+          </p:cNvSpPr>
+          <p:nvPr/>
+        </p:nvSpPr>
+        <p:spPr>
+          <a:xfrm xmlns:a="http://schemas.openxmlformats.org/drawingml/2006/main">
+            <a:off x="9144000" y="4714875"/>
+            <a:ext cx="2238375" cy="304800"/>
+          </a:xfrm>
+          <a:prstGeom xmlns:a="http://schemas.openxmlformats.org/drawingml/2006/main" prst="rect">
+            <a:avLst/>
+          </a:prstGeom>
+          <a:noFill xmlns:a="http://schemas.openxmlformats.org/drawingml/2006/main"/>
+          <a:ln xmlns:a="http://schemas.openxmlformats.org/drawingml/2006/main" w="0">
+            <a:noFill/>
+          </a:ln>
+        </p:spPr>
+        <p:txBody>
+          <a:bodyPr xmlns:a="http://schemas.openxmlformats.org/drawingml/2006/main">
+            <a:normAutofit fontScale="100000"/>
+          </a:bodyPr>
+          <a:lstStyle xmlns:a="http://schemas.openxmlformats.org/drawingml/2006/main"/>
+          <a:p xmlns:a="http://schemas.openxmlformats.org/drawingml/2006/main">
+            <a:pPr algn="r">
+              <a:defRPr sz="1200" b="1">
+                <a:solidFill>
+                  <a:srgbClr val="9AA2AA"/>
+                </a:solidFill>
+                <a:latin typeface="Aptos"/>
+                <a:ea typeface="Aptos"/>
+                <a:cs typeface="Aptos"/>
+              </a:defRPr>
+            </a:pPr>
+            <a:r>
+              <a:rPr sz="1200" b="1">
+                <a:solidFill>
+                  <a:srgbClr val="9AA2AA"/>
+                </a:solidFill>
+                <a:latin typeface="Aptos"/>
+                <a:ea typeface="Aptos"/>
+                <a:cs typeface="Aptos"/>
+              </a:rPr>
+              <a:t>high cost</a:t>
+            </a:r>
+          </a:p>
+        </p:txBody>
+      </p:sp>
+      <p:sp>
+        <p:nvSpPr>
+          <p:cNvPr id="27" name="">
+            <a:extLst xmlns:a="http://schemas.openxmlformats.org/drawingml/2006/main">
+              <a:ext uri="{FF2B5EF4-FFF2-40B4-BE49-F238E27FC236}">
+                <a16:creationId xmlns:a16="http://schemas.microsoft.com/office/drawing/2014/main" id="{DAB41782-D9DA-41F6-939C-468AB10A3991}"/>
+              </a:ext>
+            </a:extLst>
+          </p:cNvPr>
+          <p:cNvSpPr>
+            <a:spLocks xmlns:a="http://schemas.openxmlformats.org/drawingml/2006/main" noGrp="1"/>
+          </p:cNvSpPr>
+          <p:nvPr/>
+        </p:nvSpPr>
+        <p:spPr>
+          <a:xfrm xmlns:a="http://schemas.openxmlformats.org/drawingml/2006/main">
+            <a:off x="1381125" y="5172075"/>
+            <a:ext cx="10001250" cy="0"/>
+          </a:xfrm>
+          <a:prstGeom xmlns:a="http://schemas.openxmlformats.org/drawingml/2006/main" prst="line">
+            <a:avLst/>
+          </a:prstGeom>
+          <a:noFill xmlns:a="http://schemas.openxmlformats.org/drawingml/2006/main"/>
+          <a:ln xmlns:a="http://schemas.openxmlformats.org/drawingml/2006/main" w="9525">
+            <a:solidFill>
+              <a:srgbClr val="D8D9D5"/>
+            </a:solidFill>
+            <a:prstDash val="solid"/>
+          </a:ln>
+        </p:spPr>
+      </p:sp>
+      <p:sp>
+        <p:nvSpPr>
+          <p:cNvPr id="28" name="">
+            <a:extLst xmlns:a="http://schemas.openxmlformats.org/drawingml/2006/main">
+              <a:ext uri="{FF2B5EF4-FFF2-40B4-BE49-F238E27FC236}">
+                <a16:creationId xmlns:a16="http://schemas.microsoft.com/office/drawing/2014/main" id="{135C23BB-AAA1-4DC6-9DEC-FB7FCAA4070E}"/>
+              </a:ext>
+            </a:extLst>
+          </p:cNvPr>
+          <p:cNvSpPr>
+            <a:spLocks xmlns:a="http://schemas.openxmlformats.org/drawingml/2006/main" noGrp="1"/>
+          </p:cNvSpPr>
+          <p:nvPr/>
+        </p:nvSpPr>
+        <p:spPr>
+          <a:xfrm xmlns:a="http://schemas.openxmlformats.org/drawingml/2006/main">
+            <a:off x="800100" y="5343525"/>
+            <a:ext cx="400050" cy="323850"/>
+          </a:xfrm>
+          <a:prstGeom xmlns:a="http://schemas.openxmlformats.org/drawingml/2006/main" prst="rect">
+            <a:avLst/>
+          </a:prstGeom>
+          <a:noFill xmlns:a="http://schemas.openxmlformats.org/drawingml/2006/main"/>
+          <a:ln xmlns:a="http://schemas.openxmlformats.org/drawingml/2006/main" w="0">
+            <a:noFill/>
+          </a:ln>
+        </p:spPr>
+        <p:txBody>
+          <a:bodyPr xmlns:a="http://schemas.openxmlformats.org/drawingml/2006/main">
+            <a:normAutofit fontScale="92424"/>
+          </a:bodyPr>
+          <a:lstStyle xmlns:a="http://schemas.openxmlformats.org/drawingml/2006/main"/>
+          <a:p xmlns:a="http://schemas.openxmlformats.org/drawingml/2006/main">
+            <a:pPr algn="ctr">
+              <a:defRPr sz="1650" b="1">
+                <a:solidFill>
+                  <a:srgbClr val="D65A00"/>
+                </a:solidFill>
+                <a:latin typeface="Aptos"/>
+                <a:ea typeface="Aptos"/>
+                <a:cs typeface="Aptos"/>
+              </a:defRPr>
+            </a:pPr>
+            <a:r>
+              <a:rPr sz="1650" b="1">
+                <a:solidFill>
+                  <a:srgbClr val="D65A00"/>
+                </a:solidFill>
+                <a:latin typeface="Aptos"/>
+                <a:ea typeface="Aptos"/>
+                <a:cs typeface="Aptos"/>
+              </a:rPr>
+              <a:t>7</a:t>
+            </a:r>
+          </a:p>
+        </p:txBody>
+      </p:sp>
+      <p:sp>
+        <p:nvSpPr>
+          <p:cNvPr id="29" name="">
+            <a:extLst xmlns:a="http://schemas.openxmlformats.org/drawingml/2006/main">
+              <a:ext uri="{FF2B5EF4-FFF2-40B4-BE49-F238E27FC236}">
+                <a16:creationId xmlns:a16="http://schemas.microsoft.com/office/drawing/2014/main" id="{2D139D43-67C1-4D05-ACE9-AEB8826D8BF8}"/>
+              </a:ext>
+            </a:extLst>
+          </p:cNvPr>
+          <p:cNvSpPr>
+            <a:spLocks xmlns:a="http://schemas.openxmlformats.org/drawingml/2006/main" noGrp="1"/>
+          </p:cNvSpPr>
+          <p:nvPr/>
+        </p:nvSpPr>
+        <p:spPr>
+          <a:xfrm xmlns:a="http://schemas.openxmlformats.org/drawingml/2006/main">
+            <a:off x="1381125" y="5334000"/>
+            <a:ext cx="7477125" cy="323850"/>
+          </a:xfrm>
+          <a:prstGeom xmlns:a="http://schemas.openxmlformats.org/drawingml/2006/main" prst="rect">
+            <a:avLst/>
+          </a:prstGeom>
+          <a:noFill xmlns:a="http://schemas.openxmlformats.org/drawingml/2006/main"/>
+          <a:ln xmlns:a="http://schemas.openxmlformats.org/drawingml/2006/main" w="0">
+            <a:noFill/>
+          </a:ln>
+        </p:spPr>
+        <p:txBody>
+          <a:bodyPr xmlns:a="http://schemas.openxmlformats.org/drawingml/2006/main">
+            <a:normAutofit fontScale="100000"/>
+          </a:bodyPr>
+          <a:lstStyle xmlns:a="http://schemas.openxmlformats.org/drawingml/2006/main"/>
+          <a:p xmlns:a="http://schemas.openxmlformats.org/drawingml/2006/main">
+            <a:pPr algn="l">
+              <a:defRPr sz="1350" b="1">
+                <a:solidFill>
+                  <a:srgbClr val="17212B"/>
+                </a:solidFill>
+                <a:latin typeface="Aptos"/>
+                <a:ea typeface="Aptos"/>
+                <a:cs typeface="Aptos"/>
+              </a:defRPr>
+            </a:pPr>
+            <a:r>
+              <a:rPr sz="1350" b="1">
+                <a:solidFill>
+                  <a:srgbClr val="17212B"/>
+                </a:solidFill>
+                <a:latin typeface="Aptos"/>
+                <a:ea typeface="Aptos"/>
+                <a:cs typeface="Aptos"/>
+              </a:rPr>
+              <a:t>Repeat Kaleido and UniMoral paper conditions only if we plan a replication claim</a:t>
+            </a:r>
+          </a:p>
+        </p:txBody>
+      </p:sp>
+      <p:sp>
+        <p:nvSpPr>
+          <p:cNvPr id="30" name="">
+            <a:extLst xmlns:a="http://schemas.openxmlformats.org/drawingml/2006/main">
+              <a:ext uri="{FF2B5EF4-FFF2-40B4-BE49-F238E27FC236}">
+                <a16:creationId xmlns:a16="http://schemas.microsoft.com/office/drawing/2014/main" id="{D4C8797F-CA25-4AB8-B0F1-D7E44F2FDBB9}"/>
+              </a:ext>
+            </a:extLst>
+          </p:cNvPr>
+          <p:cNvSpPr>
+            <a:spLocks xmlns:a="http://schemas.openxmlformats.org/drawingml/2006/main" noGrp="1"/>
+          </p:cNvSpPr>
+          <p:nvPr/>
+        </p:nvSpPr>
+        <p:spPr>
+          <a:xfrm xmlns:a="http://schemas.openxmlformats.org/drawingml/2006/main">
+            <a:off x="9144000" y="5343525"/>
+            <a:ext cx="2238375" cy="304800"/>
+          </a:xfrm>
+          <a:prstGeom xmlns:a="http://schemas.openxmlformats.org/drawingml/2006/main" prst="rect">
+            <a:avLst/>
+          </a:prstGeom>
+          <a:noFill xmlns:a="http://schemas.openxmlformats.org/drawingml/2006/main"/>
+          <a:ln xmlns:a="http://schemas.openxmlformats.org/drawingml/2006/main" w="0">
+            <a:noFill/>
+          </a:ln>
+        </p:spPr>
+        <p:txBody>
+          <a:bodyPr xmlns:a="http://schemas.openxmlformats.org/drawingml/2006/main">
+            <a:normAutofit fontScale="100000"/>
+          </a:bodyPr>
+          <a:lstStyle xmlns:a="http://schemas.openxmlformats.org/drawingml/2006/main"/>
+          <a:p xmlns:a="http://schemas.openxmlformats.org/drawingml/2006/main">
+            <a:pPr algn="r">
+              <a:defRPr sz="1200" b="1">
+                <a:solidFill>
+                  <a:srgbClr val="D65A00"/>
+                </a:solidFill>
+                <a:latin typeface="Aptos"/>
+                <a:ea typeface="Aptos"/>
+                <a:cs typeface="Aptos"/>
+              </a:defRPr>
+            </a:pPr>
+            <a:r>
+              <a:rPr sz="1200" b="1">
+                <a:solidFill>
+                  <a:srgbClr val="D65A00"/>
+                </a:solidFill>
+                <a:latin typeface="Aptos"/>
+                <a:ea typeface="Aptos"/>
+                <a:cs typeface="Aptos"/>
+              </a:rPr>
+              <a:t>model access + scoring</a:t>
+            </a:r>
+          </a:p>
+        </p:txBody>
+      </p:sp>
+      <p:sp>
+        <p:nvSpPr>
+          <p:cNvPr id="31" name="">
+            <a:extLst xmlns:a="http://schemas.openxmlformats.org/drawingml/2006/main">
+              <a:ext uri="{FF2B5EF4-FFF2-40B4-BE49-F238E27FC236}">
+                <a16:creationId xmlns:a16="http://schemas.microsoft.com/office/drawing/2014/main" id="{8022E081-7660-4741-8DE4-CF84E9EA6D21}"/>
+              </a:ext>
+            </a:extLst>
+          </p:cNvPr>
+          <p:cNvSpPr>
+            <a:spLocks xmlns:a="http://schemas.openxmlformats.org/drawingml/2006/main" noGrp="1"/>
+          </p:cNvSpPr>
+          <p:nvPr/>
+        </p:nvSpPr>
+        <p:spPr>
+          <a:xfrm xmlns:a="http://schemas.openxmlformats.org/drawingml/2006/main">
+            <a:off x="1381125" y="6153150"/>
+            <a:ext cx="10001250" cy="285750"/>
+          </a:xfrm>
+          <a:prstGeom xmlns:a="http://schemas.openxmlformats.org/drawingml/2006/main" prst="rect">
+            <a:avLst/>
+          </a:prstGeom>
+          <a:noFill xmlns:a="http://schemas.openxmlformats.org/drawingml/2006/main"/>
+          <a:ln xmlns:a="http://schemas.openxmlformats.org/drawingml/2006/main" w="0">
+            <a:noFill/>
+          </a:ln>
+        </p:spPr>
+        <p:txBody>
+          <a:bodyPr xmlns:a="http://schemas.openxmlformats.org/drawingml/2006/main">
+            <a:normAutofit fontScale="94444"/>
+          </a:bodyPr>
+          <a:lstStyle xmlns:a="http://schemas.openxmlformats.org/drawingml/2006/main"/>
+          <a:p xmlns:a="http://schemas.openxmlformats.org/drawingml/2006/main">
+            <a:pPr algn="l">
+              <a:defRPr sz="1350" b="1">
+                <a:solidFill>
+                  <a:srgbClr val="CF5D4A"/>
+                </a:solidFill>
+                <a:latin typeface="Aptos"/>
+                <a:ea typeface="Aptos"/>
+                <a:cs typeface="Aptos"/>
+              </a:defRPr>
+            </a:pPr>
+            <a:r>
+              <a:rPr sz="1350" b="1">
+                <a:solidFill>
+                  <a:srgbClr val="CF5D4A"/>
+                </a:solidFill>
+                <a:latin typeface="Aptos"/>
+                <a:ea typeface="Aptos"/>
+                <a:cs typeface="Aptos"/>
+              </a:rPr>
+              <a:t>Run paid models only after these checks.</a:t>
             </a:r>
           </a:p>
         </p:txBody>
@@ -19931,7 +19931,7 @@
     </p:spTree>
     <p:extLst>
       <p:ext uri="{BB962C8B-B14F-4D97-AF65-F5344CB8AC3E}">
-        <p14:creationId xmlns:p14="http://schemas.microsoft.com/office/powerpoint/2010/main" val="663514729"/>
+        <p14:creationId xmlns:p14="http://schemas.microsoft.com/office/powerpoint/2010/main" val="1926673164"/>
       </p:ext>
     </p:extLst>
   </p:cSld>
@@ -19966,7 +19966,7 @@
           <p:nvPr/>
         </p:nvPicPr>
         <p:blipFill>
-          <a:blip xmlns:r="http://schemas.openxmlformats.org/officeDocument/2006/relationships" xmlns:a="http://schemas.openxmlformats.org/drawingml/2006/main" r:embed="R54d994249a77424b"/>
+          <a:blip xmlns:r="http://schemas.openxmlformats.org/officeDocument/2006/relationships" xmlns:a="http://schemas.openxmlformats.org/drawingml/2006/main" r:embed="Rf1b6d9d60bb047de"/>
           <a:stretch xmlns:a="http://schemas.openxmlformats.org/drawingml/2006/main"/>
         </p:blipFill>
         <p:spPr>
@@ -19982,7 +19982,7 @@
     </p:spTree>
     <p:extLst>
       <p:ext uri="{BB962C8B-B14F-4D97-AF65-F5344CB8AC3E}">
-        <p14:creationId xmlns:p14="http://schemas.microsoft.com/office/powerpoint/2010/main" val="9774367"/>
+        <p14:creationId xmlns:p14="http://schemas.microsoft.com/office/powerpoint/2010/main" val="1631787860"/>
       </p:ext>
     </p:extLst>
   </p:cSld>
@@ -20017,7 +20017,7 @@
           <p:nvPr/>
         </p:nvPicPr>
         <p:blipFill>
-          <a:blip xmlns:r="http://schemas.openxmlformats.org/officeDocument/2006/relationships" xmlns:a="http://schemas.openxmlformats.org/drawingml/2006/main" r:embed="R812ce56a0dea44c2"/>
+          <a:blip xmlns:r="http://schemas.openxmlformats.org/officeDocument/2006/relationships" xmlns:a="http://schemas.openxmlformats.org/drawingml/2006/main" r:embed="R6a34045852f14d1a"/>
           <a:stretch xmlns:a="http://schemas.openxmlformats.org/drawingml/2006/main"/>
         </p:blipFill>
         <p:spPr>
@@ -20033,7 +20033,7 @@
     </p:spTree>
     <p:extLst>
       <p:ext uri="{BB962C8B-B14F-4D97-AF65-F5344CB8AC3E}">
-        <p14:creationId xmlns:p14="http://schemas.microsoft.com/office/powerpoint/2010/main" val="2027818626"/>
+        <p14:creationId xmlns:p14="http://schemas.microsoft.com/office/powerpoint/2010/main" val="1481736340"/>
       </p:ext>
     </p:extLst>
   </p:cSld>
@@ -20068,7 +20068,7 @@
           <p:nvPr/>
         </p:nvPicPr>
         <p:blipFill>
-          <a:blip xmlns:r="http://schemas.openxmlformats.org/officeDocument/2006/relationships" xmlns:a="http://schemas.openxmlformats.org/drawingml/2006/main" r:embed="R3ccb9fc60ee642d4"/>
+          <a:blip xmlns:r="http://schemas.openxmlformats.org/officeDocument/2006/relationships" xmlns:a="http://schemas.openxmlformats.org/drawingml/2006/main" r:embed="R2fdef603b2274b72"/>
           <a:stretch xmlns:a="http://schemas.openxmlformats.org/drawingml/2006/main"/>
         </p:blipFill>
         <p:spPr>
@@ -20084,7 +20084,7 @@
     </p:spTree>
     <p:extLst>
       <p:ext uri="{BB962C8B-B14F-4D97-AF65-F5344CB8AC3E}">
-        <p14:creationId xmlns:p14="http://schemas.microsoft.com/office/powerpoint/2010/main" val="399498205"/>
+        <p14:creationId xmlns:p14="http://schemas.microsoft.com/office/powerpoint/2010/main" val="272004283"/>
       </p:ext>
     </p:extLst>
   </p:cSld>
@@ -20119,7 +20119,7 @@
           <p:nvPr/>
         </p:nvPicPr>
         <p:blipFill>
-          <a:blip xmlns:r="http://schemas.openxmlformats.org/officeDocument/2006/relationships" xmlns:a="http://schemas.openxmlformats.org/drawingml/2006/main" r:embed="Rea3958a769f44074"/>
+          <a:blip xmlns:r="http://schemas.openxmlformats.org/officeDocument/2006/relationships" xmlns:a="http://schemas.openxmlformats.org/drawingml/2006/main" r:embed="R7e26e45861474220"/>
           <a:stretch xmlns:a="http://schemas.openxmlformats.org/drawingml/2006/main"/>
         </p:blipFill>
         <p:spPr>
@@ -20135,7 +20135,7 @@
     </p:spTree>
     <p:extLst>
       <p:ext uri="{BB962C8B-B14F-4D97-AF65-F5344CB8AC3E}">
-        <p14:creationId xmlns:p14="http://schemas.microsoft.com/office/powerpoint/2010/main" val="1567173988"/>
+        <p14:creationId xmlns:p14="http://schemas.microsoft.com/office/powerpoint/2010/main" val="725064902"/>
       </p:ext>
     </p:extLst>
   </p:cSld>
@@ -20166,7 +20166,7 @@
           <p:cNvPr id="6" name="slide-title">
             <a:extLst xmlns:a="http://schemas.openxmlformats.org/drawingml/2006/main">
               <a:ext uri="{FF2B5EF4-FFF2-40B4-BE49-F238E27FC236}">
-                <a16:creationId xmlns:a16="http://schemas.microsoft.com/office/drawing/2014/main" id="{6425F039-3806-467B-8170-FC07B56C8145}"/>
+                <a16:creationId xmlns:a16="http://schemas.microsoft.com/office/drawing/2014/main" id="{DE352C0D-C1DE-4364-B24E-12847D805264}"/>
               </a:ext>
             </a:extLst>
           </p:cNvPr>
@@ -20223,7 +20223,7 @@
           <p:cNvPr id="2" name="slide-subtitle">
             <a:extLst xmlns:a="http://schemas.openxmlformats.org/drawingml/2006/main">
               <a:ext uri="{FF2B5EF4-FFF2-40B4-BE49-F238E27FC236}">
-                <a16:creationId xmlns:a16="http://schemas.microsoft.com/office/drawing/2014/main" id="{B350335D-349C-4DCA-A661-C2C0C90D3352}"/>
+                <a16:creationId xmlns:a16="http://schemas.microsoft.com/office/drawing/2014/main" id="{D001F9E4-A7EA-4CD1-B7B6-62B25F37D06A}"/>
               </a:ext>
             </a:extLst>
           </p:cNvPr>
@@ -20280,7 +20280,7 @@
           <p:cNvPr id="3" name="">
             <a:extLst xmlns:a="http://schemas.openxmlformats.org/drawingml/2006/main">
               <a:ext uri="{FF2B5EF4-FFF2-40B4-BE49-F238E27FC236}">
-                <a16:creationId xmlns:a16="http://schemas.microsoft.com/office/drawing/2014/main" id="{4CC97069-58A2-4B46-8666-2A48A71987C9}"/>
+                <a16:creationId xmlns:a16="http://schemas.microsoft.com/office/drawing/2014/main" id="{EE2B5B3B-99A2-4C10-8012-8EAB7808E1D9}"/>
               </a:ext>
             </a:extLst>
           </p:cNvPr>
@@ -20923,7 +20923,7 @@
           <p:cNvPr id="5" name="">
             <a:extLst xmlns:a="http://schemas.openxmlformats.org/drawingml/2006/main">
               <a:ext uri="{FF2B5EF4-FFF2-40B4-BE49-F238E27FC236}">
-                <a16:creationId xmlns:a16="http://schemas.microsoft.com/office/drawing/2014/main" id="{7CA4A30C-80C7-436F-B2FC-FC131B25C87A}"/>
+                <a16:creationId xmlns:a16="http://schemas.microsoft.com/office/drawing/2014/main" id="{F09581BF-1929-4643-A2A5-6C4CA1785554}"/>
               </a:ext>
             </a:extLst>
           </p:cNvPr>
@@ -20978,7 +20978,7 @@
     </p:spTree>
     <p:extLst>
       <p:ext uri="{BB962C8B-B14F-4D97-AF65-F5344CB8AC3E}">
-        <p14:creationId xmlns:p14="http://schemas.microsoft.com/office/powerpoint/2010/main" val="124296859"/>
+        <p14:creationId xmlns:p14="http://schemas.microsoft.com/office/powerpoint/2010/main" val="1422464478"/>
       </p:ext>
     </p:extLst>
   </p:cSld>
@@ -21009,7 +21009,7 @@
           <p:cNvPr id="20" name="slide-title">
             <a:extLst xmlns:a="http://schemas.openxmlformats.org/drawingml/2006/main">
               <a:ext uri="{FF2B5EF4-FFF2-40B4-BE49-F238E27FC236}">
-                <a16:creationId xmlns:a16="http://schemas.microsoft.com/office/drawing/2014/main" id="{7594702A-70CD-4FE3-9CD9-FD35C593B832}"/>
+                <a16:creationId xmlns:a16="http://schemas.microsoft.com/office/drawing/2014/main" id="{4AEEB5F8-AF8A-482E-B52F-033280C8811C}"/>
               </a:ext>
             </a:extLst>
           </p:cNvPr>
@@ -21066,7 +21066,7 @@
           <p:cNvPr id="2" name="slide-subtitle">
             <a:extLst xmlns:a="http://schemas.openxmlformats.org/drawingml/2006/main">
               <a:ext uri="{FF2B5EF4-FFF2-40B4-BE49-F238E27FC236}">
-                <a16:creationId xmlns:a16="http://schemas.microsoft.com/office/drawing/2014/main" id="{47AD62C7-094F-405B-A577-E737B9C356FA}"/>
+                <a16:creationId xmlns:a16="http://schemas.microsoft.com/office/drawing/2014/main" id="{9798A8FC-5F20-4230-89D4-7E48752C44D5}"/>
               </a:ext>
             </a:extLst>
           </p:cNvPr>
@@ -21123,7 +21123,7 @@
           <p:cNvPr id="3" name="">
             <a:extLst xmlns:a="http://schemas.openxmlformats.org/drawingml/2006/main">
               <a:ext uri="{FF2B5EF4-FFF2-40B4-BE49-F238E27FC236}">
-                <a16:creationId xmlns:a16="http://schemas.microsoft.com/office/drawing/2014/main" id="{9E7C064E-F6FF-45DC-9FF6-0EC65D3A61FB}"/>
+                <a16:creationId xmlns:a16="http://schemas.microsoft.com/office/drawing/2014/main" id="{E0EC97A7-F902-466D-95A5-EC2A20F967D7}"/>
               </a:ext>
             </a:extLst>
           </p:cNvPr>
@@ -21161,7 +21161,7 @@
         </p:xfrm>
         <a:graphic xmlns:a="http://schemas.openxmlformats.org/drawingml/2006/main">
           <a:graphicData uri="http://schemas.openxmlformats.org/drawingml/2006/chart">
-            <c:chart xmlns:r="http://schemas.openxmlformats.org/officeDocument/2006/relationships" xmlns:c="http://schemas.openxmlformats.org/drawingml/2006/chart" r:id="R45b437be2ad54e1d"/>
+            <c:chart xmlns:r="http://schemas.openxmlformats.org/officeDocument/2006/relationships" xmlns:c="http://schemas.openxmlformats.org/drawingml/2006/chart" r:id="R053257c6888c4eff"/>
           </a:graphicData>
         </a:graphic>
       </p:graphicFrame>
@@ -21170,7 +21170,7 @@
           <p:cNvPr id="5" name="">
             <a:extLst xmlns:a="http://schemas.openxmlformats.org/drawingml/2006/main">
               <a:ext uri="{FF2B5EF4-FFF2-40B4-BE49-F238E27FC236}">
-                <a16:creationId xmlns:a16="http://schemas.microsoft.com/office/drawing/2014/main" id="{B0707B65-DCAE-47A0-9646-9E1ABA796E6C}"/>
+                <a16:creationId xmlns:a16="http://schemas.microsoft.com/office/drawing/2014/main" id="{220E105E-D12F-4B0E-8BC0-B09DC415F913}"/>
               </a:ext>
             </a:extLst>
           </p:cNvPr>
@@ -21227,7 +21227,7 @@
           <p:cNvPr id="6" name="">
             <a:extLst xmlns:a="http://schemas.openxmlformats.org/drawingml/2006/main">
               <a:ext uri="{FF2B5EF4-FFF2-40B4-BE49-F238E27FC236}">
-                <a16:creationId xmlns:a16="http://schemas.microsoft.com/office/drawing/2014/main" id="{023D09AC-84C6-4487-966D-FA2057D7713B}"/>
+                <a16:creationId xmlns:a16="http://schemas.microsoft.com/office/drawing/2014/main" id="{BE16DAB1-C534-4E9F-AA26-9B114C0A7311}"/>
               </a:ext>
             </a:extLst>
           </p:cNvPr>
@@ -21284,7 +21284,7 @@
           <p:cNvPr id="7" name="">
             <a:extLst xmlns:a="http://schemas.openxmlformats.org/drawingml/2006/main">
               <a:ext uri="{FF2B5EF4-FFF2-40B4-BE49-F238E27FC236}">
-                <a16:creationId xmlns:a16="http://schemas.microsoft.com/office/drawing/2014/main" id="{C75A0C9F-52F1-4033-ACCA-95102A1767A4}"/>
+                <a16:creationId xmlns:a16="http://schemas.microsoft.com/office/drawing/2014/main" id="{CE48813B-800C-43EA-9EF8-2833726205D5}"/>
               </a:ext>
             </a:extLst>
           </p:cNvPr>
@@ -21314,7 +21314,7 @@
           <p:cNvPr id="8" name="">
             <a:extLst xmlns:a="http://schemas.openxmlformats.org/drawingml/2006/main">
               <a:ext uri="{FF2B5EF4-FFF2-40B4-BE49-F238E27FC236}">
-                <a16:creationId xmlns:a16="http://schemas.microsoft.com/office/drawing/2014/main" id="{34FE9B85-EE4B-48AE-A48A-CC9ED9A9AC13}"/>
+                <a16:creationId xmlns:a16="http://schemas.microsoft.com/office/drawing/2014/main" id="{5CEF2EBF-70D2-466A-993A-4643C9B9DDE7}"/>
               </a:ext>
             </a:extLst>
           </p:cNvPr>
@@ -21371,7 +21371,7 @@
           <p:cNvPr id="9" name="">
             <a:extLst xmlns:a="http://schemas.openxmlformats.org/drawingml/2006/main">
               <a:ext uri="{FF2B5EF4-FFF2-40B4-BE49-F238E27FC236}">
-                <a16:creationId xmlns:a16="http://schemas.microsoft.com/office/drawing/2014/main" id="{347A4122-E29D-407D-9BF6-A588BF2E8E5F}"/>
+                <a16:creationId xmlns:a16="http://schemas.microsoft.com/office/drawing/2014/main" id="{74D4085D-71F6-4A5D-8022-A71AC6F92D51}"/>
               </a:ext>
             </a:extLst>
           </p:cNvPr>
@@ -21428,7 +21428,7 @@
           <p:cNvPr id="10" name="">
             <a:extLst xmlns:a="http://schemas.openxmlformats.org/drawingml/2006/main">
               <a:ext uri="{FF2B5EF4-FFF2-40B4-BE49-F238E27FC236}">
-                <a16:creationId xmlns:a16="http://schemas.microsoft.com/office/drawing/2014/main" id="{7F1200CE-5664-41F0-9275-FAFCD55D5DFB}"/>
+                <a16:creationId xmlns:a16="http://schemas.microsoft.com/office/drawing/2014/main" id="{F4902483-4EBA-41FF-9FA6-36FC2218F00D}"/>
               </a:ext>
             </a:extLst>
           </p:cNvPr>
@@ -21458,7 +21458,7 @@
           <p:cNvPr id="11" name="">
             <a:extLst xmlns:a="http://schemas.openxmlformats.org/drawingml/2006/main">
               <a:ext uri="{FF2B5EF4-FFF2-40B4-BE49-F238E27FC236}">
-                <a16:creationId xmlns:a16="http://schemas.microsoft.com/office/drawing/2014/main" id="{865B93B7-84A0-43BE-907C-1AECD4C896F9}"/>
+                <a16:creationId xmlns:a16="http://schemas.microsoft.com/office/drawing/2014/main" id="{9EC44E3A-467E-4B66-B3A3-D12061B6A205}"/>
               </a:ext>
             </a:extLst>
           </p:cNvPr>
@@ -21515,7 +21515,7 @@
           <p:cNvPr id="12" name="">
             <a:extLst xmlns:a="http://schemas.openxmlformats.org/drawingml/2006/main">
               <a:ext uri="{FF2B5EF4-FFF2-40B4-BE49-F238E27FC236}">
-                <a16:creationId xmlns:a16="http://schemas.microsoft.com/office/drawing/2014/main" id="{A4EB5E60-99C8-432A-8999-D9DEA5E3C6AF}"/>
+                <a16:creationId xmlns:a16="http://schemas.microsoft.com/office/drawing/2014/main" id="{B21C73EC-5A7A-4331-90DE-A87505E0B653}"/>
               </a:ext>
             </a:extLst>
           </p:cNvPr>
@@ -21572,7 +21572,7 @@
           <p:cNvPr id="13" name="">
             <a:extLst xmlns:a="http://schemas.openxmlformats.org/drawingml/2006/main">
               <a:ext uri="{FF2B5EF4-FFF2-40B4-BE49-F238E27FC236}">
-                <a16:creationId xmlns:a16="http://schemas.microsoft.com/office/drawing/2014/main" id="{397CCE73-CF5E-4952-888F-6CB90C97A878}"/>
+                <a16:creationId xmlns:a16="http://schemas.microsoft.com/office/drawing/2014/main" id="{E0447685-4418-4A24-A0B5-02342DB4A08D}"/>
               </a:ext>
             </a:extLst>
           </p:cNvPr>
@@ -21602,7 +21602,7 @@
           <p:cNvPr id="14" name="">
             <a:extLst xmlns:a="http://schemas.openxmlformats.org/drawingml/2006/main">
               <a:ext uri="{FF2B5EF4-FFF2-40B4-BE49-F238E27FC236}">
-                <a16:creationId xmlns:a16="http://schemas.microsoft.com/office/drawing/2014/main" id="{9DDC284F-692C-4C33-B92F-3C108A832E1F}"/>
+                <a16:creationId xmlns:a16="http://schemas.microsoft.com/office/drawing/2014/main" id="{0CB8431B-5F2B-49C0-804D-83518ECC631C}"/>
               </a:ext>
             </a:extLst>
           </p:cNvPr>
@@ -21659,7 +21659,7 @@
           <p:cNvPr id="15" name="">
             <a:extLst xmlns:a="http://schemas.openxmlformats.org/drawingml/2006/main">
               <a:ext uri="{FF2B5EF4-FFF2-40B4-BE49-F238E27FC236}">
-                <a16:creationId xmlns:a16="http://schemas.microsoft.com/office/drawing/2014/main" id="{C3F0EA1A-1C48-4673-AE86-8C39A68F62EE}"/>
+                <a16:creationId xmlns:a16="http://schemas.microsoft.com/office/drawing/2014/main" id="{45FBF4D7-4774-4137-B75E-A8C2DFB9CB48}"/>
               </a:ext>
             </a:extLst>
           </p:cNvPr>
@@ -21716,7 +21716,7 @@
           <p:cNvPr id="16" name="">
             <a:extLst xmlns:a="http://schemas.openxmlformats.org/drawingml/2006/main">
               <a:ext uri="{FF2B5EF4-FFF2-40B4-BE49-F238E27FC236}">
-                <a16:creationId xmlns:a16="http://schemas.microsoft.com/office/drawing/2014/main" id="{F81C81DD-4000-4B9C-91E1-AF4B50420ACF}"/>
+                <a16:creationId xmlns:a16="http://schemas.microsoft.com/office/drawing/2014/main" id="{F2820EE5-F57F-41E7-B472-798359BB6D23}"/>
               </a:ext>
             </a:extLst>
           </p:cNvPr>
@@ -21746,7 +21746,7 @@
           <p:cNvPr id="17" name="">
             <a:extLst xmlns:a="http://schemas.openxmlformats.org/drawingml/2006/main">
               <a:ext uri="{FF2B5EF4-FFF2-40B4-BE49-F238E27FC236}">
-                <a16:creationId xmlns:a16="http://schemas.microsoft.com/office/drawing/2014/main" id="{D39C4F42-0D7E-4FFC-83C5-39B69FF00C20}"/>
+                <a16:creationId xmlns:a16="http://schemas.microsoft.com/office/drawing/2014/main" id="{6ACD0BD6-DB79-4F18-A57D-14C01FF0E81D}"/>
               </a:ext>
             </a:extLst>
           </p:cNvPr>
@@ -21803,7 +21803,7 @@
           <p:cNvPr id="18" name="">
             <a:extLst xmlns:a="http://schemas.openxmlformats.org/drawingml/2006/main">
               <a:ext uri="{FF2B5EF4-FFF2-40B4-BE49-F238E27FC236}">
-                <a16:creationId xmlns:a16="http://schemas.microsoft.com/office/drawing/2014/main" id="{80F98C30-10F9-4FB8-A83F-FEE60BE503E5}"/>
+                <a16:creationId xmlns:a16="http://schemas.microsoft.com/office/drawing/2014/main" id="{3913548F-2B97-4032-9A6D-67A0B2A1043C}"/>
               </a:ext>
             </a:extLst>
           </p:cNvPr>
@@ -21860,7 +21860,7 @@
           <p:cNvPr id="19" name="">
             <a:extLst xmlns:a="http://schemas.openxmlformats.org/drawingml/2006/main">
               <a:ext uri="{FF2B5EF4-FFF2-40B4-BE49-F238E27FC236}">
-                <a16:creationId xmlns:a16="http://schemas.microsoft.com/office/drawing/2014/main" id="{3B15177F-66AF-4F96-AF48-C892465516DF}"/>
+                <a16:creationId xmlns:a16="http://schemas.microsoft.com/office/drawing/2014/main" id="{4058F0B4-F8CC-4581-9158-00C8445887BB}"/>
               </a:ext>
             </a:extLst>
           </p:cNvPr>
@@ -21915,7 +21915,7 @@
     </p:spTree>
     <p:extLst>
       <p:ext uri="{BB962C8B-B14F-4D97-AF65-F5344CB8AC3E}">
-        <p14:creationId xmlns:p14="http://schemas.microsoft.com/office/powerpoint/2010/main" val="1801433185"/>
+        <p14:creationId xmlns:p14="http://schemas.microsoft.com/office/powerpoint/2010/main" val="1274111079"/>
       </p:ext>
     </p:extLst>
   </p:cSld>
@@ -21946,7 +21946,7 @@
           <p:cNvPr id="6" name="slide-title">
             <a:extLst xmlns:a="http://schemas.openxmlformats.org/drawingml/2006/main">
               <a:ext uri="{FF2B5EF4-FFF2-40B4-BE49-F238E27FC236}">
-                <a16:creationId xmlns:a16="http://schemas.microsoft.com/office/drawing/2014/main" id="{2DDA5AFC-4BCE-4EFC-AECC-FAC79628D8E6}"/>
+                <a16:creationId xmlns:a16="http://schemas.microsoft.com/office/drawing/2014/main" id="{5B929300-8F09-4073-9A23-0D315CEB305C}"/>
               </a:ext>
             </a:extLst>
           </p:cNvPr>
@@ -22003,7 +22003,7 @@
           <p:cNvPr id="2" name="slide-subtitle">
             <a:extLst xmlns:a="http://schemas.openxmlformats.org/drawingml/2006/main">
               <a:ext uri="{FF2B5EF4-FFF2-40B4-BE49-F238E27FC236}">
-                <a16:creationId xmlns:a16="http://schemas.microsoft.com/office/drawing/2014/main" id="{B2CAD70A-EC45-4B21-9313-BFE642B9BC3E}"/>
+                <a16:creationId xmlns:a16="http://schemas.microsoft.com/office/drawing/2014/main" id="{70A58581-B195-473D-B533-6E3E72CD6EA1}"/>
               </a:ext>
             </a:extLst>
           </p:cNvPr>
@@ -22060,7 +22060,7 @@
           <p:cNvPr id="3" name="">
             <a:extLst xmlns:a="http://schemas.openxmlformats.org/drawingml/2006/main">
               <a:ext uri="{FF2B5EF4-FFF2-40B4-BE49-F238E27FC236}">
-                <a16:creationId xmlns:a16="http://schemas.microsoft.com/office/drawing/2014/main" id="{285838F5-DB11-4C72-85C8-FDC9440DD39C}"/>
+                <a16:creationId xmlns:a16="http://schemas.microsoft.com/office/drawing/2014/main" id="{4A61C285-5549-4E75-A4CA-452E435D202C}"/>
               </a:ext>
             </a:extLst>
           </p:cNvPr>
@@ -22095,7 +22095,7 @@
           <p:nvPr/>
         </p:nvPicPr>
         <p:blipFill>
-          <a:blip xmlns:r="http://schemas.openxmlformats.org/officeDocument/2006/relationships" xmlns:a="http://schemas.openxmlformats.org/drawingml/2006/main" r:embed="R76c3b67a599148f6"/>
+          <a:blip xmlns:r="http://schemas.openxmlformats.org/officeDocument/2006/relationships" xmlns:a="http://schemas.openxmlformats.org/drawingml/2006/main" r:embed="R8fcb2f32ad2e46d4"/>
           <a:stretch xmlns:a="http://schemas.openxmlformats.org/drawingml/2006/main"/>
         </p:blipFill>
         <p:spPr>
@@ -22113,7 +22113,7 @@
           <p:cNvPr id="5" name="">
             <a:extLst xmlns:a="http://schemas.openxmlformats.org/drawingml/2006/main">
               <a:ext uri="{FF2B5EF4-FFF2-40B4-BE49-F238E27FC236}">
-                <a16:creationId xmlns:a16="http://schemas.microsoft.com/office/drawing/2014/main" id="{7B0D3E32-9840-488D-9609-30A53E20BD7D}"/>
+                <a16:creationId xmlns:a16="http://schemas.microsoft.com/office/drawing/2014/main" id="{E84B2D11-EB41-49D0-AF3C-6A0252CFDD76}"/>
               </a:ext>
             </a:extLst>
           </p:cNvPr>
@@ -22168,7 +22168,7 @@
     </p:spTree>
     <p:extLst>
       <p:ext uri="{BB962C8B-B14F-4D97-AF65-F5344CB8AC3E}">
-        <p14:creationId xmlns:p14="http://schemas.microsoft.com/office/powerpoint/2010/main" val="1682584336"/>
+        <p14:creationId xmlns:p14="http://schemas.microsoft.com/office/powerpoint/2010/main" val="895913556"/>
       </p:ext>
     </p:extLst>
   </p:cSld>
